--- a/docs/Atalar-sozu-teqdimat.pptx
+++ b/docs/Atalar-sozu-teqdimat.pptx
@@ -3149,7 +3149,7 @@
         <p:spPr>
           <a:xfrm>
             <a:off x="0" y="0"/>
-            <a:ext cx="256032" cy="6858000"/>
+            <a:ext cx="201168" cy="6858000"/>
           </a:xfrm>
           <a:prstGeom prst="rect">
             <a:avLst/>
@@ -3183,31 +3183,53 @@
           </a:p>
         </p:txBody>
       </p:sp>
-      <p:sp>
-        <p:nvSpPr>
-          <p:cNvPr id="4" name="TextBox 3"/>
-          <p:cNvSpPr txBox="1"/>
-          <p:nvPr/>
-        </p:nvSpPr>
-        <p:spPr>
-          <a:xfrm>
-            <a:off x="731520" y="1554480"/>
-            <a:ext cx="10058400" cy="365760"/>
-          </a:xfrm>
-          <a:prstGeom prst="rect">
-            <a:avLst/>
-          </a:prstGeom>
-          <a:noFill/>
-        </p:spPr>
-        <p:txBody>
-          <a:bodyPr wrap="square" lIns="0" rIns="0" tIns="0" bIns="0" anchor="t"/>
-          <a:lstStyle/>
-          <a:p>
-            <a:pPr algn="l">
-              <a:spcAft>
-                <a:spcPts val="0"/>
-              </a:spcAft>
-            </a:pPr>
+      <p:pic>
+        <p:nvPicPr>
+          <p:cNvPr id="4" name="Picture 3" descr="60851bc0-3b8f-41f8-8f09-8a137255ad9a.jpg"/>
+          <p:cNvPicPr>
+            <a:picLocks noChangeAspect="1"/>
+          </p:cNvPicPr>
+          <p:nvPr/>
+        </p:nvPicPr>
+        <p:blipFill>
+          <a:blip r:embed="rId2"/>
+          <a:stretch>
+            <a:fillRect/>
+          </a:stretch>
+        </p:blipFill>
+        <p:spPr>
+          <a:xfrm>
+            <a:off x="5394960" y="1325880"/>
+            <a:ext cx="6446520" cy="3621024"/>
+          </a:xfrm>
+          <a:prstGeom prst="rect">
+            <a:avLst/>
+          </a:prstGeom>
+        </p:spPr>
+      </p:pic>
+      <p:sp>
+        <p:nvSpPr>
+          <p:cNvPr id="5" name="TextBox 4"/>
+          <p:cNvSpPr txBox="1"/>
+          <p:nvPr/>
+        </p:nvSpPr>
+        <p:spPr>
+          <a:xfrm>
+            <a:off x="548640" y="1554480"/>
+            <a:ext cx="4754880" cy="320040"/>
+          </a:xfrm>
+          <a:prstGeom prst="rect">
+            <a:avLst/>
+          </a:prstGeom>
+          <a:noFill/>
+        </p:spPr>
+        <p:txBody>
+          <a:bodyPr wrap="square" lIns="0" rIns="0" tIns="0" bIns="0" anchor="t">
+            <a:spAutoFit/>
+          </a:bodyPr>
+          <a:lstStyle/>
+          <a:p>
+            <a:pPr algn="l"/>
             <a:r>
               <a:rPr sz="1400" b="1">
                 <a:solidFill>
@@ -3222,31 +3244,29 @@
       </p:sp>
       <p:sp>
         <p:nvSpPr>
-          <p:cNvPr id="5" name="TextBox 4"/>
-          <p:cNvSpPr txBox="1"/>
-          <p:nvPr/>
-        </p:nvSpPr>
-        <p:spPr>
-          <a:xfrm>
-            <a:off x="731520" y="1965960"/>
-            <a:ext cx="10058400" cy="1463040"/>
-          </a:xfrm>
-          <a:prstGeom prst="rect">
-            <a:avLst/>
-          </a:prstGeom>
-          <a:noFill/>
-        </p:spPr>
-        <p:txBody>
-          <a:bodyPr wrap="square" lIns="0" rIns="0" tIns="0" bIns="0" anchor="t"/>
-          <a:lstStyle/>
-          <a:p>
-            <a:pPr algn="l">
-              <a:spcAft>
-                <a:spcPts val="0"/>
-              </a:spcAft>
-            </a:pPr>
-            <a:r>
-              <a:rPr sz="5400" b="1">
+          <p:cNvPr id="6" name="TextBox 5"/>
+          <p:cNvSpPr txBox="1"/>
+          <p:nvPr/>
+        </p:nvSpPr>
+        <p:spPr>
+          <a:xfrm>
+            <a:off x="548640" y="1965960"/>
+            <a:ext cx="4846320" cy="1645920"/>
+          </a:xfrm>
+          <a:prstGeom prst="rect">
+            <a:avLst/>
+          </a:prstGeom>
+          <a:noFill/>
+        </p:spPr>
+        <p:txBody>
+          <a:bodyPr wrap="square" lIns="0" rIns="0" tIns="0" bIns="0" anchor="t">
+            <a:spAutoFit/>
+          </a:bodyPr>
+          <a:lstStyle/>
+          <a:p>
+            <a:pPr algn="l"/>
+            <a:r>
+              <a:rPr sz="3600" b="1">
                 <a:solidFill>
                   <a:srgbClr val="1A1614"/>
                 </a:solidFill>
@@ -3260,68 +3280,65 @@
       </p:sp>
       <p:sp>
         <p:nvSpPr>
-          <p:cNvPr id="6" name="TextBox 5"/>
-          <p:cNvSpPr txBox="1"/>
-          <p:nvPr/>
-        </p:nvSpPr>
-        <p:spPr>
-          <a:xfrm>
-            <a:off x="731520" y="4114800"/>
-            <a:ext cx="8229600" cy="731520"/>
-          </a:xfrm>
-          <a:prstGeom prst="rect">
-            <a:avLst/>
-          </a:prstGeom>
-          <a:noFill/>
-        </p:spPr>
-        <p:txBody>
-          <a:bodyPr wrap="square" lIns="0" rIns="0" tIns="0" bIns="0" anchor="t"/>
-          <a:lstStyle/>
-          <a:p>
-            <a:pPr algn="l">
-              <a:spcAft>
-                <a:spcPts val="0"/>
-              </a:spcAft>
-            </a:pPr>
-            <a:r>
-              <a:rPr sz="2200" b="0">
+          <p:cNvPr id="7" name="TextBox 6"/>
+          <p:cNvSpPr txBox="1"/>
+          <p:nvPr/>
+        </p:nvSpPr>
+        <p:spPr>
+          <a:xfrm>
+            <a:off x="548640" y="3931920"/>
+            <a:ext cx="4754880" cy="822960"/>
+          </a:xfrm>
+          <a:prstGeom prst="rect">
+            <a:avLst/>
+          </a:prstGeom>
+          <a:noFill/>
+        </p:spPr>
+        <p:txBody>
+          <a:bodyPr wrap="square" lIns="0" rIns="0" tIns="0" bIns="0" anchor="t">
+            <a:spAutoFit/>
+          </a:bodyPr>
+          <a:lstStyle/>
+          <a:p>
+            <a:pPr algn="l"/>
+            <a:r>
+              <a:rPr sz="1800" b="0">
                 <a:solidFill>
                   <a:srgbClr val="6B625A"/>
                 </a:solidFill>
                 <a:latin typeface="Calibri"/>
               </a:rPr>
-              <a:t>3925 söz. On bir mövzu. Hər səhər bir öyüd.</a:t>
-            </a:r>
-          </a:p>
-        </p:txBody>
-      </p:sp>
-      <p:sp>
-        <p:nvSpPr>
-          <p:cNvPr id="7" name="TextBox 6"/>
-          <p:cNvSpPr txBox="1"/>
-          <p:nvPr/>
-        </p:nvSpPr>
-        <p:spPr>
-          <a:xfrm>
-            <a:off x="731520" y="5760720"/>
-            <a:ext cx="7315200" cy="365760"/>
-          </a:xfrm>
-          <a:prstGeom prst="rect">
-            <a:avLst/>
-          </a:prstGeom>
-          <a:noFill/>
-        </p:spPr>
-        <p:txBody>
-          <a:bodyPr wrap="square" lIns="0" rIns="0" tIns="0" bIns="0" anchor="t"/>
-          <a:lstStyle/>
-          <a:p>
-            <a:pPr algn="l">
-              <a:spcAft>
-                <a:spcPts val="0"/>
-              </a:spcAft>
-            </a:pPr>
-            <a:r>
-              <a:rPr sz="1800" b="1">
+              <a:t>3913 söz. On iki mövzu.
+Hər səhər bir öyüd.</a:t>
+            </a:r>
+          </a:p>
+        </p:txBody>
+      </p:sp>
+      <p:sp>
+        <p:nvSpPr>
+          <p:cNvPr id="8" name="TextBox 7"/>
+          <p:cNvSpPr txBox="1"/>
+          <p:nvPr/>
+        </p:nvSpPr>
+        <p:spPr>
+          <a:xfrm>
+            <a:off x="548640" y="5120640"/>
+            <a:ext cx="4754880" cy="365760"/>
+          </a:xfrm>
+          <a:prstGeom prst="rect">
+            <a:avLst/>
+          </a:prstGeom>
+          <a:noFill/>
+        </p:spPr>
+        <p:txBody>
+          <a:bodyPr wrap="square" lIns="0" rIns="0" tIns="0" bIns="0" anchor="t">
+            <a:spAutoFit/>
+          </a:bodyPr>
+          <a:lstStyle/>
+          <a:p>
+            <a:pPr algn="l"/>
+            <a:r>
+              <a:rPr sz="1600" b="1">
                 <a:solidFill>
                   <a:srgbClr val="1A1614"/>
                 </a:solidFill>
@@ -3401,25 +3418,23 @@
         </p:nvSpPr>
         <p:spPr>
           <a:xfrm>
-            <a:off x="731520" y="1828800"/>
-            <a:ext cx="10515600" cy="1463040"/>
-          </a:xfrm>
-          <a:prstGeom prst="rect">
-            <a:avLst/>
-          </a:prstGeom>
-          <a:noFill/>
-        </p:spPr>
-        <p:txBody>
-          <a:bodyPr wrap="square" lIns="0" rIns="0" tIns="0" bIns="0" anchor="t"/>
-          <a:lstStyle/>
-          <a:p>
-            <a:pPr algn="l">
-              <a:spcAft>
-                <a:spcPts val="0"/>
-              </a:spcAft>
-            </a:pPr>
-            <a:r>
-              <a:rPr sz="4400" b="1">
+            <a:off x="731520" y="1737360"/>
+            <a:ext cx="10515600" cy="1645920"/>
+          </a:xfrm>
+          <a:prstGeom prst="rect">
+            <a:avLst/>
+          </a:prstGeom>
+          <a:noFill/>
+        </p:spPr>
+        <p:txBody>
+          <a:bodyPr wrap="square" lIns="0" rIns="0" tIns="0" bIns="0" anchor="t">
+            <a:spAutoFit/>
+          </a:bodyPr>
+          <a:lstStyle/>
+          <a:p>
+            <a:pPr algn="l"/>
+            <a:r>
+              <a:rPr sz="4600" b="1">
                 <a:solidFill>
                   <a:srgbClr val="F6F1E7"/>
                 </a:solidFill>
@@ -3448,14 +3463,12 @@
           <a:noFill/>
         </p:spPr>
         <p:txBody>
-          <a:bodyPr wrap="square" lIns="0" rIns="0" tIns="0" bIns="0" anchor="t"/>
-          <a:lstStyle/>
-          <a:p>
-            <a:pPr algn="l">
-              <a:spcAft>
-                <a:spcPts val="0"/>
-              </a:spcAft>
-            </a:pPr>
+          <a:bodyPr wrap="square" lIns="0" rIns="0" tIns="0" bIns="0" anchor="t">
+            <a:spAutoFit/>
+          </a:bodyPr>
+          <a:lstStyle/>
+          <a:p>
+            <a:pPr algn="l"/>
             <a:r>
               <a:rPr sz="2400" b="1">
                 <a:solidFill>
@@ -3477,22 +3490,20 @@
         <p:spPr>
           <a:xfrm>
             <a:off x="731520" y="4572000"/>
-            <a:ext cx="9144000" cy="365760"/>
-          </a:xfrm>
-          <a:prstGeom prst="rect">
-            <a:avLst/>
-          </a:prstGeom>
-          <a:noFill/>
-        </p:spPr>
-        <p:txBody>
-          <a:bodyPr wrap="square" lIns="0" rIns="0" tIns="0" bIns="0" anchor="t"/>
-          <a:lstStyle/>
-          <a:p>
-            <a:pPr algn="l">
-              <a:spcAft>
-                <a:spcPts val="0"/>
-              </a:spcAft>
-            </a:pPr>
+            <a:ext cx="9144000" cy="411480"/>
+          </a:xfrm>
+          <a:prstGeom prst="rect">
+            <a:avLst/>
+          </a:prstGeom>
+          <a:noFill/>
+        </p:spPr>
+        <p:txBody>
+          <a:bodyPr wrap="square" lIns="0" rIns="0" tIns="0" bIns="0" anchor="t">
+            <a:spAutoFit/>
+          </a:bodyPr>
+          <a:lstStyle/>
+          <a:p>
+            <a:pPr algn="l"/>
             <a:r>
               <a:rPr sz="1800" b="0">
                 <a:solidFill>
@@ -3574,23 +3585,21 @@
         </p:nvSpPr>
         <p:spPr>
           <a:xfrm>
-            <a:off x="640080" y="411480"/>
-            <a:ext cx="10972800" cy="731520"/>
-          </a:xfrm>
-          <a:prstGeom prst="rect">
-            <a:avLst/>
-          </a:prstGeom>
-          <a:noFill/>
-        </p:spPr>
-        <p:txBody>
-          <a:bodyPr wrap="square" lIns="0" rIns="0" tIns="0" bIns="0" anchor="t"/>
-          <a:lstStyle/>
-          <a:p>
-            <a:pPr algn="l">
-              <a:spcAft>
-                <a:spcPts val="0"/>
-              </a:spcAft>
-            </a:pPr>
+            <a:off x="548640" y="365760"/>
+            <a:ext cx="10972800" cy="640080"/>
+          </a:xfrm>
+          <a:prstGeom prst="rect">
+            <a:avLst/>
+          </a:prstGeom>
+          <a:noFill/>
+        </p:spPr>
+        <p:txBody>
+          <a:bodyPr wrap="square" lIns="0" rIns="0" tIns="0" bIns="0" anchor="t">
+            <a:spAutoFit/>
+          </a:bodyPr>
+          <a:lstStyle/>
+          <a:p>
+            <a:pPr algn="l"/>
             <a:r>
               <a:rPr sz="3200" b="1">
                 <a:solidFill>
@@ -3598,7 +3607,7 @@
                 </a:solidFill>
                 <a:latin typeface="Calibri"/>
               </a:rPr>
-              <a:t>Söz var idi. Yer yox idi.</a:t>
+              <a:t>Bir yerdə, bir dildə.</a:t>
             </a:r>
           </a:p>
         </p:txBody>
@@ -3611,8 +3620,8 @@
         </p:nvSpPr>
         <p:spPr>
           <a:xfrm>
-            <a:off x="640080" y="1828800"/>
-            <a:ext cx="3520440" cy="3840480"/>
+            <a:off x="502920" y="1371600"/>
+            <a:ext cx="3611880" cy="4709160"/>
           </a:xfrm>
           <a:prstGeom prst="rect">
             <a:avLst/>
@@ -3646,49 +3655,30 @@
           </a:p>
         </p:txBody>
       </p:sp>
-      <p:sp>
-        <p:nvSpPr>
-          <p:cNvPr id="5" name="Rectangle 4"/>
-          <p:cNvSpPr/>
-          <p:nvPr/>
-        </p:nvSpPr>
-        <p:spPr>
-          <a:xfrm>
-            <a:off x="640080" y="1828800"/>
-            <a:ext cx="3520440" cy="109728"/>
-          </a:xfrm>
-          <a:prstGeom prst="rect">
-            <a:avLst/>
-          </a:prstGeom>
-          <a:solidFill>
-            <a:srgbClr val="9C2F2A"/>
-          </a:solidFill>
-          <a:ln>
-            <a:noFill/>
-          </a:ln>
-        </p:spPr>
-        <p:style>
-          <a:lnRef idx="1">
-            <a:schemeClr val="accent1"/>
-          </a:lnRef>
-          <a:fillRef idx="3">
-            <a:schemeClr val="accent1"/>
-          </a:fillRef>
-          <a:effectRef idx="2">
-            <a:schemeClr val="accent1"/>
-          </a:effectRef>
-          <a:fontRef idx="minor">
-            <a:schemeClr val="lt1"/>
-          </a:fontRef>
-        </p:style>
-        <p:txBody>
-          <a:bodyPr rtlCol="0" anchor="ctr"/>
-          <a:lstStyle/>
-          <a:p>
-            <a:pPr algn="ctr"/>
-          </a:p>
-        </p:txBody>
-      </p:sp>
+      <p:pic>
+        <p:nvPicPr>
+          <p:cNvPr id="5" name="Picture 4" descr="f8273dd4-9de2-4a9a-8866-452874fc30cc.jpg"/>
+          <p:cNvPicPr>
+            <a:picLocks noChangeAspect="1"/>
+          </p:cNvPicPr>
+          <p:nvPr/>
+        </p:nvPicPr>
+        <p:blipFill>
+          <a:blip r:embed="rId2"/>
+          <a:stretch>
+            <a:fillRect/>
+          </a:stretch>
+        </p:blipFill>
+        <p:spPr>
+          <a:xfrm>
+            <a:off x="1280160" y="1600200"/>
+            <a:ext cx="2057400" cy="2057400"/>
+          </a:xfrm>
+          <a:prstGeom prst="rect">
+            <a:avLst/>
+          </a:prstGeom>
+        </p:spPr>
+      </p:pic>
       <p:sp>
         <p:nvSpPr>
           <p:cNvPr id="6" name="TextBox 5"/>
@@ -3697,23 +3687,21 @@
         </p:nvSpPr>
         <p:spPr>
           <a:xfrm>
-            <a:off x="914400" y="2194560"/>
-            <a:ext cx="3017520" cy="548640"/>
-          </a:xfrm>
-          <a:prstGeom prst="rect">
-            <a:avLst/>
-          </a:prstGeom>
-          <a:noFill/>
-        </p:spPr>
-        <p:txBody>
-          <a:bodyPr wrap="square" lIns="0" rIns="0" tIns="0" bIns="0" anchor="t"/>
-          <a:lstStyle/>
-          <a:p>
-            <a:pPr algn="l">
-              <a:spcAft>
-                <a:spcPts val="0"/>
-              </a:spcAft>
-            </a:pPr>
+            <a:off x="777240" y="3794760"/>
+            <a:ext cx="3063240" cy="457200"/>
+          </a:xfrm>
+          <a:prstGeom prst="rect">
+            <a:avLst/>
+          </a:prstGeom>
+          <a:noFill/>
+        </p:spPr>
+        <p:txBody>
+          <a:bodyPr wrap="square" lIns="0" rIns="0" tIns="0" bIns="0" anchor="t">
+            <a:spAutoFit/>
+          </a:bodyPr>
+          <a:lstStyle/>
+          <a:p>
+            <a:pPr algn="l"/>
             <a:r>
               <a:rPr sz="2200" b="1">
                 <a:solidFill>
@@ -3721,7 +3709,7 @@
                 </a:solidFill>
                 <a:latin typeface="Calibri"/>
               </a:rPr>
-              <a:t>Kitabda</a:t>
+              <a:t>Axtar</a:t>
             </a:r>
           </a:p>
         </p:txBody>
@@ -3734,32 +3722,30 @@
         </p:nvSpPr>
         <p:spPr>
           <a:xfrm>
-            <a:off x="914400" y="3017520"/>
-            <a:ext cx="3017520" cy="2011680"/>
-          </a:xfrm>
-          <a:prstGeom prst="rect">
-            <a:avLst/>
-          </a:prstGeom>
-          <a:noFill/>
-        </p:spPr>
-        <p:txBody>
-          <a:bodyPr wrap="square" lIns="0" rIns="0" tIns="0" bIns="0" anchor="t"/>
-          <a:lstStyle/>
-          <a:p>
-            <a:pPr algn="l">
-              <a:spcAft>
-                <a:spcPts val="0"/>
-              </a:spcAft>
-            </a:pPr>
-            <a:r>
-              <a:rPr sz="1800" b="0">
+            <a:off x="777240" y="4297680"/>
+            <a:ext cx="3063240" cy="1280160"/>
+          </a:xfrm>
+          <a:prstGeom prst="rect">
+            <a:avLst/>
+          </a:prstGeom>
+          <a:noFill/>
+        </p:spPr>
+        <p:txBody>
+          <a:bodyPr wrap="square" lIns="0" rIns="0" tIns="0" bIns="0" anchor="t">
+            <a:spAutoFit/>
+          </a:bodyPr>
+          <a:lstStyle/>
+          <a:p>
+            <a:pPr algn="l"/>
+            <a:r>
+              <a:rPr sz="1600" b="0">
                 <a:solidFill>
                   <a:srgbClr val="1A1614"/>
                 </a:solidFill>
                 <a:latin typeface="Calibri"/>
               </a:rPr>
-              <a:t>Söz qalın kitabda qalır.
-Adam lazım olan sətri tapa bilmir.</a:t>
+              <a:t>Açar söz yaz.
+Uyğun atalar sözü gəlir.</a:t>
             </a:r>
           </a:p>
         </p:txBody>
@@ -3772,8 +3758,8 @@
         </p:nvSpPr>
         <p:spPr>
           <a:xfrm>
-            <a:off x="4389120" y="1828800"/>
-            <a:ext cx="3520440" cy="3840480"/>
+            <a:off x="4343400" y="1371600"/>
+            <a:ext cx="3611880" cy="4709160"/>
           </a:xfrm>
           <a:prstGeom prst="rect">
             <a:avLst/>
@@ -3807,49 +3793,30 @@
           </a:p>
         </p:txBody>
       </p:sp>
-      <p:sp>
-        <p:nvSpPr>
-          <p:cNvPr id="9" name="Rectangle 8"/>
-          <p:cNvSpPr/>
-          <p:nvPr/>
-        </p:nvSpPr>
-        <p:spPr>
-          <a:xfrm>
-            <a:off x="4389120" y="1828800"/>
-            <a:ext cx="3520440" cy="109728"/>
-          </a:xfrm>
-          <a:prstGeom prst="rect">
-            <a:avLst/>
-          </a:prstGeom>
-          <a:solidFill>
-            <a:srgbClr val="9C2F2A"/>
-          </a:solidFill>
-          <a:ln>
-            <a:noFill/>
-          </a:ln>
-        </p:spPr>
-        <p:style>
-          <a:lnRef idx="1">
-            <a:schemeClr val="accent1"/>
-          </a:lnRef>
-          <a:fillRef idx="3">
-            <a:schemeClr val="accent1"/>
-          </a:fillRef>
-          <a:effectRef idx="2">
-            <a:schemeClr val="accent1"/>
-          </a:effectRef>
-          <a:fontRef idx="minor">
-            <a:schemeClr val="lt1"/>
-          </a:fontRef>
-        </p:style>
-        <p:txBody>
-          <a:bodyPr rtlCol="0" anchor="ctr"/>
-          <a:lstStyle/>
-          <a:p>
-            <a:pPr algn="ctr"/>
-          </a:p>
-        </p:txBody>
-      </p:sp>
+      <p:pic>
+        <p:nvPicPr>
+          <p:cNvPr id="9" name="Picture 8" descr="a6a06ee9-72ad-43b1-a1d5-1b9e357f6ad7.jpg"/>
+          <p:cNvPicPr>
+            <a:picLocks noChangeAspect="1"/>
+          </p:cNvPicPr>
+          <p:nvPr/>
+        </p:nvPicPr>
+        <p:blipFill>
+          <a:blip r:embed="rId3"/>
+          <a:stretch>
+            <a:fillRect/>
+          </a:stretch>
+        </p:blipFill>
+        <p:spPr>
+          <a:xfrm>
+            <a:off x="5120640" y="1600200"/>
+            <a:ext cx="2057400" cy="2057400"/>
+          </a:xfrm>
+          <a:prstGeom prst="rect">
+            <a:avLst/>
+          </a:prstGeom>
+        </p:spPr>
+      </p:pic>
       <p:sp>
         <p:nvSpPr>
           <p:cNvPr id="10" name="TextBox 9"/>
@@ -3858,23 +3825,21 @@
         </p:nvSpPr>
         <p:spPr>
           <a:xfrm>
-            <a:off x="4663440" y="2194560"/>
-            <a:ext cx="3017520" cy="548640"/>
-          </a:xfrm>
-          <a:prstGeom prst="rect">
-            <a:avLst/>
-          </a:prstGeom>
-          <a:noFill/>
-        </p:spPr>
-        <p:txBody>
-          <a:bodyPr wrap="square" lIns="0" rIns="0" tIns="0" bIns="0" anchor="t"/>
-          <a:lstStyle/>
-          <a:p>
-            <a:pPr algn="l">
-              <a:spcAft>
-                <a:spcPts val="0"/>
-              </a:spcAft>
-            </a:pPr>
+            <a:off x="4617720" y="3794760"/>
+            <a:ext cx="3063240" cy="457200"/>
+          </a:xfrm>
+          <a:prstGeom prst="rect">
+            <a:avLst/>
+          </a:prstGeom>
+          <a:noFill/>
+        </p:spPr>
+        <p:txBody>
+          <a:bodyPr wrap="square" lIns="0" rIns="0" tIns="0" bIns="0" anchor="t">
+            <a:spAutoFit/>
+          </a:bodyPr>
+          <a:lstStyle/>
+          <a:p>
+            <a:pPr algn="l"/>
             <a:r>
               <a:rPr sz="2200" b="1">
                 <a:solidFill>
@@ -3882,7 +3847,7 @@
                 </a:solidFill>
                 <a:latin typeface="Calibri"/>
               </a:rPr>
-              <a:t>Söhbətdə</a:t>
+              <a:t>Danış</a:t>
             </a:r>
           </a:p>
         </p:txBody>
@@ -3895,32 +3860,30 @@
         </p:nvSpPr>
         <p:spPr>
           <a:xfrm>
-            <a:off x="4663440" y="3017520"/>
-            <a:ext cx="3017520" cy="2011680"/>
-          </a:xfrm>
-          <a:prstGeom prst="rect">
-            <a:avLst/>
-          </a:prstGeom>
-          <a:noFill/>
-        </p:spPr>
-        <p:txBody>
-          <a:bodyPr wrap="square" lIns="0" rIns="0" tIns="0" bIns="0" anchor="t"/>
-          <a:lstStyle/>
-          <a:p>
-            <a:pPr algn="l">
-              <a:spcAft>
-                <a:spcPts val="0"/>
-              </a:spcAft>
-            </a:pPr>
-            <a:r>
-              <a:rPr sz="1800" b="0">
+            <a:off x="4617720" y="4297680"/>
+            <a:ext cx="3063240" cy="1280160"/>
+          </a:xfrm>
+          <a:prstGeom prst="rect">
+            <a:avLst/>
+          </a:prstGeom>
+          <a:noFill/>
+        </p:spPr>
+        <p:txBody>
+          <a:bodyPr wrap="square" lIns="0" rIns="0" tIns="0" bIns="0" anchor="t">
+            <a:spAutoFit/>
+          </a:bodyPr>
+          <a:lstStyle/>
+          <a:p>
+            <a:pPr algn="l"/>
+            <a:r>
+              <a:rPr sz="1600" b="0">
                 <a:solidFill>
                   <a:srgbClr val="1A1614"/>
                 </a:solidFill>
                 <a:latin typeface="Calibri"/>
               </a:rPr>
-              <a:t>Vəziyyətə uyğun söz gəlmir
-ağla, çünki yaddaş səpələnib.</a:t>
+              <a:t>Vəziyyəti yaz.
+Yaxın sözü seçir.</a:t>
             </a:r>
           </a:p>
         </p:txBody>
@@ -3933,8 +3896,8 @@
         </p:nvSpPr>
         <p:spPr>
           <a:xfrm>
-            <a:off x="8138159" y="1828800"/>
-            <a:ext cx="3520440" cy="3840480"/>
+            <a:off x="8183880" y="1371600"/>
+            <a:ext cx="3611880" cy="4709160"/>
           </a:xfrm>
           <a:prstGeom prst="rect">
             <a:avLst/>
@@ -3968,49 +3931,30 @@
           </a:p>
         </p:txBody>
       </p:sp>
-      <p:sp>
-        <p:nvSpPr>
-          <p:cNvPr id="13" name="Rectangle 12"/>
-          <p:cNvSpPr/>
-          <p:nvPr/>
-        </p:nvSpPr>
-        <p:spPr>
-          <a:xfrm>
-            <a:off x="8138159" y="1828800"/>
-            <a:ext cx="3520440" cy="109728"/>
-          </a:xfrm>
-          <a:prstGeom prst="rect">
-            <a:avLst/>
-          </a:prstGeom>
-          <a:solidFill>
-            <a:srgbClr val="9C2F2A"/>
-          </a:solidFill>
-          <a:ln>
-            <a:noFill/>
-          </a:ln>
-        </p:spPr>
-        <p:style>
-          <a:lnRef idx="1">
-            <a:schemeClr val="accent1"/>
-          </a:lnRef>
-          <a:fillRef idx="3">
-            <a:schemeClr val="accent1"/>
-          </a:fillRef>
-          <a:effectRef idx="2">
-            <a:schemeClr val="accent1"/>
-          </a:effectRef>
-          <a:fontRef idx="minor">
-            <a:schemeClr val="lt1"/>
-          </a:fontRef>
-        </p:style>
-        <p:txBody>
-          <a:bodyPr rtlCol="0" anchor="ctr"/>
-          <a:lstStyle/>
-          <a:p>
-            <a:pPr algn="ctr"/>
-          </a:p>
-        </p:txBody>
-      </p:sp>
+      <p:pic>
+        <p:nvPicPr>
+          <p:cNvPr id="13" name="Picture 12" descr="0134bad9-a8a1-49cf-b15c-d4b708457aa5.jpg"/>
+          <p:cNvPicPr>
+            <a:picLocks noChangeAspect="1"/>
+          </p:cNvPicPr>
+          <p:nvPr/>
+        </p:nvPicPr>
+        <p:blipFill>
+          <a:blip r:embed="rId4"/>
+          <a:stretch>
+            <a:fillRect/>
+          </a:stretch>
+        </p:blipFill>
+        <p:spPr>
+          <a:xfrm>
+            <a:off x="8961120" y="1600200"/>
+            <a:ext cx="2057400" cy="2057400"/>
+          </a:xfrm>
+          <a:prstGeom prst="rect">
+            <a:avLst/>
+          </a:prstGeom>
+        </p:spPr>
+      </p:pic>
       <p:sp>
         <p:nvSpPr>
           <p:cNvPr id="14" name="TextBox 13"/>
@@ -4019,23 +3963,21 @@
         </p:nvSpPr>
         <p:spPr>
           <a:xfrm>
-            <a:off x="8412479" y="2194560"/>
-            <a:ext cx="3017520" cy="548640"/>
-          </a:xfrm>
-          <a:prstGeom prst="rect">
-            <a:avLst/>
-          </a:prstGeom>
-          <a:noFill/>
-        </p:spPr>
-        <p:txBody>
-          <a:bodyPr wrap="square" lIns="0" rIns="0" tIns="0" bIns="0" anchor="t"/>
-          <a:lstStyle/>
-          <a:p>
-            <a:pPr algn="l">
-              <a:spcAft>
-                <a:spcPts val="0"/>
-              </a:spcAft>
-            </a:pPr>
+            <a:off x="8458200" y="3794760"/>
+            <a:ext cx="3063240" cy="457200"/>
+          </a:xfrm>
+          <a:prstGeom prst="rect">
+            <a:avLst/>
+          </a:prstGeom>
+          <a:noFill/>
+        </p:spPr>
+        <p:txBody>
+          <a:bodyPr wrap="square" lIns="0" rIns="0" tIns="0" bIns="0" anchor="t">
+            <a:spAutoFit/>
+          </a:bodyPr>
+          <a:lstStyle/>
+          <a:p>
+            <a:pPr algn="l"/>
             <a:r>
               <a:rPr sz="2200" b="1">
                 <a:solidFill>
@@ -4043,7 +3985,7 @@
                 </a:solidFill>
                 <a:latin typeface="Calibri"/>
               </a:rPr>
-              <a:t>Gündə</a:t>
+              <a:t>Seç</a:t>
             </a:r>
           </a:p>
         </p:txBody>
@@ -4056,32 +3998,30 @@
         </p:nvSpPr>
         <p:spPr>
           <a:xfrm>
-            <a:off x="8412479" y="3017520"/>
-            <a:ext cx="3017520" cy="2011680"/>
-          </a:xfrm>
-          <a:prstGeom prst="rect">
-            <a:avLst/>
-          </a:prstGeom>
-          <a:noFill/>
-        </p:spPr>
-        <p:txBody>
-          <a:bodyPr wrap="square" lIns="0" rIns="0" tIns="0" bIns="0" anchor="t"/>
-          <a:lstStyle/>
-          <a:p>
-            <a:pPr algn="l">
-              <a:spcAft>
-                <a:spcPts val="0"/>
-              </a:spcAft>
-            </a:pPr>
-            <a:r>
-              <a:rPr sz="1800" b="0">
+            <a:off x="8458200" y="4297680"/>
+            <a:ext cx="3063240" cy="1280160"/>
+          </a:xfrm>
+          <a:prstGeom prst="rect">
+            <a:avLst/>
+          </a:prstGeom>
+          <a:noFill/>
+        </p:spPr>
+        <p:txBody>
+          <a:bodyPr wrap="square" lIns="0" rIns="0" tIns="0" bIns="0" anchor="t">
+            <a:spAutoFit/>
+          </a:bodyPr>
+          <a:lstStyle/>
+          <a:p>
+            <a:pPr algn="l"/>
+            <a:r>
+              <a:rPr sz="1600" b="0">
                 <a:solidFill>
                   <a:srgbClr val="1A1614"/>
                 </a:solidFill>
                 <a:latin typeface="Calibri"/>
               </a:rPr>
-              <a:t>Hər gün bir söz eşitmək üçün
-ayrıca vərdiş lazım idi.</a:t>
+              <a:t>On iki mövzu.
+Hər biri öz qutusunda.</a:t>
             </a:r>
           </a:p>
         </p:txBody>
@@ -4094,25 +4034,23 @@
         </p:nvSpPr>
         <p:spPr>
           <a:xfrm>
-            <a:off x="548640" y="6446520"/>
-            <a:ext cx="7315200" cy="274320"/>
-          </a:xfrm>
-          <a:prstGeom prst="rect">
-            <a:avLst/>
-          </a:prstGeom>
-          <a:noFill/>
-        </p:spPr>
-        <p:txBody>
-          <a:bodyPr wrap="square" lIns="0" rIns="0" tIns="0" bIns="0" anchor="t"/>
-          <a:lstStyle/>
-          <a:p>
-            <a:pPr algn="l">
-              <a:spcAft>
-                <a:spcPts val="0"/>
-              </a:spcAft>
-            </a:pPr>
-            <a:r>
-              <a:rPr sz="1100" b="0">
+            <a:off x="502920" y="6473952"/>
+            <a:ext cx="7315200" cy="256032"/>
+          </a:xfrm>
+          <a:prstGeom prst="rect">
+            <a:avLst/>
+          </a:prstGeom>
+          <a:noFill/>
+        </p:spPr>
+        <p:txBody>
+          <a:bodyPr wrap="square" lIns="0" rIns="0" tIns="0" bIns="0" anchor="t">
+            <a:spAutoFit/>
+          </a:bodyPr>
+          <a:lstStyle/>
+          <a:p>
+            <a:pPr algn="l"/>
+            <a:r>
+              <a:rPr sz="1200" b="0">
                 <a:solidFill>
                   <a:srgbClr val="6B625A"/>
                 </a:solidFill>
@@ -4131,25 +4069,23 @@
         </p:nvSpPr>
         <p:spPr>
           <a:xfrm>
-            <a:off x="10424160" y="6446520"/>
-            <a:ext cx="1280160" cy="274320"/>
-          </a:xfrm>
-          <a:prstGeom prst="rect">
-            <a:avLst/>
-          </a:prstGeom>
-          <a:noFill/>
-        </p:spPr>
-        <p:txBody>
-          <a:bodyPr wrap="square" lIns="0" rIns="0" tIns="0" bIns="0" anchor="t"/>
-          <a:lstStyle/>
-          <a:p>
-            <a:pPr algn="r">
-              <a:spcAft>
-                <a:spcPts val="0"/>
-              </a:spcAft>
-            </a:pPr>
-            <a:r>
-              <a:rPr sz="1100" b="0">
+            <a:off x="10241280" y="6473952"/>
+            <a:ext cx="1463040" cy="256032"/>
+          </a:xfrm>
+          <a:prstGeom prst="rect">
+            <a:avLst/>
+          </a:prstGeom>
+          <a:noFill/>
+        </p:spPr>
+        <p:txBody>
+          <a:bodyPr wrap="square" lIns="0" rIns="0" tIns="0" bIns="0" anchor="t">
+            <a:spAutoFit/>
+          </a:bodyPr>
+          <a:lstStyle/>
+          <a:p>
+            <a:pPr algn="r"/>
+            <a:r>
+              <a:rPr sz="1200" b="0">
                 <a:solidFill>
                   <a:srgbClr val="6B625A"/>
                 </a:solidFill>
@@ -4193,7 +4129,7 @@
             <a:avLst/>
           </a:prstGeom>
           <a:solidFill>
-            <a:srgbClr val="1A1614"/>
+            <a:srgbClr val="F6F1E7"/>
           </a:solidFill>
           <a:ln>
             <a:noFill/>
@@ -4229,111 +4165,100 @@
         </p:nvSpPr>
         <p:spPr>
           <a:xfrm>
-            <a:off x="731520" y="1371600"/>
-            <a:ext cx="10058400" cy="365760"/>
-          </a:xfrm>
-          <a:prstGeom prst="rect">
-            <a:avLst/>
-          </a:prstGeom>
-          <a:noFill/>
-        </p:spPr>
-        <p:txBody>
-          <a:bodyPr wrap="square" lIns="0" rIns="0" tIns="0" bIns="0" anchor="t"/>
-          <a:lstStyle/>
-          <a:p>
-            <a:pPr algn="l">
-              <a:spcAft>
-                <a:spcPts val="0"/>
-              </a:spcAft>
-            </a:pPr>
-            <a:r>
-              <a:rPr sz="1400" b="1">
-                <a:solidFill>
-                  <a:srgbClr val="A6843E"/>
-                </a:solidFill>
-                <a:latin typeface="Calibri"/>
-              </a:rPr>
-              <a:t>BİR CÜMLƏ</a:t>
-            </a:r>
-          </a:p>
-        </p:txBody>
-      </p:sp>
-      <p:sp>
-        <p:nvSpPr>
-          <p:cNvPr id="4" name="TextBox 3"/>
-          <p:cNvSpPr txBox="1"/>
-          <p:nvPr/>
-        </p:nvSpPr>
-        <p:spPr>
-          <a:xfrm>
-            <a:off x="731520" y="1920240"/>
-            <a:ext cx="10515600" cy="2194560"/>
-          </a:xfrm>
-          <a:prstGeom prst="rect">
-            <a:avLst/>
-          </a:prstGeom>
-          <a:noFill/>
-        </p:spPr>
-        <p:txBody>
-          <a:bodyPr wrap="square" lIns="0" rIns="0" tIns="0" bIns="0" anchor="t"/>
-          <a:lstStyle/>
-          <a:p>
-            <a:pPr algn="l">
-              <a:spcAft>
-                <a:spcPts val="0"/>
-              </a:spcAft>
-            </a:pPr>
-            <a:r>
-              <a:rPr sz="3600" b="1">
-                <a:solidFill>
-                  <a:srgbClr val="F6F1E7"/>
-                </a:solidFill>
-                <a:latin typeface="Calibri"/>
-              </a:rPr>
-              <a:t>Azərbaycan atalar sözünü
-axtaran, öyrədən və
-hər səhər xatırladan bot.</a:t>
-            </a:r>
-          </a:p>
-        </p:txBody>
-      </p:sp>
-      <p:sp>
-        <p:nvSpPr>
-          <p:cNvPr id="5" name="TextBox 4"/>
-          <p:cNvSpPr txBox="1"/>
-          <p:nvPr/>
-        </p:nvSpPr>
-        <p:spPr>
-          <a:xfrm>
-            <a:off x="731520" y="4937760"/>
-            <a:ext cx="9144000" cy="457200"/>
-          </a:xfrm>
-          <a:prstGeom prst="rect">
-            <a:avLst/>
-          </a:prstGeom>
-          <a:noFill/>
-        </p:spPr>
-        <p:txBody>
-          <a:bodyPr wrap="square" lIns="0" rIns="0" tIns="0" bIns="0" anchor="t"/>
-          <a:lstStyle/>
-          <a:p>
-            <a:pPr algn="l">
-              <a:spcAft>
-                <a:spcPts val="0"/>
-              </a:spcAft>
-            </a:pPr>
-            <a:r>
-              <a:rPr sz="1800" b="0">
-                <a:solidFill>
-                  <a:srgbClr val="A6843E"/>
-                </a:solidFill>
-                <a:latin typeface="Calibri"/>
-              </a:rPr>
-              <a:t>Başqa dil yoxdur. Ödəniş yoxdur. Hesab yoxdur.</a:t>
-            </a:r>
-          </a:p>
-        </p:txBody>
-      </p:sp>
+            <a:off x="502920" y="292608"/>
+            <a:ext cx="10972800" cy="502920"/>
+          </a:xfrm>
+          <a:prstGeom prst="rect">
+            <a:avLst/>
+          </a:prstGeom>
+          <a:noFill/>
+        </p:spPr>
+        <p:txBody>
+          <a:bodyPr wrap="square" lIns="0" rIns="0" tIns="0" bIns="0" anchor="t">
+            <a:spAutoFit/>
+          </a:bodyPr>
+          <a:lstStyle/>
+          <a:p>
+            <a:pPr algn="l"/>
+            <a:r>
+              <a:rPr sz="3000" b="1">
+                <a:solidFill>
+                  <a:srgbClr val="1A1614"/>
+                </a:solidFill>
+                <a:latin typeface="Calibri"/>
+              </a:rPr>
+              <a:t>Altı iş. Bir menyu.</a:t>
+            </a:r>
+          </a:p>
+        </p:txBody>
+      </p:sp>
+      <p:sp>
+        <p:nvSpPr>
+          <p:cNvPr id="4" name="Rectangle 3"/>
+          <p:cNvSpPr/>
+          <p:nvPr/>
+        </p:nvSpPr>
+        <p:spPr>
+          <a:xfrm>
+            <a:off x="457200" y="1051560"/>
+            <a:ext cx="3657600" cy="2423160"/>
+          </a:xfrm>
+          <a:prstGeom prst="rect">
+            <a:avLst/>
+          </a:prstGeom>
+          <a:solidFill>
+            <a:srgbClr val="FFFFFF"/>
+          </a:solidFill>
+          <a:ln>
+            <a:noFill/>
+          </a:ln>
+        </p:spPr>
+        <p:style>
+          <a:lnRef idx="1">
+            <a:schemeClr val="accent1"/>
+          </a:lnRef>
+          <a:fillRef idx="3">
+            <a:schemeClr val="accent1"/>
+          </a:fillRef>
+          <a:effectRef idx="2">
+            <a:schemeClr val="accent1"/>
+          </a:effectRef>
+          <a:fontRef idx="minor">
+            <a:schemeClr val="lt1"/>
+          </a:fontRef>
+        </p:style>
+        <p:txBody>
+          <a:bodyPr rtlCol="0" anchor="ctr"/>
+          <a:lstStyle/>
+          <a:p>
+            <a:pPr algn="ctr"/>
+          </a:p>
+        </p:txBody>
+      </p:sp>
+      <p:pic>
+        <p:nvPicPr>
+          <p:cNvPr id="5" name="Picture 4" descr="f8273dd4-9de2-4a9a-8866-452874fc30cc.jpg"/>
+          <p:cNvPicPr>
+            <a:picLocks noChangeAspect="1"/>
+          </p:cNvPicPr>
+          <p:nvPr/>
+        </p:nvPicPr>
+        <p:blipFill>
+          <a:blip r:embed="rId2"/>
+          <a:stretch>
+            <a:fillRect/>
+          </a:stretch>
+        </p:blipFill>
+        <p:spPr>
+          <a:xfrm>
+            <a:off x="594360" y="1371600"/>
+            <a:ext cx="1417320" cy="1417320"/>
+          </a:xfrm>
+          <a:prstGeom prst="rect">
+            <a:avLst/>
+          </a:prstGeom>
+        </p:spPr>
+      </p:pic>
       <p:sp>
         <p:nvSpPr>
           <p:cNvPr id="6" name="TextBox 5"/>
@@ -4342,27 +4267,780 @@
         </p:nvSpPr>
         <p:spPr>
           <a:xfrm>
-            <a:off x="548640" y="6446520"/>
-            <a:ext cx="7315200" cy="274320"/>
-          </a:xfrm>
-          <a:prstGeom prst="rect">
-            <a:avLst/>
-          </a:prstGeom>
-          <a:noFill/>
-        </p:spPr>
-        <p:txBody>
-          <a:bodyPr wrap="square" lIns="0" rIns="0" tIns="0" bIns="0" anchor="t"/>
-          <a:lstStyle/>
-          <a:p>
-            <a:pPr algn="l">
-              <a:spcAft>
-                <a:spcPts val="0"/>
-              </a:spcAft>
-            </a:pPr>
-            <a:r>
-              <a:rPr sz="1100" b="0">
-                <a:solidFill>
-                  <a:srgbClr val="C8BEB0"/>
+            <a:off x="2103120" y="1554480"/>
+            <a:ext cx="1874519" cy="457200"/>
+          </a:xfrm>
+          <a:prstGeom prst="rect">
+            <a:avLst/>
+          </a:prstGeom>
+          <a:noFill/>
+        </p:spPr>
+        <p:txBody>
+          <a:bodyPr wrap="square" lIns="0" rIns="0" tIns="0" bIns="0" anchor="t">
+            <a:spAutoFit/>
+          </a:bodyPr>
+          <a:lstStyle/>
+          <a:p>
+            <a:pPr algn="l"/>
+            <a:r>
+              <a:rPr sz="1800" b="1">
+                <a:solidFill>
+                  <a:srgbClr val="9C2F2A"/>
+                </a:solidFill>
+                <a:latin typeface="Calibri"/>
+              </a:rPr>
+              <a:t>Açar söz</a:t>
+            </a:r>
+          </a:p>
+        </p:txBody>
+      </p:sp>
+      <p:sp>
+        <p:nvSpPr>
+          <p:cNvPr id="7" name="TextBox 6"/>
+          <p:cNvSpPr txBox="1"/>
+          <p:nvPr/>
+        </p:nvSpPr>
+        <p:spPr>
+          <a:xfrm>
+            <a:off x="2103120" y="2103120"/>
+            <a:ext cx="1874519" cy="1005840"/>
+          </a:xfrm>
+          <a:prstGeom prst="rect">
+            <a:avLst/>
+          </a:prstGeom>
+          <a:noFill/>
+        </p:spPr>
+        <p:txBody>
+          <a:bodyPr wrap="square" lIns="0" rIns="0" tIns="0" bIns="0" anchor="t">
+            <a:spAutoFit/>
+          </a:bodyPr>
+          <a:lstStyle/>
+          <a:p>
+            <a:pPr algn="l"/>
+            <a:r>
+              <a:rPr sz="1400" b="0">
+                <a:solidFill>
+                  <a:srgbClr val="1A1614"/>
+                </a:solidFill>
+                <a:latin typeface="Calibri"/>
+              </a:rPr>
+              <a:t>Bir söz yaz, sözü tap.</a:t>
+            </a:r>
+          </a:p>
+        </p:txBody>
+      </p:sp>
+      <p:sp>
+        <p:nvSpPr>
+          <p:cNvPr id="8" name="Rectangle 7"/>
+          <p:cNvSpPr/>
+          <p:nvPr/>
+        </p:nvSpPr>
+        <p:spPr>
+          <a:xfrm>
+            <a:off x="4297680" y="1051560"/>
+            <a:ext cx="3657600" cy="2423160"/>
+          </a:xfrm>
+          <a:prstGeom prst="rect">
+            <a:avLst/>
+          </a:prstGeom>
+          <a:solidFill>
+            <a:srgbClr val="FFFFFF"/>
+          </a:solidFill>
+          <a:ln>
+            <a:noFill/>
+          </a:ln>
+        </p:spPr>
+        <p:style>
+          <a:lnRef idx="1">
+            <a:schemeClr val="accent1"/>
+          </a:lnRef>
+          <a:fillRef idx="3">
+            <a:schemeClr val="accent1"/>
+          </a:fillRef>
+          <a:effectRef idx="2">
+            <a:schemeClr val="accent1"/>
+          </a:effectRef>
+          <a:fontRef idx="minor">
+            <a:schemeClr val="lt1"/>
+          </a:fontRef>
+        </p:style>
+        <p:txBody>
+          <a:bodyPr rtlCol="0" anchor="ctr"/>
+          <a:lstStyle/>
+          <a:p>
+            <a:pPr algn="ctr"/>
+          </a:p>
+        </p:txBody>
+      </p:sp>
+      <p:pic>
+        <p:nvPicPr>
+          <p:cNvPr id="9" name="Picture 8" descr="a6a06ee9-72ad-43b1-a1d5-1b9e357f6ad7.jpg"/>
+          <p:cNvPicPr>
+            <a:picLocks noChangeAspect="1"/>
+          </p:cNvPicPr>
+          <p:nvPr/>
+        </p:nvPicPr>
+        <p:blipFill>
+          <a:blip r:embed="rId3"/>
+          <a:stretch>
+            <a:fillRect/>
+          </a:stretch>
+        </p:blipFill>
+        <p:spPr>
+          <a:xfrm>
+            <a:off x="4434840" y="1371600"/>
+            <a:ext cx="1417320" cy="1417320"/>
+          </a:xfrm>
+          <a:prstGeom prst="rect">
+            <a:avLst/>
+          </a:prstGeom>
+        </p:spPr>
+      </p:pic>
+      <p:sp>
+        <p:nvSpPr>
+          <p:cNvPr id="10" name="TextBox 9"/>
+          <p:cNvSpPr txBox="1"/>
+          <p:nvPr/>
+        </p:nvSpPr>
+        <p:spPr>
+          <a:xfrm>
+            <a:off x="5943600" y="1554480"/>
+            <a:ext cx="1874519" cy="457200"/>
+          </a:xfrm>
+          <a:prstGeom prst="rect">
+            <a:avLst/>
+          </a:prstGeom>
+          <a:noFill/>
+        </p:spPr>
+        <p:txBody>
+          <a:bodyPr wrap="square" lIns="0" rIns="0" tIns="0" bIns="0" anchor="t">
+            <a:spAutoFit/>
+          </a:bodyPr>
+          <a:lstStyle/>
+          <a:p>
+            <a:pPr algn="l"/>
+            <a:r>
+              <a:rPr sz="1800" b="1">
+                <a:solidFill>
+                  <a:srgbClr val="9C2F2A"/>
+                </a:solidFill>
+                <a:latin typeface="Calibri"/>
+              </a:rPr>
+              <a:t>Hekayə</a:t>
+            </a:r>
+          </a:p>
+        </p:txBody>
+      </p:sp>
+      <p:sp>
+        <p:nvSpPr>
+          <p:cNvPr id="11" name="TextBox 10"/>
+          <p:cNvSpPr txBox="1"/>
+          <p:nvPr/>
+        </p:nvSpPr>
+        <p:spPr>
+          <a:xfrm>
+            <a:off x="5943600" y="2103120"/>
+            <a:ext cx="1874519" cy="1005840"/>
+          </a:xfrm>
+          <a:prstGeom prst="rect">
+            <a:avLst/>
+          </a:prstGeom>
+          <a:noFill/>
+        </p:spPr>
+        <p:txBody>
+          <a:bodyPr wrap="square" lIns="0" rIns="0" tIns="0" bIns="0" anchor="t">
+            <a:spAutoFit/>
+          </a:bodyPr>
+          <a:lstStyle/>
+          <a:p>
+            <a:pPr algn="l"/>
+            <a:r>
+              <a:rPr sz="1400" b="0">
+                <a:solidFill>
+                  <a:srgbClr val="1A1614"/>
+                </a:solidFill>
+                <a:latin typeface="Calibri"/>
+              </a:rPr>
+              <a:t>Vəziyyətə uyğun söz.</a:t>
+            </a:r>
+          </a:p>
+        </p:txBody>
+      </p:sp>
+      <p:sp>
+        <p:nvSpPr>
+          <p:cNvPr id="12" name="Rectangle 11"/>
+          <p:cNvSpPr/>
+          <p:nvPr/>
+        </p:nvSpPr>
+        <p:spPr>
+          <a:xfrm>
+            <a:off x="8138160" y="1051560"/>
+            <a:ext cx="3657600" cy="2423160"/>
+          </a:xfrm>
+          <a:prstGeom prst="rect">
+            <a:avLst/>
+          </a:prstGeom>
+          <a:solidFill>
+            <a:srgbClr val="FFFFFF"/>
+          </a:solidFill>
+          <a:ln>
+            <a:noFill/>
+          </a:ln>
+        </p:spPr>
+        <p:style>
+          <a:lnRef idx="1">
+            <a:schemeClr val="accent1"/>
+          </a:lnRef>
+          <a:fillRef idx="3">
+            <a:schemeClr val="accent1"/>
+          </a:fillRef>
+          <a:effectRef idx="2">
+            <a:schemeClr val="accent1"/>
+          </a:effectRef>
+          <a:fontRef idx="minor">
+            <a:schemeClr val="lt1"/>
+          </a:fontRef>
+        </p:style>
+        <p:txBody>
+          <a:bodyPr rtlCol="0" anchor="ctr"/>
+          <a:lstStyle/>
+          <a:p>
+            <a:pPr algn="ctr"/>
+          </a:p>
+        </p:txBody>
+      </p:sp>
+      <p:pic>
+        <p:nvPicPr>
+          <p:cNvPr id="13" name="Picture 12" descr="0134bad9-a8a1-49cf-b15c-d4b708457aa5.jpg"/>
+          <p:cNvPicPr>
+            <a:picLocks noChangeAspect="1"/>
+          </p:cNvPicPr>
+          <p:nvPr/>
+        </p:nvPicPr>
+        <p:blipFill>
+          <a:blip r:embed="rId4"/>
+          <a:stretch>
+            <a:fillRect/>
+          </a:stretch>
+        </p:blipFill>
+        <p:spPr>
+          <a:xfrm>
+            <a:off x="8275320" y="1371600"/>
+            <a:ext cx="1417320" cy="1417320"/>
+          </a:xfrm>
+          <a:prstGeom prst="rect">
+            <a:avLst/>
+          </a:prstGeom>
+        </p:spPr>
+      </p:pic>
+      <p:sp>
+        <p:nvSpPr>
+          <p:cNvPr id="14" name="TextBox 13"/>
+          <p:cNvSpPr txBox="1"/>
+          <p:nvPr/>
+        </p:nvSpPr>
+        <p:spPr>
+          <a:xfrm>
+            <a:off x="9784080" y="1554480"/>
+            <a:ext cx="1874519" cy="457200"/>
+          </a:xfrm>
+          <a:prstGeom prst="rect">
+            <a:avLst/>
+          </a:prstGeom>
+          <a:noFill/>
+        </p:spPr>
+        <p:txBody>
+          <a:bodyPr wrap="square" lIns="0" rIns="0" tIns="0" bIns="0" anchor="t">
+            <a:spAutoFit/>
+          </a:bodyPr>
+          <a:lstStyle/>
+          <a:p>
+            <a:pPr algn="l"/>
+            <a:r>
+              <a:rPr sz="1800" b="1">
+                <a:solidFill>
+                  <a:srgbClr val="9C2F2A"/>
+                </a:solidFill>
+                <a:latin typeface="Calibri"/>
+              </a:rPr>
+              <a:t>Mövzular</a:t>
+            </a:r>
+          </a:p>
+        </p:txBody>
+      </p:sp>
+      <p:sp>
+        <p:nvSpPr>
+          <p:cNvPr id="15" name="TextBox 14"/>
+          <p:cNvSpPr txBox="1"/>
+          <p:nvPr/>
+        </p:nvSpPr>
+        <p:spPr>
+          <a:xfrm>
+            <a:off x="9784080" y="2103120"/>
+            <a:ext cx="1874519" cy="1005840"/>
+          </a:xfrm>
+          <a:prstGeom prst="rect">
+            <a:avLst/>
+          </a:prstGeom>
+          <a:noFill/>
+        </p:spPr>
+        <p:txBody>
+          <a:bodyPr wrap="square" lIns="0" rIns="0" tIns="0" bIns="0" anchor="t">
+            <a:spAutoFit/>
+          </a:bodyPr>
+          <a:lstStyle/>
+          <a:p>
+            <a:pPr algn="l"/>
+            <a:r>
+              <a:rPr sz="1400" b="0">
+                <a:solidFill>
+                  <a:srgbClr val="1A1614"/>
+                </a:solidFill>
+                <a:latin typeface="Calibri"/>
+              </a:rPr>
+              <a:t>On iki qutu, səhifə-səhifə.</a:t>
+            </a:r>
+          </a:p>
+        </p:txBody>
+      </p:sp>
+      <p:sp>
+        <p:nvSpPr>
+          <p:cNvPr id="16" name="Rectangle 15"/>
+          <p:cNvSpPr/>
+          <p:nvPr/>
+        </p:nvSpPr>
+        <p:spPr>
+          <a:xfrm>
+            <a:off x="457200" y="3657600"/>
+            <a:ext cx="3657600" cy="2423160"/>
+          </a:xfrm>
+          <a:prstGeom prst="rect">
+            <a:avLst/>
+          </a:prstGeom>
+          <a:solidFill>
+            <a:srgbClr val="FFFFFF"/>
+          </a:solidFill>
+          <a:ln>
+            <a:noFill/>
+          </a:ln>
+        </p:spPr>
+        <p:style>
+          <a:lnRef idx="1">
+            <a:schemeClr val="accent1"/>
+          </a:lnRef>
+          <a:fillRef idx="3">
+            <a:schemeClr val="accent1"/>
+          </a:fillRef>
+          <a:effectRef idx="2">
+            <a:schemeClr val="accent1"/>
+          </a:effectRef>
+          <a:fontRef idx="minor">
+            <a:schemeClr val="lt1"/>
+          </a:fontRef>
+        </p:style>
+        <p:txBody>
+          <a:bodyPr rtlCol="0" anchor="ctr"/>
+          <a:lstStyle/>
+          <a:p>
+            <a:pPr algn="ctr"/>
+          </a:p>
+        </p:txBody>
+      </p:sp>
+      <p:pic>
+        <p:nvPicPr>
+          <p:cNvPr id="17" name="Picture 16" descr="a0ce12cd-2f54-4b59-8fc7-914dbda52c9b.jpg"/>
+          <p:cNvPicPr>
+            <a:picLocks noChangeAspect="1"/>
+          </p:cNvPicPr>
+          <p:nvPr/>
+        </p:nvPicPr>
+        <p:blipFill>
+          <a:blip r:embed="rId5"/>
+          <a:stretch>
+            <a:fillRect/>
+          </a:stretch>
+        </p:blipFill>
+        <p:spPr>
+          <a:xfrm>
+            <a:off x="594360" y="3977640"/>
+            <a:ext cx="1417320" cy="1417320"/>
+          </a:xfrm>
+          <a:prstGeom prst="rect">
+            <a:avLst/>
+          </a:prstGeom>
+        </p:spPr>
+      </p:pic>
+      <p:sp>
+        <p:nvSpPr>
+          <p:cNvPr id="18" name="TextBox 17"/>
+          <p:cNvSpPr txBox="1"/>
+          <p:nvPr/>
+        </p:nvSpPr>
+        <p:spPr>
+          <a:xfrm>
+            <a:off x="2103120" y="4160520"/>
+            <a:ext cx="1874519" cy="457200"/>
+          </a:xfrm>
+          <a:prstGeom prst="rect">
+            <a:avLst/>
+          </a:prstGeom>
+          <a:noFill/>
+        </p:spPr>
+        <p:txBody>
+          <a:bodyPr wrap="square" lIns="0" rIns="0" tIns="0" bIns="0" anchor="t">
+            <a:spAutoFit/>
+          </a:bodyPr>
+          <a:lstStyle/>
+          <a:p>
+            <a:pPr algn="l"/>
+            <a:r>
+              <a:rPr sz="1800" b="1">
+                <a:solidFill>
+                  <a:srgbClr val="9C2F2A"/>
+                </a:solidFill>
+                <a:latin typeface="Calibri"/>
+              </a:rPr>
+              <a:t>Quiz</a:t>
+            </a:r>
+          </a:p>
+        </p:txBody>
+      </p:sp>
+      <p:sp>
+        <p:nvSpPr>
+          <p:cNvPr id="19" name="TextBox 18"/>
+          <p:cNvSpPr txBox="1"/>
+          <p:nvPr/>
+        </p:nvSpPr>
+        <p:spPr>
+          <a:xfrm>
+            <a:off x="2103120" y="4709160"/>
+            <a:ext cx="1874519" cy="1005840"/>
+          </a:xfrm>
+          <a:prstGeom prst="rect">
+            <a:avLst/>
+          </a:prstGeom>
+          <a:noFill/>
+        </p:spPr>
+        <p:txBody>
+          <a:bodyPr wrap="square" lIns="0" rIns="0" tIns="0" bIns="0" anchor="t">
+            <a:spAutoFit/>
+          </a:bodyPr>
+          <a:lstStyle/>
+          <a:p>
+            <a:pPr algn="l"/>
+            <a:r>
+              <a:rPr sz="1400" b="0">
+                <a:solidFill>
+                  <a:srgbClr val="1A1614"/>
+                </a:solidFill>
+                <a:latin typeface="Calibri"/>
+              </a:rPr>
+              <a:t>Çatışmayan sözü tamamla.</a:t>
+            </a:r>
+          </a:p>
+        </p:txBody>
+      </p:sp>
+      <p:sp>
+        <p:nvSpPr>
+          <p:cNvPr id="20" name="Rectangle 19"/>
+          <p:cNvSpPr/>
+          <p:nvPr/>
+        </p:nvSpPr>
+        <p:spPr>
+          <a:xfrm>
+            <a:off x="4297680" y="3657600"/>
+            <a:ext cx="3657600" cy="2423160"/>
+          </a:xfrm>
+          <a:prstGeom prst="rect">
+            <a:avLst/>
+          </a:prstGeom>
+          <a:solidFill>
+            <a:srgbClr val="FFFFFF"/>
+          </a:solidFill>
+          <a:ln>
+            <a:noFill/>
+          </a:ln>
+        </p:spPr>
+        <p:style>
+          <a:lnRef idx="1">
+            <a:schemeClr val="accent1"/>
+          </a:lnRef>
+          <a:fillRef idx="3">
+            <a:schemeClr val="accent1"/>
+          </a:fillRef>
+          <a:effectRef idx="2">
+            <a:schemeClr val="accent1"/>
+          </a:effectRef>
+          <a:fontRef idx="minor">
+            <a:schemeClr val="lt1"/>
+          </a:fontRef>
+        </p:style>
+        <p:txBody>
+          <a:bodyPr rtlCol="0" anchor="ctr"/>
+          <a:lstStyle/>
+          <a:p>
+            <a:pPr algn="ctr"/>
+          </a:p>
+        </p:txBody>
+      </p:sp>
+      <p:pic>
+        <p:nvPicPr>
+          <p:cNvPr id="21" name="Picture 20" descr="73a6727f-2046-49b5-ad32-3667d7a0e571.jpg"/>
+          <p:cNvPicPr>
+            <a:picLocks noChangeAspect="1"/>
+          </p:cNvPicPr>
+          <p:nvPr/>
+        </p:nvPicPr>
+        <p:blipFill>
+          <a:blip r:embed="rId6"/>
+          <a:stretch>
+            <a:fillRect/>
+          </a:stretch>
+        </p:blipFill>
+        <p:spPr>
+          <a:xfrm>
+            <a:off x="4434840" y="3977640"/>
+            <a:ext cx="1417320" cy="1417320"/>
+          </a:xfrm>
+          <a:prstGeom prst="rect">
+            <a:avLst/>
+          </a:prstGeom>
+        </p:spPr>
+      </p:pic>
+      <p:sp>
+        <p:nvSpPr>
+          <p:cNvPr id="22" name="TextBox 21"/>
+          <p:cNvSpPr txBox="1"/>
+          <p:nvPr/>
+        </p:nvSpPr>
+        <p:spPr>
+          <a:xfrm>
+            <a:off x="5943600" y="4160520"/>
+            <a:ext cx="1874519" cy="457200"/>
+          </a:xfrm>
+          <a:prstGeom prst="rect">
+            <a:avLst/>
+          </a:prstGeom>
+          <a:noFill/>
+        </p:spPr>
+        <p:txBody>
+          <a:bodyPr wrap="square" lIns="0" rIns="0" tIns="0" bIns="0" anchor="t">
+            <a:spAutoFit/>
+          </a:bodyPr>
+          <a:lstStyle/>
+          <a:p>
+            <a:pPr algn="l"/>
+            <a:r>
+              <a:rPr sz="1800" b="1">
+                <a:solidFill>
+                  <a:srgbClr val="9C2F2A"/>
+                </a:solidFill>
+                <a:latin typeface="Calibri"/>
+              </a:rPr>
+              <a:t>Günün sözü</a:t>
+            </a:r>
+          </a:p>
+        </p:txBody>
+      </p:sp>
+      <p:sp>
+        <p:nvSpPr>
+          <p:cNvPr id="23" name="TextBox 22"/>
+          <p:cNvSpPr txBox="1"/>
+          <p:nvPr/>
+        </p:nvSpPr>
+        <p:spPr>
+          <a:xfrm>
+            <a:off x="5943600" y="4709160"/>
+            <a:ext cx="1874519" cy="1005840"/>
+          </a:xfrm>
+          <a:prstGeom prst="rect">
+            <a:avLst/>
+          </a:prstGeom>
+          <a:noFill/>
+        </p:spPr>
+        <p:txBody>
+          <a:bodyPr wrap="square" lIns="0" rIns="0" tIns="0" bIns="0" anchor="t">
+            <a:spAutoFit/>
+          </a:bodyPr>
+          <a:lstStyle/>
+          <a:p>
+            <a:pPr algn="l"/>
+            <a:r>
+              <a:rPr sz="1400" b="0">
+                <a:solidFill>
+                  <a:srgbClr val="1A1614"/>
+                </a:solidFill>
+                <a:latin typeface="Calibri"/>
+              </a:rPr>
+              <a:t>Bu gün hamıya eyni öyüd.</a:t>
+            </a:r>
+          </a:p>
+        </p:txBody>
+      </p:sp>
+      <p:sp>
+        <p:nvSpPr>
+          <p:cNvPr id="24" name="Rectangle 23"/>
+          <p:cNvSpPr/>
+          <p:nvPr/>
+        </p:nvSpPr>
+        <p:spPr>
+          <a:xfrm>
+            <a:off x="8138160" y="3657600"/>
+            <a:ext cx="3657600" cy="2423160"/>
+          </a:xfrm>
+          <a:prstGeom prst="rect">
+            <a:avLst/>
+          </a:prstGeom>
+          <a:solidFill>
+            <a:srgbClr val="FFFFFF"/>
+          </a:solidFill>
+          <a:ln>
+            <a:noFill/>
+          </a:ln>
+        </p:spPr>
+        <p:style>
+          <a:lnRef idx="1">
+            <a:schemeClr val="accent1"/>
+          </a:lnRef>
+          <a:fillRef idx="3">
+            <a:schemeClr val="accent1"/>
+          </a:fillRef>
+          <a:effectRef idx="2">
+            <a:schemeClr val="accent1"/>
+          </a:effectRef>
+          <a:fontRef idx="minor">
+            <a:schemeClr val="lt1"/>
+          </a:fontRef>
+        </p:style>
+        <p:txBody>
+          <a:bodyPr rtlCol="0" anchor="ctr"/>
+          <a:lstStyle/>
+          <a:p>
+            <a:pPr algn="ctr"/>
+          </a:p>
+        </p:txBody>
+      </p:sp>
+      <p:pic>
+        <p:nvPicPr>
+          <p:cNvPr id="25" name="Picture 24" descr="57945385-1176-4eae-9997-3e0e2a2f3687.jpg"/>
+          <p:cNvPicPr>
+            <a:picLocks noChangeAspect="1"/>
+          </p:cNvPicPr>
+          <p:nvPr/>
+        </p:nvPicPr>
+        <p:blipFill>
+          <a:blip r:embed="rId7"/>
+          <a:stretch>
+            <a:fillRect/>
+          </a:stretch>
+        </p:blipFill>
+        <p:spPr>
+          <a:xfrm>
+            <a:off x="8275320" y="3977640"/>
+            <a:ext cx="1417320" cy="1417320"/>
+          </a:xfrm>
+          <a:prstGeom prst="rect">
+            <a:avLst/>
+          </a:prstGeom>
+        </p:spPr>
+      </p:pic>
+      <p:sp>
+        <p:nvSpPr>
+          <p:cNvPr id="26" name="TextBox 25"/>
+          <p:cNvSpPr txBox="1"/>
+          <p:nvPr/>
+        </p:nvSpPr>
+        <p:spPr>
+          <a:xfrm>
+            <a:off x="9784080" y="4160520"/>
+            <a:ext cx="1874519" cy="457200"/>
+          </a:xfrm>
+          <a:prstGeom prst="rect">
+            <a:avLst/>
+          </a:prstGeom>
+          <a:noFill/>
+        </p:spPr>
+        <p:txBody>
+          <a:bodyPr wrap="square" lIns="0" rIns="0" tIns="0" bIns="0" anchor="t">
+            <a:spAutoFit/>
+          </a:bodyPr>
+          <a:lstStyle/>
+          <a:p>
+            <a:pPr algn="l"/>
+            <a:r>
+              <a:rPr sz="1800" b="1">
+                <a:solidFill>
+                  <a:srgbClr val="9C2F2A"/>
+                </a:solidFill>
+                <a:latin typeface="Calibri"/>
+              </a:rPr>
+              <a:t>Təsadüfi</a:t>
+            </a:r>
+          </a:p>
+        </p:txBody>
+      </p:sp>
+      <p:sp>
+        <p:nvSpPr>
+          <p:cNvPr id="27" name="TextBox 26"/>
+          <p:cNvSpPr txBox="1"/>
+          <p:nvPr/>
+        </p:nvSpPr>
+        <p:spPr>
+          <a:xfrm>
+            <a:off x="9784080" y="4709160"/>
+            <a:ext cx="1874519" cy="1005840"/>
+          </a:xfrm>
+          <a:prstGeom prst="rect">
+            <a:avLst/>
+          </a:prstGeom>
+          <a:noFill/>
+        </p:spPr>
+        <p:txBody>
+          <a:bodyPr wrap="square" lIns="0" rIns="0" tIns="0" bIns="0" anchor="t">
+            <a:spAutoFit/>
+          </a:bodyPr>
+          <a:lstStyle/>
+          <a:p>
+            <a:pPr algn="l"/>
+            <a:r>
+              <a:rPr sz="1400" b="0">
+                <a:solidFill>
+                  <a:srgbClr val="1A1614"/>
+                </a:solidFill>
+                <a:latin typeface="Calibri"/>
+              </a:rPr>
+              <a:t>Bazadan bir söz.</a:t>
+            </a:r>
+          </a:p>
+        </p:txBody>
+      </p:sp>
+      <p:sp>
+        <p:nvSpPr>
+          <p:cNvPr id="28" name="TextBox 27"/>
+          <p:cNvSpPr txBox="1"/>
+          <p:nvPr/>
+        </p:nvSpPr>
+        <p:spPr>
+          <a:xfrm>
+            <a:off x="502920" y="6473952"/>
+            <a:ext cx="7315200" cy="256032"/>
+          </a:xfrm>
+          <a:prstGeom prst="rect">
+            <a:avLst/>
+          </a:prstGeom>
+          <a:noFill/>
+        </p:spPr>
+        <p:txBody>
+          <a:bodyPr wrap="square" lIns="0" rIns="0" tIns="0" bIns="0" anchor="t">
+            <a:spAutoFit/>
+          </a:bodyPr>
+          <a:lstStyle/>
+          <a:p>
+            <a:pPr algn="l"/>
+            <a:r>
+              <a:rPr sz="1200" b="0">
+                <a:solidFill>
+                  <a:srgbClr val="6B625A"/>
                 </a:solidFill>
                 <a:latin typeface="Calibri"/>
               </a:rPr>
@@ -4373,33 +5051,31 @@
       </p:sp>
       <p:sp>
         <p:nvSpPr>
-          <p:cNvPr id="7" name="TextBox 6"/>
-          <p:cNvSpPr txBox="1"/>
-          <p:nvPr/>
-        </p:nvSpPr>
-        <p:spPr>
-          <a:xfrm>
-            <a:off x="10424160" y="6446520"/>
-            <a:ext cx="1280160" cy="274320"/>
-          </a:xfrm>
-          <a:prstGeom prst="rect">
-            <a:avLst/>
-          </a:prstGeom>
-          <a:noFill/>
-        </p:spPr>
-        <p:txBody>
-          <a:bodyPr wrap="square" lIns="0" rIns="0" tIns="0" bIns="0" anchor="t"/>
-          <a:lstStyle/>
-          <a:p>
-            <a:pPr algn="r">
-              <a:spcAft>
-                <a:spcPts val="0"/>
-              </a:spcAft>
-            </a:pPr>
-            <a:r>
-              <a:rPr sz="1100" b="0">
-                <a:solidFill>
-                  <a:srgbClr val="C8BEB0"/>
+          <p:cNvPr id="29" name="TextBox 28"/>
+          <p:cNvSpPr txBox="1"/>
+          <p:nvPr/>
+        </p:nvSpPr>
+        <p:spPr>
+          <a:xfrm>
+            <a:off x="10241280" y="6473952"/>
+            <a:ext cx="1463040" cy="256032"/>
+          </a:xfrm>
+          <a:prstGeom prst="rect">
+            <a:avLst/>
+          </a:prstGeom>
+          <a:noFill/>
+        </p:spPr>
+        <p:txBody>
+          <a:bodyPr wrap="square" lIns="0" rIns="0" tIns="0" bIns="0" anchor="t">
+            <a:spAutoFit/>
+          </a:bodyPr>
+          <a:lstStyle/>
+          <a:p>
+            <a:pPr algn="r"/>
+            <a:r>
+              <a:rPr sz="1200" b="0">
+                <a:solidFill>
+                  <a:srgbClr val="6B625A"/>
                 </a:solidFill>
                 <a:latin typeface="Calibri"/>
               </a:rPr>
@@ -4441,7 +5117,7 @@
             <a:avLst/>
           </a:prstGeom>
           <a:solidFill>
-            <a:srgbClr val="F6F1E7"/>
+            <a:srgbClr val="FBF7F1"/>
           </a:solidFill>
           <a:ln>
             <a:noFill/>
@@ -4477,23 +5153,21 @@
         </p:nvSpPr>
         <p:spPr>
           <a:xfrm>
-            <a:off x="640080" y="365760"/>
-            <a:ext cx="10972800" cy="640080"/>
-          </a:xfrm>
-          <a:prstGeom prst="rect">
-            <a:avLst/>
-          </a:prstGeom>
-          <a:noFill/>
-        </p:spPr>
-        <p:txBody>
-          <a:bodyPr wrap="square" lIns="0" rIns="0" tIns="0" bIns="0" anchor="t"/>
-          <a:lstStyle/>
-          <a:p>
-            <a:pPr algn="l">
-              <a:spcAft>
-                <a:spcPts val="0"/>
-              </a:spcAft>
-            </a:pPr>
+            <a:off x="548640" y="365760"/>
+            <a:ext cx="7315200" cy="548640"/>
+          </a:xfrm>
+          <a:prstGeom prst="rect">
+            <a:avLst/>
+          </a:prstGeom>
+          <a:noFill/>
+        </p:spPr>
+        <p:txBody>
+          <a:bodyPr wrap="square" lIns="0" rIns="0" tIns="0" bIns="0" anchor="t">
+            <a:spAutoFit/>
+          </a:bodyPr>
+          <a:lstStyle/>
+          <a:p>
+            <a:pPr algn="l"/>
             <a:r>
               <a:rPr sz="3200" b="1">
                 <a:solidFill>
@@ -4501,21 +5175,45 @@
                 </a:solidFill>
                 <a:latin typeface="Calibri"/>
               </a:rPr>
-              <a:t>Altı iş. Bir menyu.</a:t>
-            </a:r>
-          </a:p>
-        </p:txBody>
-      </p:sp>
-      <p:sp>
-        <p:nvSpPr>
-          <p:cNvPr id="4" name="Rectangle 3"/>
+              <a:t>Necə tapılır</a:t>
+            </a:r>
+          </a:p>
+        </p:txBody>
+      </p:sp>
+      <p:pic>
+        <p:nvPicPr>
+          <p:cNvPr id="4" name="Picture 3" descr="f8273dd4-9de2-4a9a-8866-452874fc30cc.jpg"/>
+          <p:cNvPicPr>
+            <a:picLocks noChangeAspect="1"/>
+          </p:cNvPicPr>
+          <p:nvPr/>
+        </p:nvPicPr>
+        <p:blipFill>
+          <a:blip r:embed="rId2"/>
+          <a:stretch>
+            <a:fillRect/>
+          </a:stretch>
+        </p:blipFill>
+        <p:spPr>
+          <a:xfrm>
+            <a:off x="9418320" y="320040"/>
+            <a:ext cx="2194560" cy="2194560"/>
+          </a:xfrm>
+          <a:prstGeom prst="rect">
+            <a:avLst/>
+          </a:prstGeom>
+        </p:spPr>
+      </p:pic>
+      <p:sp>
+        <p:nvSpPr>
+          <p:cNvPr id="5" name="Rectangle 4"/>
           <p:cNvSpPr/>
           <p:nvPr/>
         </p:nvSpPr>
         <p:spPr>
           <a:xfrm>
-            <a:off x="640080" y="1371600"/>
-            <a:ext cx="3611880" cy="2148840"/>
+            <a:off x="548640" y="2286000"/>
+            <a:ext cx="3566160" cy="3566160"/>
           </a:xfrm>
           <a:prstGeom prst="rect">
             <a:avLst/>
@@ -4551,89 +5249,119 @@
       </p:sp>
       <p:sp>
         <p:nvSpPr>
-          <p:cNvPr id="5" name="TextBox 4"/>
-          <p:cNvSpPr txBox="1"/>
-          <p:nvPr/>
-        </p:nvSpPr>
-        <p:spPr>
-          <a:xfrm>
-            <a:off x="896112" y="1627632"/>
-            <a:ext cx="3108960" cy="457200"/>
-          </a:xfrm>
-          <a:prstGeom prst="rect">
-            <a:avLst/>
-          </a:prstGeom>
-          <a:noFill/>
-        </p:spPr>
-        <p:txBody>
-          <a:bodyPr wrap="square" lIns="0" rIns="0" tIns="0" bIns="0" anchor="t"/>
-          <a:lstStyle/>
-          <a:p>
-            <a:pPr algn="l">
-              <a:spcAft>
-                <a:spcPts val="0"/>
-              </a:spcAft>
-            </a:pPr>
-            <a:r>
-              <a:rPr sz="2000" b="1">
+          <p:cNvPr id="6" name="TextBox 5"/>
+          <p:cNvSpPr txBox="1"/>
+          <p:nvPr/>
+        </p:nvSpPr>
+        <p:spPr>
+          <a:xfrm>
+            <a:off x="822960" y="2514600"/>
+            <a:ext cx="3017520" cy="731520"/>
+          </a:xfrm>
+          <a:prstGeom prst="rect">
+            <a:avLst/>
+          </a:prstGeom>
+          <a:noFill/>
+        </p:spPr>
+        <p:txBody>
+          <a:bodyPr wrap="square" lIns="0" rIns="0" tIns="0" bIns="0" anchor="t">
+            <a:spAutoFit/>
+          </a:bodyPr>
+          <a:lstStyle/>
+          <a:p>
+            <a:pPr algn="l"/>
+            <a:r>
+              <a:rPr sz="3600" b="1">
                 <a:solidFill>
                   <a:srgbClr val="9C2F2A"/>
                 </a:solidFill>
                 <a:latin typeface="Calibri"/>
               </a:rPr>
-              <a:t>Açar söz</a:t>
-            </a:r>
-          </a:p>
-        </p:txBody>
-      </p:sp>
-      <p:sp>
-        <p:nvSpPr>
-          <p:cNvPr id="6" name="TextBox 5"/>
-          <p:cNvSpPr txBox="1"/>
-          <p:nvPr/>
-        </p:nvSpPr>
-        <p:spPr>
-          <a:xfrm>
-            <a:off x="896112" y="2240280"/>
-            <a:ext cx="3108960" cy="1005840"/>
-          </a:xfrm>
-          <a:prstGeom prst="rect">
-            <a:avLst/>
-          </a:prstGeom>
-          <a:noFill/>
-        </p:spPr>
-        <p:txBody>
-          <a:bodyPr wrap="square" lIns="0" rIns="0" tIns="0" bIns="0" anchor="t"/>
-          <a:lstStyle/>
-          <a:p>
-            <a:pPr algn="l">
-              <a:spcAft>
-                <a:spcPts val="0"/>
-              </a:spcAft>
-            </a:pPr>
-            <a:r>
-              <a:rPr sz="1600" b="0">
+              <a:t>1</a:t>
+            </a:r>
+          </a:p>
+        </p:txBody>
+      </p:sp>
+      <p:sp>
+        <p:nvSpPr>
+          <p:cNvPr id="7" name="TextBox 6"/>
+          <p:cNvSpPr txBox="1"/>
+          <p:nvPr/>
+        </p:nvSpPr>
+        <p:spPr>
+          <a:xfrm>
+            <a:off x="822960" y="3383280"/>
+            <a:ext cx="3017520" cy="502920"/>
+          </a:xfrm>
+          <a:prstGeom prst="rect">
+            <a:avLst/>
+          </a:prstGeom>
+          <a:noFill/>
+        </p:spPr>
+        <p:txBody>
+          <a:bodyPr wrap="square" lIns="0" rIns="0" tIns="0" bIns="0" anchor="t">
+            <a:spAutoFit/>
+          </a:bodyPr>
+          <a:lstStyle/>
+          <a:p>
+            <a:pPr algn="l"/>
+            <a:r>
+              <a:rPr sz="2200" b="1">
                 <a:solidFill>
                   <a:srgbClr val="1A1614"/>
                 </a:solidFill>
                 <a:latin typeface="Calibri"/>
               </a:rPr>
-              <a:t>Bir söz yaz.
-Uyğun atalar sözü gəlir.</a:t>
-            </a:r>
-          </a:p>
-        </p:txBody>
-      </p:sp>
-      <p:sp>
-        <p:nvSpPr>
-          <p:cNvPr id="7" name="Rectangle 6"/>
+              <a:t>Yazırsan</a:t>
+            </a:r>
+          </a:p>
+        </p:txBody>
+      </p:sp>
+      <p:sp>
+        <p:nvSpPr>
+          <p:cNvPr id="8" name="TextBox 7"/>
+          <p:cNvSpPr txBox="1"/>
+          <p:nvPr/>
+        </p:nvSpPr>
+        <p:spPr>
+          <a:xfrm>
+            <a:off x="822960" y="4023360"/>
+            <a:ext cx="3017520" cy="1097280"/>
+          </a:xfrm>
+          <a:prstGeom prst="rect">
+            <a:avLst/>
+          </a:prstGeom>
+          <a:noFill/>
+        </p:spPr>
+        <p:txBody>
+          <a:bodyPr wrap="square" lIns="0" rIns="0" tIns="0" bIns="0" anchor="t">
+            <a:spAutoFit/>
+          </a:bodyPr>
+          <a:lstStyle/>
+          <a:p>
+            <a:pPr algn="l"/>
+            <a:r>
+              <a:rPr sz="1800" b="0">
+                <a:solidFill>
+                  <a:srgbClr val="6B625A"/>
+                </a:solidFill>
+                <a:latin typeface="Calibri"/>
+              </a:rPr>
+              <a:t>qonşu</a:t>
+            </a:r>
+          </a:p>
+        </p:txBody>
+      </p:sp>
+      <p:sp>
+        <p:nvSpPr>
+          <p:cNvPr id="9" name="Rectangle 8"/>
           <p:cNvSpPr/>
           <p:nvPr/>
         </p:nvSpPr>
         <p:spPr>
           <a:xfrm>
-            <a:off x="4434840" y="1371600"/>
-            <a:ext cx="3611880" cy="2148840"/>
+            <a:off x="4389120" y="2286000"/>
+            <a:ext cx="3566160" cy="3566160"/>
           </a:xfrm>
           <a:prstGeom prst="rect">
             <a:avLst/>
@@ -4669,89 +5397,119 @@
       </p:sp>
       <p:sp>
         <p:nvSpPr>
-          <p:cNvPr id="8" name="TextBox 7"/>
-          <p:cNvSpPr txBox="1"/>
-          <p:nvPr/>
-        </p:nvSpPr>
-        <p:spPr>
-          <a:xfrm>
-            <a:off x="4690872" y="1627632"/>
-            <a:ext cx="3108960" cy="457200"/>
-          </a:xfrm>
-          <a:prstGeom prst="rect">
-            <a:avLst/>
-          </a:prstGeom>
-          <a:noFill/>
-        </p:spPr>
-        <p:txBody>
-          <a:bodyPr wrap="square" lIns="0" rIns="0" tIns="0" bIns="0" anchor="t"/>
-          <a:lstStyle/>
-          <a:p>
-            <a:pPr algn="l">
-              <a:spcAft>
-                <a:spcPts val="0"/>
-              </a:spcAft>
-            </a:pPr>
-            <a:r>
-              <a:rPr sz="2000" b="1">
+          <p:cNvPr id="10" name="TextBox 9"/>
+          <p:cNvSpPr txBox="1"/>
+          <p:nvPr/>
+        </p:nvSpPr>
+        <p:spPr>
+          <a:xfrm>
+            <a:off x="4663440" y="2514600"/>
+            <a:ext cx="3017520" cy="731520"/>
+          </a:xfrm>
+          <a:prstGeom prst="rect">
+            <a:avLst/>
+          </a:prstGeom>
+          <a:noFill/>
+        </p:spPr>
+        <p:txBody>
+          <a:bodyPr wrap="square" lIns="0" rIns="0" tIns="0" bIns="0" anchor="t">
+            <a:spAutoFit/>
+          </a:bodyPr>
+          <a:lstStyle/>
+          <a:p>
+            <a:pPr algn="l"/>
+            <a:r>
+              <a:rPr sz="3600" b="1">
                 <a:solidFill>
                   <a:srgbClr val="9C2F2A"/>
                 </a:solidFill>
                 <a:latin typeface="Calibri"/>
               </a:rPr>
-              <a:t>Hekayə</a:t>
-            </a:r>
-          </a:p>
-        </p:txBody>
-      </p:sp>
-      <p:sp>
-        <p:nvSpPr>
-          <p:cNvPr id="9" name="TextBox 8"/>
-          <p:cNvSpPr txBox="1"/>
-          <p:nvPr/>
-        </p:nvSpPr>
-        <p:spPr>
-          <a:xfrm>
-            <a:off x="4690872" y="2240280"/>
-            <a:ext cx="3108960" cy="1005840"/>
-          </a:xfrm>
-          <a:prstGeom prst="rect">
-            <a:avLst/>
-          </a:prstGeom>
-          <a:noFill/>
-        </p:spPr>
-        <p:txBody>
-          <a:bodyPr wrap="square" lIns="0" rIns="0" tIns="0" bIns="0" anchor="t"/>
-          <a:lstStyle/>
-          <a:p>
-            <a:pPr algn="l">
-              <a:spcAft>
-                <a:spcPts val="0"/>
-              </a:spcAft>
-            </a:pPr>
-            <a:r>
-              <a:rPr sz="1600" b="0">
+              <a:t>2</a:t>
+            </a:r>
+          </a:p>
+        </p:txBody>
+      </p:sp>
+      <p:sp>
+        <p:nvSpPr>
+          <p:cNvPr id="11" name="TextBox 10"/>
+          <p:cNvSpPr txBox="1"/>
+          <p:nvPr/>
+        </p:nvSpPr>
+        <p:spPr>
+          <a:xfrm>
+            <a:off x="4663440" y="3383280"/>
+            <a:ext cx="3017520" cy="502920"/>
+          </a:xfrm>
+          <a:prstGeom prst="rect">
+            <a:avLst/>
+          </a:prstGeom>
+          <a:noFill/>
+        </p:spPr>
+        <p:txBody>
+          <a:bodyPr wrap="square" lIns="0" rIns="0" tIns="0" bIns="0" anchor="t">
+            <a:spAutoFit/>
+          </a:bodyPr>
+          <a:lstStyle/>
+          <a:p>
+            <a:pPr algn="l"/>
+            <a:r>
+              <a:rPr sz="2200" b="1">
                 <a:solidFill>
                   <a:srgbClr val="1A1614"/>
                 </a:solidFill>
                 <a:latin typeface="Calibri"/>
               </a:rPr>
-              <a:t>Vəziyyəti danış.
-Yaxın sözü seçir.</a:t>
-            </a:r>
-          </a:p>
-        </p:txBody>
-      </p:sp>
-      <p:sp>
-        <p:nvSpPr>
-          <p:cNvPr id="10" name="Rectangle 9"/>
+              <a:t>Bot tutur</a:t>
+            </a:r>
+          </a:p>
+        </p:txBody>
+      </p:sp>
+      <p:sp>
+        <p:nvSpPr>
+          <p:cNvPr id="12" name="TextBox 11"/>
+          <p:cNvSpPr txBox="1"/>
+          <p:nvPr/>
+        </p:nvSpPr>
+        <p:spPr>
+          <a:xfrm>
+            <a:off x="4663440" y="4023360"/>
+            <a:ext cx="3017520" cy="1097280"/>
+          </a:xfrm>
+          <a:prstGeom prst="rect">
+            <a:avLst/>
+          </a:prstGeom>
+          <a:noFill/>
+        </p:spPr>
+        <p:txBody>
+          <a:bodyPr wrap="square" lIns="0" rIns="0" tIns="0" bIns="0" anchor="t">
+            <a:spAutoFit/>
+          </a:bodyPr>
+          <a:lstStyle/>
+          <a:p>
+            <a:pPr algn="l"/>
+            <a:r>
+              <a:rPr sz="1800" b="0">
+                <a:solidFill>
+                  <a:srgbClr val="6B625A"/>
+                </a:solidFill>
+                <a:latin typeface="Calibri"/>
+              </a:rPr>
+              <a:t>hərf fərqini silir</a:t>
+            </a:r>
+          </a:p>
+        </p:txBody>
+      </p:sp>
+      <p:sp>
+        <p:nvSpPr>
+          <p:cNvPr id="13" name="Rectangle 12"/>
           <p:cNvSpPr/>
           <p:nvPr/>
         </p:nvSpPr>
         <p:spPr>
           <a:xfrm>
-            <a:off x="8229600" y="1371600"/>
-            <a:ext cx="3611880" cy="2148840"/>
+            <a:off x="8229600" y="2286000"/>
+            <a:ext cx="3566160" cy="3566160"/>
           </a:xfrm>
           <a:prstGeom prst="rect">
             <a:avLst/>
@@ -4787,237 +5545,106 @@
       </p:sp>
       <p:sp>
         <p:nvSpPr>
-          <p:cNvPr id="11" name="TextBox 10"/>
-          <p:cNvSpPr txBox="1"/>
-          <p:nvPr/>
-        </p:nvSpPr>
-        <p:spPr>
-          <a:xfrm>
-            <a:off x="8485632" y="1627632"/>
-            <a:ext cx="3108960" cy="457200"/>
-          </a:xfrm>
-          <a:prstGeom prst="rect">
-            <a:avLst/>
-          </a:prstGeom>
-          <a:noFill/>
-        </p:spPr>
-        <p:txBody>
-          <a:bodyPr wrap="square" lIns="0" rIns="0" tIns="0" bIns="0" anchor="t"/>
-          <a:lstStyle/>
-          <a:p>
-            <a:pPr algn="l">
-              <a:spcAft>
-                <a:spcPts val="0"/>
-              </a:spcAft>
-            </a:pPr>
-            <a:r>
-              <a:rPr sz="2000" b="1">
+          <p:cNvPr id="14" name="TextBox 13"/>
+          <p:cNvSpPr txBox="1"/>
+          <p:nvPr/>
+        </p:nvSpPr>
+        <p:spPr>
+          <a:xfrm>
+            <a:off x="8503920" y="2514600"/>
+            <a:ext cx="3017520" cy="731520"/>
+          </a:xfrm>
+          <a:prstGeom prst="rect">
+            <a:avLst/>
+          </a:prstGeom>
+          <a:noFill/>
+        </p:spPr>
+        <p:txBody>
+          <a:bodyPr wrap="square" lIns="0" rIns="0" tIns="0" bIns="0" anchor="t">
+            <a:spAutoFit/>
+          </a:bodyPr>
+          <a:lstStyle/>
+          <a:p>
+            <a:pPr algn="l"/>
+            <a:r>
+              <a:rPr sz="3600" b="1">
                 <a:solidFill>
                   <a:srgbClr val="9C2F2A"/>
                 </a:solidFill>
                 <a:latin typeface="Calibri"/>
               </a:rPr>
-              <a:t>Mövzular</a:t>
-            </a:r>
-          </a:p>
-        </p:txBody>
-      </p:sp>
-      <p:sp>
-        <p:nvSpPr>
-          <p:cNvPr id="12" name="TextBox 11"/>
-          <p:cNvSpPr txBox="1"/>
-          <p:nvPr/>
-        </p:nvSpPr>
-        <p:spPr>
-          <a:xfrm>
-            <a:off x="8485632" y="2240280"/>
-            <a:ext cx="3108960" cy="1005840"/>
-          </a:xfrm>
-          <a:prstGeom prst="rect">
-            <a:avLst/>
-          </a:prstGeom>
-          <a:noFill/>
-        </p:spPr>
-        <p:txBody>
-          <a:bodyPr wrap="square" lIns="0" rIns="0" tIns="0" bIns="0" anchor="t"/>
-          <a:lstStyle/>
-          <a:p>
-            <a:pPr algn="l">
-              <a:spcAft>
-                <a:spcPts val="0"/>
-              </a:spcAft>
-            </a:pPr>
-            <a:r>
-              <a:rPr sz="1600" b="0">
+              <a:t>3</a:t>
+            </a:r>
+          </a:p>
+        </p:txBody>
+      </p:sp>
+      <p:sp>
+        <p:nvSpPr>
+          <p:cNvPr id="15" name="TextBox 14"/>
+          <p:cNvSpPr txBox="1"/>
+          <p:nvPr/>
+        </p:nvSpPr>
+        <p:spPr>
+          <a:xfrm>
+            <a:off x="8503920" y="3383280"/>
+            <a:ext cx="3017520" cy="502920"/>
+          </a:xfrm>
+          <a:prstGeom prst="rect">
+            <a:avLst/>
+          </a:prstGeom>
+          <a:noFill/>
+        </p:spPr>
+        <p:txBody>
+          <a:bodyPr wrap="square" lIns="0" rIns="0" tIns="0" bIns="0" anchor="t">
+            <a:spAutoFit/>
+          </a:bodyPr>
+          <a:lstStyle/>
+          <a:p>
+            <a:pPr algn="l"/>
+            <a:r>
+              <a:rPr sz="2200" b="1">
                 <a:solidFill>
                   <a:srgbClr val="1A1614"/>
                 </a:solidFill>
                 <a:latin typeface="Calibri"/>
               </a:rPr>
-              <a:t>On bir qutu.
-Hamısı səhifə-səhifə.</a:t>
-            </a:r>
-          </a:p>
-        </p:txBody>
-      </p:sp>
-      <p:sp>
-        <p:nvSpPr>
-          <p:cNvPr id="13" name="Rectangle 12"/>
-          <p:cNvSpPr/>
-          <p:nvPr/>
-        </p:nvSpPr>
-        <p:spPr>
-          <a:xfrm>
-            <a:off x="640080" y="3703320"/>
-            <a:ext cx="3611880" cy="2148840"/>
-          </a:xfrm>
-          <a:prstGeom prst="rect">
-            <a:avLst/>
-          </a:prstGeom>
-          <a:solidFill>
-            <a:srgbClr val="FFFFFF"/>
-          </a:solidFill>
-          <a:ln>
-            <a:noFill/>
-          </a:ln>
-        </p:spPr>
-        <p:style>
-          <a:lnRef idx="1">
-            <a:schemeClr val="accent1"/>
-          </a:lnRef>
-          <a:fillRef idx="3">
-            <a:schemeClr val="accent1"/>
-          </a:fillRef>
-          <a:effectRef idx="2">
-            <a:schemeClr val="accent1"/>
-          </a:effectRef>
-          <a:fontRef idx="minor">
-            <a:schemeClr val="lt1"/>
-          </a:fontRef>
-        </p:style>
-        <p:txBody>
-          <a:bodyPr rtlCol="0" anchor="ctr"/>
-          <a:lstStyle/>
-          <a:p>
-            <a:pPr algn="ctr"/>
-          </a:p>
-        </p:txBody>
-      </p:sp>
-      <p:sp>
-        <p:nvSpPr>
-          <p:cNvPr id="14" name="TextBox 13"/>
-          <p:cNvSpPr txBox="1"/>
-          <p:nvPr/>
-        </p:nvSpPr>
-        <p:spPr>
-          <a:xfrm>
-            <a:off x="896112" y="3959352"/>
-            <a:ext cx="3108960" cy="457200"/>
-          </a:xfrm>
-          <a:prstGeom prst="rect">
-            <a:avLst/>
-          </a:prstGeom>
-          <a:noFill/>
-        </p:spPr>
-        <p:txBody>
-          <a:bodyPr wrap="square" lIns="0" rIns="0" tIns="0" bIns="0" anchor="t"/>
-          <a:lstStyle/>
-          <a:p>
-            <a:pPr algn="l">
-              <a:spcAft>
-                <a:spcPts val="0"/>
-              </a:spcAft>
-            </a:pPr>
-            <a:r>
-              <a:rPr sz="2000" b="1">
-                <a:solidFill>
-                  <a:srgbClr val="9C2F2A"/>
-                </a:solidFill>
-                <a:latin typeface="Calibri"/>
-              </a:rPr>
-              <a:t>Quiz</a:t>
-            </a:r>
-          </a:p>
-        </p:txBody>
-      </p:sp>
-      <p:sp>
-        <p:nvSpPr>
-          <p:cNvPr id="15" name="TextBox 14"/>
-          <p:cNvSpPr txBox="1"/>
-          <p:nvPr/>
-        </p:nvSpPr>
-        <p:spPr>
-          <a:xfrm>
-            <a:off x="896112" y="4572000"/>
-            <a:ext cx="3108960" cy="1005840"/>
-          </a:xfrm>
-          <a:prstGeom prst="rect">
-            <a:avLst/>
-          </a:prstGeom>
-          <a:noFill/>
-        </p:spPr>
-        <p:txBody>
-          <a:bodyPr wrap="square" lIns="0" rIns="0" tIns="0" bIns="0" anchor="t"/>
-          <a:lstStyle/>
-          <a:p>
-            <a:pPr algn="l">
-              <a:spcAft>
-                <a:spcPts val="0"/>
-              </a:spcAft>
-            </a:pPr>
-            <a:r>
-              <a:rPr sz="1600" b="0">
-                <a:solidFill>
-                  <a:srgbClr val="1A1614"/>
-                </a:solidFill>
-                <a:latin typeface="Calibri"/>
-              </a:rPr>
-              <a:t>Çatışmayan sözü
-tamamla, ya da pas keç.</a:t>
-            </a:r>
-          </a:p>
-        </p:txBody>
-      </p:sp>
-      <p:sp>
-        <p:nvSpPr>
-          <p:cNvPr id="16" name="Rectangle 15"/>
-          <p:cNvSpPr/>
-          <p:nvPr/>
-        </p:nvSpPr>
-        <p:spPr>
-          <a:xfrm>
-            <a:off x="4434840" y="3703320"/>
-            <a:ext cx="3611880" cy="2148840"/>
-          </a:xfrm>
-          <a:prstGeom prst="rect">
-            <a:avLst/>
-          </a:prstGeom>
-          <a:solidFill>
-            <a:srgbClr val="FFFFFF"/>
-          </a:solidFill>
-          <a:ln>
-            <a:noFill/>
-          </a:ln>
-        </p:spPr>
-        <p:style>
-          <a:lnRef idx="1">
-            <a:schemeClr val="accent1"/>
-          </a:lnRef>
-          <a:fillRef idx="3">
-            <a:schemeClr val="accent1"/>
-          </a:fillRef>
-          <a:effectRef idx="2">
-            <a:schemeClr val="accent1"/>
-          </a:effectRef>
-          <a:fontRef idx="minor">
-            <a:schemeClr val="lt1"/>
-          </a:fontRef>
-        </p:style>
-        <p:txBody>
-          <a:bodyPr rtlCol="0" anchor="ctr"/>
-          <a:lstStyle/>
-          <a:p>
-            <a:pPr algn="ctr"/>
+              <a:t>Alırsan</a:t>
+            </a:r>
+          </a:p>
+        </p:txBody>
+      </p:sp>
+      <p:sp>
+        <p:nvSpPr>
+          <p:cNvPr id="16" name="TextBox 15"/>
+          <p:cNvSpPr txBox="1"/>
+          <p:nvPr/>
+        </p:nvSpPr>
+        <p:spPr>
+          <a:xfrm>
+            <a:off x="8503920" y="4023360"/>
+            <a:ext cx="3017520" cy="1097280"/>
+          </a:xfrm>
+          <a:prstGeom prst="rect">
+            <a:avLst/>
+          </a:prstGeom>
+          <a:noFill/>
+        </p:spPr>
+        <p:txBody>
+          <a:bodyPr wrap="square" lIns="0" rIns="0" tIns="0" bIns="0" anchor="t">
+            <a:spAutoFit/>
+          </a:bodyPr>
+          <a:lstStyle/>
+          <a:p>
+            <a:pPr algn="l"/>
+            <a:r>
+              <a:rPr sz="1800" b="0">
+                <a:solidFill>
+                  <a:srgbClr val="6B625A"/>
+                </a:solidFill>
+                <a:latin typeface="Calibri"/>
+              </a:rPr>
+              <a:t>səkkizə qədər söz</a:t>
+            </a:r>
           </a:p>
         </p:txBody>
       </p:sp>
@@ -5029,31 +5656,29 @@
         </p:nvSpPr>
         <p:spPr>
           <a:xfrm>
-            <a:off x="4690872" y="3959352"/>
-            <a:ext cx="3108960" cy="457200"/>
-          </a:xfrm>
-          <a:prstGeom prst="rect">
-            <a:avLst/>
-          </a:prstGeom>
-          <a:noFill/>
-        </p:spPr>
-        <p:txBody>
-          <a:bodyPr wrap="square" lIns="0" rIns="0" tIns="0" bIns="0" anchor="t"/>
-          <a:lstStyle/>
-          <a:p>
-            <a:pPr algn="l">
-              <a:spcAft>
-                <a:spcPts val="0"/>
-              </a:spcAft>
-            </a:pPr>
-            <a:r>
-              <a:rPr sz="2000" b="1">
-                <a:solidFill>
-                  <a:srgbClr val="9C2F2A"/>
-                </a:solidFill>
-                <a:latin typeface="Calibri"/>
-              </a:rPr>
-              <a:t>Günün sözü</a:t>
+            <a:off x="502920" y="6473952"/>
+            <a:ext cx="7315200" cy="256032"/>
+          </a:xfrm>
+          <a:prstGeom prst="rect">
+            <a:avLst/>
+          </a:prstGeom>
+          <a:noFill/>
+        </p:spPr>
+        <p:txBody>
+          <a:bodyPr wrap="square" lIns="0" rIns="0" tIns="0" bIns="0" anchor="t">
+            <a:spAutoFit/>
+          </a:bodyPr>
+          <a:lstStyle/>
+          <a:p>
+            <a:pPr algn="l"/>
+            <a:r>
+              <a:rPr sz="1200" b="0">
+                <a:solidFill>
+                  <a:srgbClr val="6B625A"/>
+                </a:solidFill>
+                <a:latin typeface="Calibri"/>
+              </a:rPr>
+              <a:t>Atalar sözü  ·  @AtalarSozleri_bot</a:t>
             </a:r>
           </a:p>
         </p:txBody>
@@ -5066,218 +5691,23 @@
         </p:nvSpPr>
         <p:spPr>
           <a:xfrm>
-            <a:off x="4690872" y="4572000"/>
-            <a:ext cx="3108960" cy="1005840"/>
-          </a:xfrm>
-          <a:prstGeom prst="rect">
-            <a:avLst/>
-          </a:prstGeom>
-          <a:noFill/>
-        </p:spPr>
-        <p:txBody>
-          <a:bodyPr wrap="square" lIns="0" rIns="0" tIns="0" bIns="0" anchor="t"/>
-          <a:lstStyle/>
-          <a:p>
-            <a:pPr algn="l">
-              <a:spcAft>
-                <a:spcPts val="0"/>
-              </a:spcAft>
-            </a:pPr>
-            <a:r>
-              <a:rPr sz="1600" b="0">
-                <a:solidFill>
-                  <a:srgbClr val="1A1614"/>
-                </a:solidFill>
-                <a:latin typeface="Calibri"/>
-              </a:rPr>
-              <a:t>Bu gün hamıya
-eyni bir öyüd.</a:t>
-            </a:r>
-          </a:p>
-        </p:txBody>
-      </p:sp>
-      <p:sp>
-        <p:nvSpPr>
-          <p:cNvPr id="19" name="Rectangle 18"/>
-          <p:cNvSpPr/>
-          <p:nvPr/>
-        </p:nvSpPr>
-        <p:spPr>
-          <a:xfrm>
-            <a:off x="8229600" y="3703320"/>
-            <a:ext cx="3611880" cy="2148840"/>
-          </a:xfrm>
-          <a:prstGeom prst="rect">
-            <a:avLst/>
-          </a:prstGeom>
-          <a:solidFill>
-            <a:srgbClr val="FFFFFF"/>
-          </a:solidFill>
-          <a:ln>
-            <a:noFill/>
-          </a:ln>
-        </p:spPr>
-        <p:style>
-          <a:lnRef idx="1">
-            <a:schemeClr val="accent1"/>
-          </a:lnRef>
-          <a:fillRef idx="3">
-            <a:schemeClr val="accent1"/>
-          </a:fillRef>
-          <a:effectRef idx="2">
-            <a:schemeClr val="accent1"/>
-          </a:effectRef>
-          <a:fontRef idx="minor">
-            <a:schemeClr val="lt1"/>
-          </a:fontRef>
-        </p:style>
-        <p:txBody>
-          <a:bodyPr rtlCol="0" anchor="ctr"/>
-          <a:lstStyle/>
-          <a:p>
-            <a:pPr algn="ctr"/>
-          </a:p>
-        </p:txBody>
-      </p:sp>
-      <p:sp>
-        <p:nvSpPr>
-          <p:cNvPr id="20" name="TextBox 19"/>
-          <p:cNvSpPr txBox="1"/>
-          <p:nvPr/>
-        </p:nvSpPr>
-        <p:spPr>
-          <a:xfrm>
-            <a:off x="8485632" y="3959352"/>
-            <a:ext cx="3108960" cy="457200"/>
-          </a:xfrm>
-          <a:prstGeom prst="rect">
-            <a:avLst/>
-          </a:prstGeom>
-          <a:noFill/>
-        </p:spPr>
-        <p:txBody>
-          <a:bodyPr wrap="square" lIns="0" rIns="0" tIns="0" bIns="0" anchor="t"/>
-          <a:lstStyle/>
-          <a:p>
-            <a:pPr algn="l">
-              <a:spcAft>
-                <a:spcPts val="0"/>
-              </a:spcAft>
-            </a:pPr>
-            <a:r>
-              <a:rPr sz="2000" b="1">
-                <a:solidFill>
-                  <a:srgbClr val="9C2F2A"/>
-                </a:solidFill>
-                <a:latin typeface="Calibri"/>
-              </a:rPr>
-              <a:t>Inline</a:t>
-            </a:r>
-          </a:p>
-        </p:txBody>
-      </p:sp>
-      <p:sp>
-        <p:nvSpPr>
-          <p:cNvPr id="21" name="TextBox 20"/>
-          <p:cNvSpPr txBox="1"/>
-          <p:nvPr/>
-        </p:nvSpPr>
-        <p:spPr>
-          <a:xfrm>
-            <a:off x="8485632" y="4572000"/>
-            <a:ext cx="3108960" cy="1005840"/>
-          </a:xfrm>
-          <a:prstGeom prst="rect">
-            <a:avLst/>
-          </a:prstGeom>
-          <a:noFill/>
-        </p:spPr>
-        <p:txBody>
-          <a:bodyPr wrap="square" lIns="0" rIns="0" tIns="0" bIns="0" anchor="t"/>
-          <a:lstStyle/>
-          <a:p>
-            <a:pPr algn="l">
-              <a:spcAft>
-                <a:spcPts val="0"/>
-              </a:spcAft>
-            </a:pPr>
-            <a:r>
-              <a:rPr sz="1600" b="0">
-                <a:solidFill>
-                  <a:srgbClr val="1A1614"/>
-                </a:solidFill>
-                <a:latin typeface="Calibri"/>
-              </a:rPr>
-              <a:t>Başqa söhbətdə
-@bot yaz, göndər.</a:t>
-            </a:r>
-          </a:p>
-        </p:txBody>
-      </p:sp>
-      <p:sp>
-        <p:nvSpPr>
-          <p:cNvPr id="22" name="TextBox 21"/>
-          <p:cNvSpPr txBox="1"/>
-          <p:nvPr/>
-        </p:nvSpPr>
-        <p:spPr>
-          <a:xfrm>
-            <a:off x="548640" y="6446520"/>
-            <a:ext cx="7315200" cy="274320"/>
-          </a:xfrm>
-          <a:prstGeom prst="rect">
-            <a:avLst/>
-          </a:prstGeom>
-          <a:noFill/>
-        </p:spPr>
-        <p:txBody>
-          <a:bodyPr wrap="square" lIns="0" rIns="0" tIns="0" bIns="0" anchor="t"/>
-          <a:lstStyle/>
-          <a:p>
-            <a:pPr algn="l">
-              <a:spcAft>
-                <a:spcPts val="0"/>
-              </a:spcAft>
-            </a:pPr>
-            <a:r>
-              <a:rPr sz="1100" b="0">
-                <a:solidFill>
-                  <a:srgbClr val="6B625A"/>
-                </a:solidFill>
-                <a:latin typeface="Calibri"/>
-              </a:rPr>
-              <a:t>Atalar sözü  ·  @AtalarSozleri_bot</a:t>
-            </a:r>
-          </a:p>
-        </p:txBody>
-      </p:sp>
-      <p:sp>
-        <p:nvSpPr>
-          <p:cNvPr id="23" name="TextBox 22"/>
-          <p:cNvSpPr txBox="1"/>
-          <p:nvPr/>
-        </p:nvSpPr>
-        <p:spPr>
-          <a:xfrm>
-            <a:off x="10424160" y="6446520"/>
-            <a:ext cx="1280160" cy="274320"/>
-          </a:xfrm>
-          <a:prstGeom prst="rect">
-            <a:avLst/>
-          </a:prstGeom>
-          <a:noFill/>
-        </p:spPr>
-        <p:txBody>
-          <a:bodyPr wrap="square" lIns="0" rIns="0" tIns="0" bIns="0" anchor="t"/>
-          <a:lstStyle/>
-          <a:p>
-            <a:pPr algn="r">
-              <a:spcAft>
-                <a:spcPts val="0"/>
-              </a:spcAft>
-            </a:pPr>
-            <a:r>
-              <a:rPr sz="1100" b="0">
+            <a:off x="10241280" y="6473952"/>
+            <a:ext cx="1463040" cy="256032"/>
+          </a:xfrm>
+          <a:prstGeom prst="rect">
+            <a:avLst/>
+          </a:prstGeom>
+          <a:noFill/>
+        </p:spPr>
+        <p:txBody>
+          <a:bodyPr wrap="square" lIns="0" rIns="0" tIns="0" bIns="0" anchor="t">
+            <a:spAutoFit/>
+          </a:bodyPr>
+          <a:lstStyle/>
+          <a:p>
+            <a:pPr algn="r"/>
+            <a:r>
+              <a:rPr sz="1200" b="0">
                 <a:solidFill>
                   <a:srgbClr val="6B625A"/>
                 </a:solidFill>
@@ -5321,7 +5751,7 @@
             <a:avLst/>
           </a:prstGeom>
           <a:solidFill>
-            <a:srgbClr val="FBF7F1"/>
+            <a:srgbClr val="F6F1E7"/>
           </a:solidFill>
           <a:ln>
             <a:noFill/>
@@ -5349,59 +5779,116 @@
           </a:p>
         </p:txBody>
       </p:sp>
-      <p:sp>
-        <p:nvSpPr>
-          <p:cNvPr id="3" name="TextBox 2"/>
-          <p:cNvSpPr txBox="1"/>
-          <p:nvPr/>
-        </p:nvSpPr>
-        <p:spPr>
-          <a:xfrm>
-            <a:off x="640080" y="411480"/>
-            <a:ext cx="10972800" cy="640080"/>
-          </a:xfrm>
-          <a:prstGeom prst="rect">
-            <a:avLst/>
-          </a:prstGeom>
-          <a:noFill/>
-        </p:spPr>
-        <p:txBody>
-          <a:bodyPr wrap="square" lIns="0" rIns="0" tIns="0" bIns="0" anchor="t"/>
-          <a:lstStyle/>
-          <a:p>
-            <a:pPr algn="l">
-              <a:spcAft>
-                <a:spcPts val="0"/>
-              </a:spcAft>
-            </a:pPr>
-            <a:r>
-              <a:rPr sz="3200" b="1">
+      <p:pic>
+        <p:nvPicPr>
+          <p:cNvPr id="3" name="Picture 2" descr="a0ce12cd-2f54-4b59-8fc7-914dbda52c9b.jpg"/>
+          <p:cNvPicPr>
+            <a:picLocks noChangeAspect="1"/>
+          </p:cNvPicPr>
+          <p:nvPr/>
+        </p:nvPicPr>
+        <p:blipFill>
+          <a:blip r:embed="rId2"/>
+          <a:stretch>
+            <a:fillRect/>
+          </a:stretch>
+        </p:blipFill>
+        <p:spPr>
+          <a:xfrm>
+            <a:off x="502920" y="320040"/>
+            <a:ext cx="1234440" cy="1234440"/>
+          </a:xfrm>
+          <a:prstGeom prst="rect">
+            <a:avLst/>
+          </a:prstGeom>
+        </p:spPr>
+      </p:pic>
+      <p:sp>
+        <p:nvSpPr>
+          <p:cNvPr id="4" name="TextBox 3"/>
+          <p:cNvSpPr txBox="1"/>
+          <p:nvPr/>
+        </p:nvSpPr>
+        <p:spPr>
+          <a:xfrm>
+            <a:off x="1874519" y="411480"/>
+            <a:ext cx="9144000" cy="411480"/>
+          </a:xfrm>
+          <a:prstGeom prst="rect">
+            <a:avLst/>
+          </a:prstGeom>
+          <a:noFill/>
+        </p:spPr>
+        <p:txBody>
+          <a:bodyPr wrap="square" lIns="0" rIns="0" tIns="0" bIns="0" anchor="t">
+            <a:spAutoFit/>
+          </a:bodyPr>
+          <a:lstStyle/>
+          <a:p>
+            <a:pPr algn="l"/>
+            <a:r>
+              <a:rPr sz="2800" b="1">
                 <a:solidFill>
                   <a:srgbClr val="1A1614"/>
                 </a:solidFill>
                 <a:latin typeface="Calibri"/>
               </a:rPr>
-              <a:t>Necə işləyir</a:t>
-            </a:r>
-          </a:p>
-        </p:txBody>
-      </p:sp>
-      <p:sp>
-        <p:nvSpPr>
-          <p:cNvPr id="4" name="Rectangle 3"/>
+              <a:t>Quiz</a:t>
+            </a:r>
+          </a:p>
+        </p:txBody>
+      </p:sp>
+      <p:sp>
+        <p:nvSpPr>
+          <p:cNvPr id="5" name="TextBox 4"/>
+          <p:cNvSpPr txBox="1"/>
+          <p:nvPr/>
+        </p:nvSpPr>
+        <p:spPr>
+          <a:xfrm>
+            <a:off x="1874519" y="914400"/>
+            <a:ext cx="9144000" cy="502920"/>
+          </a:xfrm>
+          <a:prstGeom prst="rect">
+            <a:avLst/>
+          </a:prstGeom>
+          <a:noFill/>
+        </p:spPr>
+        <p:txBody>
+          <a:bodyPr wrap="square" lIns="0" rIns="0" tIns="0" bIns="0" anchor="t">
+            <a:spAutoFit/>
+          </a:bodyPr>
+          <a:lstStyle/>
+          <a:p>
+            <a:pPr algn="l"/>
+            <a:r>
+              <a:rPr sz="2600" b="1">
+                <a:solidFill>
+                  <a:srgbClr val="9C2F2A"/>
+                </a:solidFill>
+                <a:latin typeface="Calibri"/>
+              </a:rPr>
+              <a:t>«Ev alma, …… al.»</a:t>
+            </a:r>
+          </a:p>
+        </p:txBody>
+      </p:sp>
+      <p:sp>
+        <p:nvSpPr>
+          <p:cNvPr id="6" name="Rectangle 5"/>
           <p:cNvSpPr/>
           <p:nvPr/>
         </p:nvSpPr>
         <p:spPr>
           <a:xfrm>
-            <a:off x="640080" y="1645920"/>
-            <a:ext cx="3566160" cy="3931920"/>
+            <a:off x="502920" y="1965960"/>
+            <a:ext cx="3611880" cy="3931920"/>
           </a:xfrm>
           <a:prstGeom prst="rect">
             <a:avLst/>
           </a:prstGeom>
           <a:solidFill>
-            <a:srgbClr val="FFFFFF"/>
+            <a:srgbClr val="9C2F2A"/>
           </a:solidFill>
           <a:ln>
             <a:noFill/>
@@ -5431,131 +5918,91 @@
       </p:sp>
       <p:sp>
         <p:nvSpPr>
-          <p:cNvPr id="5" name="TextBox 4"/>
-          <p:cNvSpPr txBox="1"/>
-          <p:nvPr/>
-        </p:nvSpPr>
-        <p:spPr>
-          <a:xfrm>
-            <a:off x="914400" y="1874519"/>
-            <a:ext cx="3017520" cy="731520"/>
-          </a:xfrm>
-          <a:prstGeom prst="rect">
-            <a:avLst/>
-          </a:prstGeom>
-          <a:noFill/>
-        </p:spPr>
-        <p:txBody>
-          <a:bodyPr wrap="square" lIns="0" rIns="0" tIns="0" bIns="0" anchor="t"/>
-          <a:lstStyle/>
-          <a:p>
-            <a:pPr algn="l">
-              <a:spcAft>
-                <a:spcPts val="0"/>
-              </a:spcAft>
-            </a:pPr>
-            <a:r>
-              <a:rPr sz="3600" b="1">
-                <a:solidFill>
-                  <a:srgbClr val="9C2F2A"/>
-                </a:solidFill>
-                <a:latin typeface="Calibri"/>
-              </a:rPr>
-              <a:t>1</a:t>
-            </a:r>
-          </a:p>
-        </p:txBody>
-      </p:sp>
-      <p:sp>
-        <p:nvSpPr>
-          <p:cNvPr id="6" name="TextBox 5"/>
-          <p:cNvSpPr txBox="1"/>
-          <p:nvPr/>
-        </p:nvSpPr>
-        <p:spPr>
-          <a:xfrm>
-            <a:off x="914400" y="2743200"/>
-            <a:ext cx="3017520" cy="548640"/>
-          </a:xfrm>
-          <a:prstGeom prst="rect">
-            <a:avLst/>
-          </a:prstGeom>
-          <a:noFill/>
-        </p:spPr>
-        <p:txBody>
-          <a:bodyPr wrap="square" lIns="0" rIns="0" tIns="0" bIns="0" anchor="t"/>
-          <a:lstStyle/>
-          <a:p>
-            <a:pPr algn="l">
-              <a:spcAft>
-                <a:spcPts val="0"/>
-              </a:spcAft>
-            </a:pPr>
-            <a:r>
-              <a:rPr sz="2200" b="1">
-                <a:solidFill>
-                  <a:srgbClr val="1A1614"/>
-                </a:solidFill>
-                <a:latin typeface="Calibri"/>
-              </a:rPr>
-              <a:t>Yazırsan</a:t>
-            </a:r>
-          </a:p>
-        </p:txBody>
-      </p:sp>
-      <p:sp>
-        <p:nvSpPr>
           <p:cNvPr id="7" name="TextBox 6"/>
           <p:cNvSpPr txBox="1"/>
           <p:nvPr/>
         </p:nvSpPr>
         <p:spPr>
           <a:xfrm>
-            <a:off x="914400" y="3474720"/>
-            <a:ext cx="3017520" cy="1463040"/>
-          </a:xfrm>
-          <a:prstGeom prst="rect">
-            <a:avLst/>
-          </a:prstGeom>
-          <a:noFill/>
-        </p:spPr>
-        <p:txBody>
-          <a:bodyPr wrap="square" lIns="0" rIns="0" tIns="0" bIns="0" anchor="t"/>
-          <a:lstStyle/>
-          <a:p>
-            <a:pPr algn="l">
-              <a:spcAft>
-                <a:spcPts val="0"/>
-              </a:spcAft>
-            </a:pPr>
-            <a:r>
-              <a:rPr sz="1800" b="0">
-                <a:solidFill>
-                  <a:srgbClr val="6B625A"/>
-                </a:solidFill>
-                <a:latin typeface="Calibri"/>
-              </a:rPr>
-              <a:t>qonşu</a:t>
-            </a:r>
-          </a:p>
-        </p:txBody>
-      </p:sp>
-      <p:sp>
-        <p:nvSpPr>
-          <p:cNvPr id="8" name="Rectangle 7"/>
+            <a:off x="822960" y="2331720"/>
+            <a:ext cx="2926080" cy="640080"/>
+          </a:xfrm>
+          <a:prstGeom prst="rect">
+            <a:avLst/>
+          </a:prstGeom>
+          <a:noFill/>
+        </p:spPr>
+        <p:txBody>
+          <a:bodyPr wrap="square" lIns="0" rIns="0" tIns="0" bIns="0" anchor="t">
+            <a:spAutoFit/>
+          </a:bodyPr>
+          <a:lstStyle/>
+          <a:p>
+            <a:pPr algn="l"/>
+            <a:r>
+              <a:rPr sz="2800" b="1">
+                <a:solidFill>
+                  <a:srgbClr val="FFFFFF"/>
+                </a:solidFill>
+                <a:latin typeface="Calibri"/>
+              </a:rPr>
+              <a:t>Düz</a:t>
+            </a:r>
+          </a:p>
+        </p:txBody>
+      </p:sp>
+      <p:sp>
+        <p:nvSpPr>
+          <p:cNvPr id="8" name="TextBox 7"/>
+          <p:cNvSpPr txBox="1"/>
+          <p:nvPr/>
+        </p:nvSpPr>
+        <p:spPr>
+          <a:xfrm>
+            <a:off x="822960" y="3200400"/>
+            <a:ext cx="2926080" cy="1828800"/>
+          </a:xfrm>
+          <a:prstGeom prst="rect">
+            <a:avLst/>
+          </a:prstGeom>
+          <a:noFill/>
+        </p:spPr>
+        <p:txBody>
+          <a:bodyPr wrap="square" lIns="0" rIns="0" tIns="0" bIns="0" anchor="t">
+            <a:spAutoFit/>
+          </a:bodyPr>
+          <a:lstStyle/>
+          <a:p>
+            <a:pPr algn="l"/>
+            <a:r>
+              <a:rPr sz="2000" b="0">
+                <a:solidFill>
+                  <a:srgbClr val="FFFFFF"/>
+                </a:solidFill>
+                <a:latin typeface="Calibri"/>
+              </a:rPr>
+              <a:t>Təbrik.
+Tam söz və izah.</a:t>
+            </a:r>
+          </a:p>
+        </p:txBody>
+      </p:sp>
+      <p:sp>
+        <p:nvSpPr>
+          <p:cNvPr id="9" name="Rectangle 8"/>
           <p:cNvSpPr/>
           <p:nvPr/>
         </p:nvSpPr>
         <p:spPr>
           <a:xfrm>
-            <a:off x="4434840" y="1645920"/>
-            <a:ext cx="3566160" cy="3931920"/>
+            <a:off x="4343400" y="1965960"/>
+            <a:ext cx="3611880" cy="3931920"/>
           </a:xfrm>
           <a:prstGeom prst="rect">
             <a:avLst/>
           </a:prstGeom>
           <a:solidFill>
-            <a:srgbClr val="FFFFFF"/>
+            <a:srgbClr val="1A1614"/>
           </a:solidFill>
           <a:ln>
             <a:noFill/>
@@ -5585,74 +6032,35 @@
       </p:sp>
       <p:sp>
         <p:nvSpPr>
-          <p:cNvPr id="9" name="TextBox 8"/>
-          <p:cNvSpPr txBox="1"/>
-          <p:nvPr/>
-        </p:nvSpPr>
-        <p:spPr>
-          <a:xfrm>
-            <a:off x="4709160" y="1874519"/>
-            <a:ext cx="3017520" cy="731520"/>
-          </a:xfrm>
-          <a:prstGeom prst="rect">
-            <a:avLst/>
-          </a:prstGeom>
-          <a:noFill/>
-        </p:spPr>
-        <p:txBody>
-          <a:bodyPr wrap="square" lIns="0" rIns="0" tIns="0" bIns="0" anchor="t"/>
-          <a:lstStyle/>
-          <a:p>
-            <a:pPr algn="l">
-              <a:spcAft>
-                <a:spcPts val="0"/>
-              </a:spcAft>
-            </a:pPr>
-            <a:r>
-              <a:rPr sz="3600" b="1">
-                <a:solidFill>
-                  <a:srgbClr val="9C2F2A"/>
-                </a:solidFill>
-                <a:latin typeface="Calibri"/>
-              </a:rPr>
-              <a:t>2</a:t>
-            </a:r>
-          </a:p>
-        </p:txBody>
-      </p:sp>
-      <p:sp>
-        <p:nvSpPr>
           <p:cNvPr id="10" name="TextBox 9"/>
           <p:cNvSpPr txBox="1"/>
           <p:nvPr/>
         </p:nvSpPr>
         <p:spPr>
           <a:xfrm>
-            <a:off x="4709160" y="2743200"/>
-            <a:ext cx="3017520" cy="548640"/>
-          </a:xfrm>
-          <a:prstGeom prst="rect">
-            <a:avLst/>
-          </a:prstGeom>
-          <a:noFill/>
-        </p:spPr>
-        <p:txBody>
-          <a:bodyPr wrap="square" lIns="0" rIns="0" tIns="0" bIns="0" anchor="t"/>
-          <a:lstStyle/>
-          <a:p>
-            <a:pPr algn="l">
-              <a:spcAft>
-                <a:spcPts val="0"/>
-              </a:spcAft>
-            </a:pPr>
-            <a:r>
-              <a:rPr sz="2200" b="1">
-                <a:solidFill>
-                  <a:srgbClr val="1A1614"/>
-                </a:solidFill>
-                <a:latin typeface="Calibri"/>
-              </a:rPr>
-              <a:t>Bot tutur</a:t>
+            <a:off x="4663440" y="2331720"/>
+            <a:ext cx="2926080" cy="640080"/>
+          </a:xfrm>
+          <a:prstGeom prst="rect">
+            <a:avLst/>
+          </a:prstGeom>
+          <a:noFill/>
+        </p:spPr>
+        <p:txBody>
+          <a:bodyPr wrap="square" lIns="0" rIns="0" tIns="0" bIns="0" anchor="t">
+            <a:spAutoFit/>
+          </a:bodyPr>
+          <a:lstStyle/>
+          <a:p>
+            <a:pPr algn="l"/>
+            <a:r>
+              <a:rPr sz="2800" b="1">
+                <a:solidFill>
+                  <a:srgbClr val="F6F1E7"/>
+                </a:solidFill>
+                <a:latin typeface="Calibri"/>
+              </a:rPr>
+              <a:t>Səhv</a:t>
             </a:r>
           </a:p>
         </p:txBody>
@@ -5665,32 +6073,30 @@
         </p:nvSpPr>
         <p:spPr>
           <a:xfrm>
-            <a:off x="4709160" y="3474720"/>
-            <a:ext cx="3017520" cy="1463040"/>
-          </a:xfrm>
-          <a:prstGeom prst="rect">
-            <a:avLst/>
-          </a:prstGeom>
-          <a:noFill/>
-        </p:spPr>
-        <p:txBody>
-          <a:bodyPr wrap="square" lIns="0" rIns="0" tIns="0" bIns="0" anchor="t"/>
-          <a:lstStyle/>
-          <a:p>
-            <a:pPr algn="l">
-              <a:spcAft>
-                <a:spcPts val="0"/>
-              </a:spcAft>
-            </a:pPr>
-            <a:r>
-              <a:rPr sz="1800" b="0">
-                <a:solidFill>
-                  <a:srgbClr val="6B625A"/>
-                </a:solidFill>
-                <a:latin typeface="Calibri"/>
-              </a:rPr>
-              <a:t>hərf fərqini silir,
-sözü bazada axtarır</a:t>
+            <a:off x="4663440" y="3200400"/>
+            <a:ext cx="2926080" cy="1828800"/>
+          </a:xfrm>
+          <a:prstGeom prst="rect">
+            <a:avLst/>
+          </a:prstGeom>
+          <a:noFill/>
+        </p:spPr>
+        <p:txBody>
+          <a:bodyPr wrap="square" lIns="0" rIns="0" tIns="0" bIns="0" anchor="t">
+            <a:spAutoFit/>
+          </a:bodyPr>
+          <a:lstStyle/>
+          <a:p>
+            <a:pPr algn="l"/>
+            <a:r>
+              <a:rPr sz="2000" b="0">
+                <a:solidFill>
+                  <a:srgbClr val="F6F1E7"/>
+                </a:solidFill>
+                <a:latin typeface="Calibri"/>
+              </a:rPr>
+              <a:t>Cavab açılmır.
+Sual yerdə qalır.</a:t>
             </a:r>
           </a:p>
         </p:txBody>
@@ -5703,14 +6109,14 @@
         </p:nvSpPr>
         <p:spPr>
           <a:xfrm>
-            <a:off x="8229600" y="1645920"/>
-            <a:ext cx="3566160" cy="3931920"/>
+            <a:off x="8183880" y="1965960"/>
+            <a:ext cx="3611880" cy="3931920"/>
           </a:xfrm>
           <a:prstGeom prst="rect">
             <a:avLst/>
           </a:prstGeom>
           <a:solidFill>
-            <a:srgbClr val="FFFFFF"/>
+            <a:srgbClr val="A6843E"/>
           </a:solidFill>
           <a:ln>
             <a:noFill/>
@@ -5746,31 +6152,29 @@
         </p:nvSpPr>
         <p:spPr>
           <a:xfrm>
-            <a:off x="8503920" y="1874519"/>
-            <a:ext cx="3017520" cy="731520"/>
-          </a:xfrm>
-          <a:prstGeom prst="rect">
-            <a:avLst/>
-          </a:prstGeom>
-          <a:noFill/>
-        </p:spPr>
-        <p:txBody>
-          <a:bodyPr wrap="square" lIns="0" rIns="0" tIns="0" bIns="0" anchor="t"/>
-          <a:lstStyle/>
-          <a:p>
-            <a:pPr algn="l">
-              <a:spcAft>
-                <a:spcPts val="0"/>
-              </a:spcAft>
-            </a:pPr>
-            <a:r>
-              <a:rPr sz="3600" b="1">
-                <a:solidFill>
-                  <a:srgbClr val="9C2F2A"/>
-                </a:solidFill>
-                <a:latin typeface="Calibri"/>
-              </a:rPr>
-              <a:t>3</a:t>
+            <a:off x="8503920" y="2331720"/>
+            <a:ext cx="2926080" cy="640080"/>
+          </a:xfrm>
+          <a:prstGeom prst="rect">
+            <a:avLst/>
+          </a:prstGeom>
+          <a:noFill/>
+        </p:spPr>
+        <p:txBody>
+          <a:bodyPr wrap="square" lIns="0" rIns="0" tIns="0" bIns="0" anchor="t">
+            <a:spAutoFit/>
+          </a:bodyPr>
+          <a:lstStyle/>
+          <a:p>
+            <a:pPr algn="l"/>
+            <a:r>
+              <a:rPr sz="2800" b="1">
+                <a:solidFill>
+                  <a:srgbClr val="1A1614"/>
+                </a:solidFill>
+                <a:latin typeface="Calibri"/>
+              </a:rPr>
+              <a:t>Pas</a:t>
             </a:r>
           </a:p>
         </p:txBody>
@@ -5783,31 +6187,30 @@
         </p:nvSpPr>
         <p:spPr>
           <a:xfrm>
-            <a:off x="8503920" y="2743200"/>
-            <a:ext cx="3017520" cy="548640"/>
-          </a:xfrm>
-          <a:prstGeom prst="rect">
-            <a:avLst/>
-          </a:prstGeom>
-          <a:noFill/>
-        </p:spPr>
-        <p:txBody>
-          <a:bodyPr wrap="square" lIns="0" rIns="0" tIns="0" bIns="0" anchor="t"/>
-          <a:lstStyle/>
-          <a:p>
-            <a:pPr algn="l">
-              <a:spcAft>
-                <a:spcPts val="0"/>
-              </a:spcAft>
-            </a:pPr>
-            <a:r>
-              <a:rPr sz="2200" b="1">
+            <a:off x="8503920" y="3200400"/>
+            <a:ext cx="2926080" cy="1828800"/>
+          </a:xfrm>
+          <a:prstGeom prst="rect">
+            <a:avLst/>
+          </a:prstGeom>
+          <a:noFill/>
+        </p:spPr>
+        <p:txBody>
+          <a:bodyPr wrap="square" lIns="0" rIns="0" tIns="0" bIns="0" anchor="t">
+            <a:spAutoFit/>
+          </a:bodyPr>
+          <a:lstStyle/>
+          <a:p>
+            <a:pPr algn="l"/>
+            <a:r>
+              <a:rPr sz="2000" b="0">
                 <a:solidFill>
                   <a:srgbClr val="1A1614"/>
                 </a:solidFill>
                 <a:latin typeface="Calibri"/>
               </a:rPr>
-              <a:t>Alırsan</a:t>
+              <a:t>Sözü və izahı
+bot özü deyir.</a:t>
             </a:r>
           </a:p>
         </p:txBody>
@@ -5820,32 +6223,29 @@
         </p:nvSpPr>
         <p:spPr>
           <a:xfrm>
-            <a:off x="8503920" y="3474720"/>
-            <a:ext cx="3017520" cy="1463040"/>
-          </a:xfrm>
-          <a:prstGeom prst="rect">
-            <a:avLst/>
-          </a:prstGeom>
-          <a:noFill/>
-        </p:spPr>
-        <p:txBody>
-          <a:bodyPr wrap="square" lIns="0" rIns="0" tIns="0" bIns="0" anchor="t"/>
-          <a:lstStyle/>
-          <a:p>
-            <a:pPr algn="l">
-              <a:spcAft>
-                <a:spcPts val="0"/>
-              </a:spcAft>
-            </a:pPr>
-            <a:r>
-              <a:rPr sz="1800" b="0">
+            <a:off x="502920" y="6473952"/>
+            <a:ext cx="7315200" cy="256032"/>
+          </a:xfrm>
+          <a:prstGeom prst="rect">
+            <a:avLst/>
+          </a:prstGeom>
+          <a:noFill/>
+        </p:spPr>
+        <p:txBody>
+          <a:bodyPr wrap="square" lIns="0" rIns="0" tIns="0" bIns="0" anchor="t">
+            <a:spAutoFit/>
+          </a:bodyPr>
+          <a:lstStyle/>
+          <a:p>
+            <a:pPr algn="l"/>
+            <a:r>
+              <a:rPr sz="1200" b="0">
                 <a:solidFill>
                   <a:srgbClr val="6B625A"/>
                 </a:solidFill>
                 <a:latin typeface="Calibri"/>
               </a:rPr>
-              <a:t>ən çox səkkiz söz,
-mənası və mövzusu ilə</a:t>
+              <a:t>Atalar sözü  ·  @AtalarSozleri_bot</a:t>
             </a:r>
           </a:p>
         </p:txBody>
@@ -5858,62 +6258,23 @@
         </p:nvSpPr>
         <p:spPr>
           <a:xfrm>
-            <a:off x="548640" y="6446520"/>
-            <a:ext cx="7315200" cy="274320"/>
-          </a:xfrm>
-          <a:prstGeom prst="rect">
-            <a:avLst/>
-          </a:prstGeom>
-          <a:noFill/>
-        </p:spPr>
-        <p:txBody>
-          <a:bodyPr wrap="square" lIns="0" rIns="0" tIns="0" bIns="0" anchor="t"/>
-          <a:lstStyle/>
-          <a:p>
-            <a:pPr algn="l">
-              <a:spcAft>
-                <a:spcPts val="0"/>
-              </a:spcAft>
-            </a:pPr>
-            <a:r>
-              <a:rPr sz="1100" b="0">
-                <a:solidFill>
-                  <a:srgbClr val="6B625A"/>
-                </a:solidFill>
-                <a:latin typeface="Calibri"/>
-              </a:rPr>
-              <a:t>Atalar sözü  ·  @AtalarSozleri_bot</a:t>
-            </a:r>
-          </a:p>
-        </p:txBody>
-      </p:sp>
-      <p:sp>
-        <p:nvSpPr>
-          <p:cNvPr id="17" name="TextBox 16"/>
-          <p:cNvSpPr txBox="1"/>
-          <p:nvPr/>
-        </p:nvSpPr>
-        <p:spPr>
-          <a:xfrm>
-            <a:off x="10424160" y="6446520"/>
-            <a:ext cx="1280160" cy="274320"/>
-          </a:xfrm>
-          <a:prstGeom prst="rect">
-            <a:avLst/>
-          </a:prstGeom>
-          <a:noFill/>
-        </p:spPr>
-        <p:txBody>
-          <a:bodyPr wrap="square" lIns="0" rIns="0" tIns="0" bIns="0" anchor="t"/>
-          <a:lstStyle/>
-          <a:p>
-            <a:pPr algn="r">
-              <a:spcAft>
-                <a:spcPts val="0"/>
-              </a:spcAft>
-            </a:pPr>
-            <a:r>
-              <a:rPr sz="1100" b="0">
+            <a:off x="10241280" y="6473952"/>
+            <a:ext cx="1463040" cy="256032"/>
+          </a:xfrm>
+          <a:prstGeom prst="rect">
+            <a:avLst/>
+          </a:prstGeom>
+          <a:noFill/>
+        </p:spPr>
+        <p:txBody>
+          <a:bodyPr wrap="square" lIns="0" rIns="0" tIns="0" bIns="0" anchor="t">
+            <a:spAutoFit/>
+          </a:bodyPr>
+          <a:lstStyle/>
+          <a:p>
+            <a:pPr algn="r"/>
+            <a:r>
+              <a:rPr sz="1200" b="0">
                 <a:solidFill>
                   <a:srgbClr val="6B625A"/>
                 </a:solidFill>
@@ -5957,7 +6318,7 @@
             <a:avLst/>
           </a:prstGeom>
           <a:solidFill>
-            <a:srgbClr val="F6F1E7"/>
+            <a:srgbClr val="FBF7F1"/>
           </a:solidFill>
           <a:ln>
             <a:noFill/>
@@ -5993,106 +6354,97 @@
         </p:nvSpPr>
         <p:spPr>
           <a:xfrm>
-            <a:off x="640080" y="365760"/>
-            <a:ext cx="10972800" cy="548640"/>
-          </a:xfrm>
-          <a:prstGeom prst="rect">
-            <a:avLst/>
-          </a:prstGeom>
-          <a:noFill/>
-        </p:spPr>
-        <p:txBody>
-          <a:bodyPr wrap="square" lIns="0" rIns="0" tIns="0" bIns="0" anchor="t"/>
-          <a:lstStyle/>
-          <a:p>
-            <a:pPr algn="l">
-              <a:spcAft>
-                <a:spcPts val="0"/>
-              </a:spcAft>
-            </a:pPr>
-            <a:r>
-              <a:rPr sz="3200" b="1">
+            <a:off x="502920" y="320040"/>
+            <a:ext cx="7315200" cy="502920"/>
+          </a:xfrm>
+          <a:prstGeom prst="rect">
+            <a:avLst/>
+          </a:prstGeom>
+          <a:noFill/>
+        </p:spPr>
+        <p:txBody>
+          <a:bodyPr wrap="square" lIns="0" rIns="0" tIns="0" bIns="0" anchor="t">
+            <a:spAutoFit/>
+          </a:bodyPr>
+          <a:lstStyle/>
+          <a:p>
+            <a:pPr algn="l"/>
+            <a:r>
+              <a:rPr sz="3000" b="1">
                 <a:solidFill>
                   <a:srgbClr val="1A1614"/>
                 </a:solidFill>
                 <a:latin typeface="Calibri"/>
               </a:rPr>
-              <a:t>Quiz</a:t>
-            </a:r>
-          </a:p>
-        </p:txBody>
-      </p:sp>
-      <p:sp>
-        <p:nvSpPr>
-          <p:cNvPr id="4" name="TextBox 3"/>
-          <p:cNvSpPr txBox="1"/>
-          <p:nvPr/>
-        </p:nvSpPr>
-        <p:spPr>
-          <a:xfrm>
-            <a:off x="640080" y="1051560"/>
-            <a:ext cx="10972800" cy="731520"/>
-          </a:xfrm>
-          <a:prstGeom prst="rect">
-            <a:avLst/>
-          </a:prstGeom>
-          <a:noFill/>
-        </p:spPr>
-        <p:txBody>
-          <a:bodyPr wrap="square" lIns="0" rIns="0" tIns="0" bIns="0" anchor="t"/>
-          <a:lstStyle/>
-          <a:p>
-            <a:pPr algn="l">
-              <a:spcAft>
-                <a:spcPts val="0"/>
-              </a:spcAft>
-            </a:pPr>
-            <a:r>
-              <a:rPr sz="2800" b="1">
-                <a:solidFill>
-                  <a:srgbClr val="9C2F2A"/>
-                </a:solidFill>
-                <a:latin typeface="Calibri"/>
-              </a:rPr>
-              <a:t>«Ev alma, …… al.»</a:t>
-            </a:r>
-          </a:p>
-        </p:txBody>
-      </p:sp>
-      <p:sp>
-        <p:nvSpPr>
-          <p:cNvPr id="5" name="TextBox 4"/>
-          <p:cNvSpPr txBox="1"/>
-          <p:nvPr/>
-        </p:nvSpPr>
-        <p:spPr>
-          <a:xfrm>
-            <a:off x="640080" y="1828800"/>
-            <a:ext cx="10972800" cy="365760"/>
-          </a:xfrm>
-          <a:prstGeom prst="rect">
-            <a:avLst/>
-          </a:prstGeom>
-          <a:noFill/>
-        </p:spPr>
-        <p:txBody>
-          <a:bodyPr wrap="square" lIns="0" rIns="0" tIns="0" bIns="0" anchor="t"/>
-          <a:lstStyle/>
-          <a:p>
-            <a:pPr algn="l">
-              <a:spcAft>
-                <a:spcPts val="0"/>
-              </a:spcAft>
-            </a:pPr>
-            <a:r>
-              <a:rPr sz="1800" b="0">
-                <a:solidFill>
-                  <a:srgbClr val="6B625A"/>
-                </a:solidFill>
-                <a:latin typeface="Calibri"/>
-              </a:rPr>
-              <a:t>Çatışmayan sözü tamamla.</a:t>
-            </a:r>
+              <a:t>On iki mövzu</a:t>
+            </a:r>
+          </a:p>
+        </p:txBody>
+      </p:sp>
+      <p:pic>
+        <p:nvPicPr>
+          <p:cNvPr id="4" name="Picture 3" descr="0134bad9-a8a1-49cf-b15c-d4b708457aa5.jpg"/>
+          <p:cNvPicPr>
+            <a:picLocks noChangeAspect="1"/>
+          </p:cNvPicPr>
+          <p:nvPr/>
+        </p:nvPicPr>
+        <p:blipFill>
+          <a:blip r:embed="rId2"/>
+          <a:stretch>
+            <a:fillRect/>
+          </a:stretch>
+        </p:blipFill>
+        <p:spPr>
+          <a:xfrm>
+            <a:off x="10195560" y="228600"/>
+            <a:ext cx="1554480" cy="1554480"/>
+          </a:xfrm>
+          <a:prstGeom prst="rect">
+            <a:avLst/>
+          </a:prstGeom>
+        </p:spPr>
+      </p:pic>
+      <p:sp>
+        <p:nvSpPr>
+          <p:cNvPr id="5" name="Rectangle 4"/>
+          <p:cNvSpPr/>
+          <p:nvPr/>
+        </p:nvSpPr>
+        <p:spPr>
+          <a:xfrm>
+            <a:off x="502920" y="1115568"/>
+            <a:ext cx="5486400" cy="713232"/>
+          </a:xfrm>
+          <a:prstGeom prst="rect">
+            <a:avLst/>
+          </a:prstGeom>
+          <a:solidFill>
+            <a:srgbClr val="FFFFFF"/>
+          </a:solidFill>
+          <a:ln>
+            <a:noFill/>
+          </a:ln>
+        </p:spPr>
+        <p:style>
+          <a:lnRef idx="1">
+            <a:schemeClr val="accent1"/>
+          </a:lnRef>
+          <a:fillRef idx="3">
+            <a:schemeClr val="accent1"/>
+          </a:fillRef>
+          <a:effectRef idx="2">
+            <a:schemeClr val="accent1"/>
+          </a:effectRef>
+          <a:fontRef idx="minor">
+            <a:schemeClr val="lt1"/>
+          </a:fontRef>
+        </p:style>
+        <p:txBody>
+          <a:bodyPr rtlCol="0" anchor="ctr"/>
+          <a:lstStyle/>
+          <a:p>
+            <a:pPr algn="ctr"/>
           </a:p>
         </p:txBody>
       </p:sp>
@@ -6104,8 +6456,8 @@
         </p:nvSpPr>
         <p:spPr>
           <a:xfrm>
-            <a:off x="640080" y="2560320"/>
-            <a:ext cx="3566160" cy="3200400"/>
+            <a:off x="502920" y="1115568"/>
+            <a:ext cx="91440" cy="713232"/>
           </a:xfrm>
           <a:prstGeom prst="rect">
             <a:avLst/>
@@ -6147,31 +6499,29 @@
         </p:nvSpPr>
         <p:spPr>
           <a:xfrm>
-            <a:off x="960120" y="2834640"/>
-            <a:ext cx="2926080" cy="640080"/>
-          </a:xfrm>
-          <a:prstGeom prst="rect">
-            <a:avLst/>
-          </a:prstGeom>
-          <a:noFill/>
-        </p:spPr>
-        <p:txBody>
-          <a:bodyPr wrap="square" lIns="0" rIns="0" tIns="0" bIns="0" anchor="t"/>
-          <a:lstStyle/>
-          <a:p>
-            <a:pPr algn="l">
-              <a:spcAft>
-                <a:spcPts val="0"/>
-              </a:spcAft>
-            </a:pPr>
-            <a:r>
-              <a:rPr sz="2600" b="1">
-                <a:solidFill>
-                  <a:srgbClr val="FFFFFF"/>
-                </a:solidFill>
-                <a:latin typeface="Calibri"/>
-              </a:rPr>
-              <a:t>Düz</a:t>
+            <a:off x="822960" y="1115568"/>
+            <a:ext cx="3291840" cy="713232"/>
+          </a:xfrm>
+          <a:prstGeom prst="rect">
+            <a:avLst/>
+          </a:prstGeom>
+          <a:noFill/>
+        </p:spPr>
+        <p:txBody>
+          <a:bodyPr wrap="square" lIns="0" rIns="0" tIns="0" bIns="0" anchor="ctr">
+            <a:spAutoFit/>
+          </a:bodyPr>
+          <a:lstStyle/>
+          <a:p>
+            <a:pPr algn="l"/>
+            <a:r>
+              <a:rPr sz="1800" b="1">
+                <a:solidFill>
+                  <a:srgbClr val="1A1614"/>
+                </a:solidFill>
+                <a:latin typeface="Calibri"/>
+              </a:rPr>
+              <a:t>Nəsihət</a:t>
             </a:r>
           </a:p>
         </p:txBody>
@@ -6184,32 +6534,29 @@
         </p:nvSpPr>
         <p:spPr>
           <a:xfrm>
-            <a:off x="960120" y="3657600"/>
-            <a:ext cx="2926080" cy="1463040"/>
-          </a:xfrm>
-          <a:prstGeom prst="rect">
-            <a:avLst/>
-          </a:prstGeom>
-          <a:noFill/>
-        </p:spPr>
-        <p:txBody>
-          <a:bodyPr wrap="square" lIns="0" rIns="0" tIns="0" bIns="0" anchor="t"/>
-          <a:lstStyle/>
-          <a:p>
-            <a:pPr algn="l">
-              <a:spcAft>
-                <a:spcPts val="0"/>
-              </a:spcAft>
-            </a:pPr>
-            <a:r>
-              <a:rPr sz="1800" b="0">
-                <a:solidFill>
-                  <a:srgbClr val="FFFFFF"/>
-                </a:solidFill>
-                <a:latin typeface="Calibri"/>
-              </a:rPr>
-              <a:t>Təbrik.
-Tam söz və izah.</a:t>
+            <a:off x="4251959" y="1115568"/>
+            <a:ext cx="1463040" cy="713232"/>
+          </a:xfrm>
+          <a:prstGeom prst="rect">
+            <a:avLst/>
+          </a:prstGeom>
+          <a:noFill/>
+        </p:spPr>
+        <p:txBody>
+          <a:bodyPr wrap="square" lIns="0" rIns="0" tIns="0" bIns="0" anchor="ctr">
+            <a:spAutoFit/>
+          </a:bodyPr>
+          <a:lstStyle/>
+          <a:p>
+            <a:pPr algn="r"/>
+            <a:r>
+              <a:rPr sz="1800" b="1">
+                <a:solidFill>
+                  <a:srgbClr val="9C2F2A"/>
+                </a:solidFill>
+                <a:latin typeface="Calibri"/>
+              </a:rPr>
+              <a:t>2751</a:t>
             </a:r>
           </a:p>
         </p:txBody>
@@ -6222,14 +6569,14 @@
         </p:nvSpPr>
         <p:spPr>
           <a:xfrm>
-            <a:off x="4434840" y="2560320"/>
-            <a:ext cx="3566160" cy="3200400"/>
+            <a:off x="6263640" y="1115568"/>
+            <a:ext cx="5486400" cy="713232"/>
           </a:xfrm>
           <a:prstGeom prst="rect">
             <a:avLst/>
           </a:prstGeom>
           <a:solidFill>
-            <a:srgbClr val="1A1614"/>
+            <a:srgbClr val="FFFFFF"/>
           </a:solidFill>
           <a:ln>
             <a:noFill/>
@@ -6259,95 +6606,20 @@
       </p:sp>
       <p:sp>
         <p:nvSpPr>
-          <p:cNvPr id="10" name="TextBox 9"/>
-          <p:cNvSpPr txBox="1"/>
-          <p:nvPr/>
-        </p:nvSpPr>
-        <p:spPr>
-          <a:xfrm>
-            <a:off x="4754880" y="2834640"/>
-            <a:ext cx="2926080" cy="640080"/>
-          </a:xfrm>
-          <a:prstGeom prst="rect">
-            <a:avLst/>
-          </a:prstGeom>
-          <a:noFill/>
-        </p:spPr>
-        <p:txBody>
-          <a:bodyPr wrap="square" lIns="0" rIns="0" tIns="0" bIns="0" anchor="t"/>
-          <a:lstStyle/>
-          <a:p>
-            <a:pPr algn="l">
-              <a:spcAft>
-                <a:spcPts val="0"/>
-              </a:spcAft>
-            </a:pPr>
-            <a:r>
-              <a:rPr sz="2600" b="1">
-                <a:solidFill>
-                  <a:srgbClr val="F6F1E7"/>
-                </a:solidFill>
-                <a:latin typeface="Calibri"/>
-              </a:rPr>
-              <a:t>Səhv</a:t>
-            </a:r>
-          </a:p>
-        </p:txBody>
-      </p:sp>
-      <p:sp>
-        <p:nvSpPr>
-          <p:cNvPr id="11" name="TextBox 10"/>
-          <p:cNvSpPr txBox="1"/>
-          <p:nvPr/>
-        </p:nvSpPr>
-        <p:spPr>
-          <a:xfrm>
-            <a:off x="4754880" y="3657600"/>
-            <a:ext cx="2926080" cy="1463040"/>
-          </a:xfrm>
-          <a:prstGeom prst="rect">
-            <a:avLst/>
-          </a:prstGeom>
-          <a:noFill/>
-        </p:spPr>
-        <p:txBody>
-          <a:bodyPr wrap="square" lIns="0" rIns="0" tIns="0" bIns="0" anchor="t"/>
-          <a:lstStyle/>
-          <a:p>
-            <a:pPr algn="l">
-              <a:spcAft>
-                <a:spcPts val="0"/>
-              </a:spcAft>
-            </a:pPr>
-            <a:r>
-              <a:rPr sz="1800" b="0">
-                <a:solidFill>
-                  <a:srgbClr val="F6F1E7"/>
-                </a:solidFill>
-                <a:latin typeface="Calibri"/>
-              </a:rPr>
-              <a:t>Cavab açılmır.
-Sual yerdə qalır.</a:t>
-            </a:r>
-          </a:p>
-        </p:txBody>
-      </p:sp>
-      <p:sp>
-        <p:nvSpPr>
-          <p:cNvPr id="12" name="Rectangle 11"/>
+          <p:cNvPr id="10" name="Rectangle 9"/>
           <p:cNvSpPr/>
           <p:nvPr/>
         </p:nvSpPr>
         <p:spPr>
           <a:xfrm>
-            <a:off x="8229600" y="2560320"/>
-            <a:ext cx="3566160" cy="3200400"/>
+            <a:off x="6263640" y="1115568"/>
+            <a:ext cx="91440" cy="713232"/>
           </a:xfrm>
           <a:prstGeom prst="rect">
             <a:avLst/>
           </a:prstGeom>
           <a:solidFill>
-            <a:srgbClr val="A6843E"/>
+            <a:srgbClr val="9C2F2A"/>
           </a:solidFill>
           <a:ln>
             <a:noFill/>
@@ -6377,106 +6649,1659 @@
       </p:sp>
       <p:sp>
         <p:nvSpPr>
-          <p:cNvPr id="13" name="TextBox 12"/>
-          <p:cNvSpPr txBox="1"/>
-          <p:nvPr/>
-        </p:nvSpPr>
-        <p:spPr>
-          <a:xfrm>
-            <a:off x="8549640" y="2834640"/>
-            <a:ext cx="2926080" cy="640080"/>
-          </a:xfrm>
-          <a:prstGeom prst="rect">
-            <a:avLst/>
-          </a:prstGeom>
-          <a:noFill/>
-        </p:spPr>
-        <p:txBody>
-          <a:bodyPr wrap="square" lIns="0" rIns="0" tIns="0" bIns="0" anchor="t"/>
-          <a:lstStyle/>
-          <a:p>
-            <a:pPr algn="l">
-              <a:spcAft>
-                <a:spcPts val="0"/>
-              </a:spcAft>
-            </a:pPr>
-            <a:r>
-              <a:rPr sz="2600" b="1">
+          <p:cNvPr id="11" name="TextBox 10"/>
+          <p:cNvSpPr txBox="1"/>
+          <p:nvPr/>
+        </p:nvSpPr>
+        <p:spPr>
+          <a:xfrm>
+            <a:off x="6583680" y="1115568"/>
+            <a:ext cx="3291840" cy="713232"/>
+          </a:xfrm>
+          <a:prstGeom prst="rect">
+            <a:avLst/>
+          </a:prstGeom>
+          <a:noFill/>
+        </p:spPr>
+        <p:txBody>
+          <a:bodyPr wrap="square" lIns="0" rIns="0" tIns="0" bIns="0" anchor="ctr">
+            <a:spAutoFit/>
+          </a:bodyPr>
+          <a:lstStyle/>
+          <a:p>
+            <a:pPr algn="l"/>
+            <a:r>
+              <a:rPr sz="1800" b="1">
                 <a:solidFill>
                   <a:srgbClr val="1A1614"/>
                 </a:solidFill>
                 <a:latin typeface="Calibri"/>
               </a:rPr>
-              <a:t>Pas</a:t>
-            </a:r>
-          </a:p>
-        </p:txBody>
-      </p:sp>
-      <p:sp>
-        <p:nvSpPr>
-          <p:cNvPr id="14" name="TextBox 13"/>
-          <p:cNvSpPr txBox="1"/>
-          <p:nvPr/>
-        </p:nvSpPr>
-        <p:spPr>
-          <a:xfrm>
-            <a:off x="8549640" y="3657600"/>
-            <a:ext cx="2926080" cy="1463040"/>
-          </a:xfrm>
-          <a:prstGeom prst="rect">
-            <a:avLst/>
-          </a:prstGeom>
-          <a:noFill/>
-        </p:spPr>
-        <p:txBody>
-          <a:bodyPr wrap="square" lIns="0" rIns="0" tIns="0" bIns="0" anchor="t"/>
-          <a:lstStyle/>
-          <a:p>
-            <a:pPr algn="l">
-              <a:spcAft>
-                <a:spcPts val="0"/>
-              </a:spcAft>
-            </a:pPr>
-            <a:r>
-              <a:rPr sz="1800" b="0">
+              <a:t>Ailə</a:t>
+            </a:r>
+          </a:p>
+        </p:txBody>
+      </p:sp>
+      <p:sp>
+        <p:nvSpPr>
+          <p:cNvPr id="12" name="TextBox 11"/>
+          <p:cNvSpPr txBox="1"/>
+          <p:nvPr/>
+        </p:nvSpPr>
+        <p:spPr>
+          <a:xfrm>
+            <a:off x="10012679" y="1115568"/>
+            <a:ext cx="1463040" cy="713232"/>
+          </a:xfrm>
+          <a:prstGeom prst="rect">
+            <a:avLst/>
+          </a:prstGeom>
+          <a:noFill/>
+        </p:spPr>
+        <p:txBody>
+          <a:bodyPr wrap="square" lIns="0" rIns="0" tIns="0" bIns="0" anchor="ctr">
+            <a:spAutoFit/>
+          </a:bodyPr>
+          <a:lstStyle/>
+          <a:p>
+            <a:pPr algn="r"/>
+            <a:r>
+              <a:rPr sz="1800" b="1">
+                <a:solidFill>
+                  <a:srgbClr val="9C2F2A"/>
+                </a:solidFill>
+                <a:latin typeface="Calibri"/>
+              </a:rPr>
+              <a:t>304</a:t>
+            </a:r>
+          </a:p>
+        </p:txBody>
+      </p:sp>
+      <p:sp>
+        <p:nvSpPr>
+          <p:cNvPr id="13" name="Rectangle 12"/>
+          <p:cNvSpPr/>
+          <p:nvPr/>
+        </p:nvSpPr>
+        <p:spPr>
+          <a:xfrm>
+            <a:off x="502920" y="1938528"/>
+            <a:ext cx="5486400" cy="713232"/>
+          </a:xfrm>
+          <a:prstGeom prst="rect">
+            <a:avLst/>
+          </a:prstGeom>
+          <a:solidFill>
+            <a:srgbClr val="FFFFFF"/>
+          </a:solidFill>
+          <a:ln>
+            <a:noFill/>
+          </a:ln>
+        </p:spPr>
+        <p:style>
+          <a:lnRef idx="1">
+            <a:schemeClr val="accent1"/>
+          </a:lnRef>
+          <a:fillRef idx="3">
+            <a:schemeClr val="accent1"/>
+          </a:fillRef>
+          <a:effectRef idx="2">
+            <a:schemeClr val="accent1"/>
+          </a:effectRef>
+          <a:fontRef idx="minor">
+            <a:schemeClr val="lt1"/>
+          </a:fontRef>
+        </p:style>
+        <p:txBody>
+          <a:bodyPr rtlCol="0" anchor="ctr"/>
+          <a:lstStyle/>
+          <a:p>
+            <a:pPr algn="ctr"/>
+          </a:p>
+        </p:txBody>
+      </p:sp>
+      <p:sp>
+        <p:nvSpPr>
+          <p:cNvPr id="14" name="Rectangle 13"/>
+          <p:cNvSpPr/>
+          <p:nvPr/>
+        </p:nvSpPr>
+        <p:spPr>
+          <a:xfrm>
+            <a:off x="502920" y="1938528"/>
+            <a:ext cx="91440" cy="713232"/>
+          </a:xfrm>
+          <a:prstGeom prst="rect">
+            <a:avLst/>
+          </a:prstGeom>
+          <a:solidFill>
+            <a:srgbClr val="9C2F2A"/>
+          </a:solidFill>
+          <a:ln>
+            <a:noFill/>
+          </a:ln>
+        </p:spPr>
+        <p:style>
+          <a:lnRef idx="1">
+            <a:schemeClr val="accent1"/>
+          </a:lnRef>
+          <a:fillRef idx="3">
+            <a:schemeClr val="accent1"/>
+          </a:fillRef>
+          <a:effectRef idx="2">
+            <a:schemeClr val="accent1"/>
+          </a:effectRef>
+          <a:fontRef idx="minor">
+            <a:schemeClr val="lt1"/>
+          </a:fontRef>
+        </p:style>
+        <p:txBody>
+          <a:bodyPr rtlCol="0" anchor="ctr"/>
+          <a:lstStyle/>
+          <a:p>
+            <a:pPr algn="ctr"/>
+          </a:p>
+        </p:txBody>
+      </p:sp>
+      <p:sp>
+        <p:nvSpPr>
+          <p:cNvPr id="15" name="TextBox 14"/>
+          <p:cNvSpPr txBox="1"/>
+          <p:nvPr/>
+        </p:nvSpPr>
+        <p:spPr>
+          <a:xfrm>
+            <a:off x="822960" y="1938528"/>
+            <a:ext cx="3291840" cy="713232"/>
+          </a:xfrm>
+          <a:prstGeom prst="rect">
+            <a:avLst/>
+          </a:prstGeom>
+          <a:noFill/>
+        </p:spPr>
+        <p:txBody>
+          <a:bodyPr wrap="square" lIns="0" rIns="0" tIns="0" bIns="0" anchor="ctr">
+            <a:spAutoFit/>
+          </a:bodyPr>
+          <a:lstStyle/>
+          <a:p>
+            <a:pPr algn="l"/>
+            <a:r>
+              <a:rPr sz="1800" b="1">
                 <a:solidFill>
                   <a:srgbClr val="1A1614"/>
                 </a:solidFill>
                 <a:latin typeface="Calibri"/>
               </a:rPr>
-              <a:t>Sözü və izahı
-bot özü deyir.</a:t>
-            </a:r>
-          </a:p>
-        </p:txBody>
-      </p:sp>
-      <p:sp>
-        <p:nvSpPr>
-          <p:cNvPr id="15" name="TextBox 14"/>
-          <p:cNvSpPr txBox="1"/>
-          <p:nvPr/>
-        </p:nvSpPr>
-        <p:spPr>
-          <a:xfrm>
-            <a:off x="548640" y="6446520"/>
-            <a:ext cx="7315200" cy="274320"/>
-          </a:xfrm>
-          <a:prstGeom prst="rect">
-            <a:avLst/>
-          </a:prstGeom>
-          <a:noFill/>
-        </p:spPr>
-        <p:txBody>
-          <a:bodyPr wrap="square" lIns="0" rIns="0" tIns="0" bIns="0" anchor="t"/>
-          <a:lstStyle/>
-          <a:p>
-            <a:pPr algn="l">
-              <a:spcAft>
-                <a:spcPts val="0"/>
-              </a:spcAft>
-            </a:pPr>
-            <a:r>
-              <a:rPr sz="1100" b="0">
+              <a:t>Ağıl</a:t>
+            </a:r>
+          </a:p>
+        </p:txBody>
+      </p:sp>
+      <p:sp>
+        <p:nvSpPr>
+          <p:cNvPr id="16" name="TextBox 15"/>
+          <p:cNvSpPr txBox="1"/>
+          <p:nvPr/>
+        </p:nvSpPr>
+        <p:spPr>
+          <a:xfrm>
+            <a:off x="4251959" y="1938528"/>
+            <a:ext cx="1463040" cy="713232"/>
+          </a:xfrm>
+          <a:prstGeom prst="rect">
+            <a:avLst/>
+          </a:prstGeom>
+          <a:noFill/>
+        </p:spPr>
+        <p:txBody>
+          <a:bodyPr wrap="square" lIns="0" rIns="0" tIns="0" bIns="0" anchor="ctr">
+            <a:spAutoFit/>
+          </a:bodyPr>
+          <a:lstStyle/>
+          <a:p>
+            <a:pPr algn="r"/>
+            <a:r>
+              <a:rPr sz="1800" b="1">
+                <a:solidFill>
+                  <a:srgbClr val="9C2F2A"/>
+                </a:solidFill>
+                <a:latin typeface="Calibri"/>
+              </a:rPr>
+              <a:t>189</a:t>
+            </a:r>
+          </a:p>
+        </p:txBody>
+      </p:sp>
+      <p:sp>
+        <p:nvSpPr>
+          <p:cNvPr id="17" name="Rectangle 16"/>
+          <p:cNvSpPr/>
+          <p:nvPr/>
+        </p:nvSpPr>
+        <p:spPr>
+          <a:xfrm>
+            <a:off x="6263640" y="1938528"/>
+            <a:ext cx="5486400" cy="713232"/>
+          </a:xfrm>
+          <a:prstGeom prst="rect">
+            <a:avLst/>
+          </a:prstGeom>
+          <a:solidFill>
+            <a:srgbClr val="FFFFFF"/>
+          </a:solidFill>
+          <a:ln>
+            <a:noFill/>
+          </a:ln>
+        </p:spPr>
+        <p:style>
+          <a:lnRef idx="1">
+            <a:schemeClr val="accent1"/>
+          </a:lnRef>
+          <a:fillRef idx="3">
+            <a:schemeClr val="accent1"/>
+          </a:fillRef>
+          <a:effectRef idx="2">
+            <a:schemeClr val="accent1"/>
+          </a:effectRef>
+          <a:fontRef idx="minor">
+            <a:schemeClr val="lt1"/>
+          </a:fontRef>
+        </p:style>
+        <p:txBody>
+          <a:bodyPr rtlCol="0" anchor="ctr"/>
+          <a:lstStyle/>
+          <a:p>
+            <a:pPr algn="ctr"/>
+          </a:p>
+        </p:txBody>
+      </p:sp>
+      <p:sp>
+        <p:nvSpPr>
+          <p:cNvPr id="18" name="Rectangle 17"/>
+          <p:cNvSpPr/>
+          <p:nvPr/>
+        </p:nvSpPr>
+        <p:spPr>
+          <a:xfrm>
+            <a:off x="6263640" y="1938528"/>
+            <a:ext cx="91440" cy="713232"/>
+          </a:xfrm>
+          <a:prstGeom prst="rect">
+            <a:avLst/>
+          </a:prstGeom>
+          <a:solidFill>
+            <a:srgbClr val="9C2F2A"/>
+          </a:solidFill>
+          <a:ln>
+            <a:noFill/>
+          </a:ln>
+        </p:spPr>
+        <p:style>
+          <a:lnRef idx="1">
+            <a:schemeClr val="accent1"/>
+          </a:lnRef>
+          <a:fillRef idx="3">
+            <a:schemeClr val="accent1"/>
+          </a:fillRef>
+          <a:effectRef idx="2">
+            <a:schemeClr val="accent1"/>
+          </a:effectRef>
+          <a:fontRef idx="minor">
+            <a:schemeClr val="lt1"/>
+          </a:fontRef>
+        </p:style>
+        <p:txBody>
+          <a:bodyPr rtlCol="0" anchor="ctr"/>
+          <a:lstStyle/>
+          <a:p>
+            <a:pPr algn="ctr"/>
+          </a:p>
+        </p:txBody>
+      </p:sp>
+      <p:sp>
+        <p:nvSpPr>
+          <p:cNvPr id="19" name="TextBox 18"/>
+          <p:cNvSpPr txBox="1"/>
+          <p:nvPr/>
+        </p:nvSpPr>
+        <p:spPr>
+          <a:xfrm>
+            <a:off x="6583680" y="1938528"/>
+            <a:ext cx="3291840" cy="713232"/>
+          </a:xfrm>
+          <a:prstGeom prst="rect">
+            <a:avLst/>
+          </a:prstGeom>
+          <a:noFill/>
+        </p:spPr>
+        <p:txBody>
+          <a:bodyPr wrap="square" lIns="0" rIns="0" tIns="0" bIns="0" anchor="ctr">
+            <a:spAutoFit/>
+          </a:bodyPr>
+          <a:lstStyle/>
+          <a:p>
+            <a:pPr algn="l"/>
+            <a:r>
+              <a:rPr sz="1800" b="1">
+                <a:solidFill>
+                  <a:srgbClr val="1A1614"/>
+                </a:solidFill>
+                <a:latin typeface="Calibri"/>
+              </a:rPr>
+              <a:t>Bərəkət</a:t>
+            </a:r>
+          </a:p>
+        </p:txBody>
+      </p:sp>
+      <p:sp>
+        <p:nvSpPr>
+          <p:cNvPr id="20" name="TextBox 19"/>
+          <p:cNvSpPr txBox="1"/>
+          <p:nvPr/>
+        </p:nvSpPr>
+        <p:spPr>
+          <a:xfrm>
+            <a:off x="10012679" y="1938528"/>
+            <a:ext cx="1463040" cy="713232"/>
+          </a:xfrm>
+          <a:prstGeom prst="rect">
+            <a:avLst/>
+          </a:prstGeom>
+          <a:noFill/>
+        </p:spPr>
+        <p:txBody>
+          <a:bodyPr wrap="square" lIns="0" rIns="0" tIns="0" bIns="0" anchor="ctr">
+            <a:spAutoFit/>
+          </a:bodyPr>
+          <a:lstStyle/>
+          <a:p>
+            <a:pPr algn="r"/>
+            <a:r>
+              <a:rPr sz="1800" b="1">
+                <a:solidFill>
+                  <a:srgbClr val="9C2F2A"/>
+                </a:solidFill>
+                <a:latin typeface="Calibri"/>
+              </a:rPr>
+              <a:t>171</a:t>
+            </a:r>
+          </a:p>
+        </p:txBody>
+      </p:sp>
+      <p:sp>
+        <p:nvSpPr>
+          <p:cNvPr id="21" name="Rectangle 20"/>
+          <p:cNvSpPr/>
+          <p:nvPr/>
+        </p:nvSpPr>
+        <p:spPr>
+          <a:xfrm>
+            <a:off x="502920" y="2761488"/>
+            <a:ext cx="5486400" cy="713232"/>
+          </a:xfrm>
+          <a:prstGeom prst="rect">
+            <a:avLst/>
+          </a:prstGeom>
+          <a:solidFill>
+            <a:srgbClr val="FFFFFF"/>
+          </a:solidFill>
+          <a:ln>
+            <a:noFill/>
+          </a:ln>
+        </p:spPr>
+        <p:style>
+          <a:lnRef idx="1">
+            <a:schemeClr val="accent1"/>
+          </a:lnRef>
+          <a:fillRef idx="3">
+            <a:schemeClr val="accent1"/>
+          </a:fillRef>
+          <a:effectRef idx="2">
+            <a:schemeClr val="accent1"/>
+          </a:effectRef>
+          <a:fontRef idx="minor">
+            <a:schemeClr val="lt1"/>
+          </a:fontRef>
+        </p:style>
+        <p:txBody>
+          <a:bodyPr rtlCol="0" anchor="ctr"/>
+          <a:lstStyle/>
+          <a:p>
+            <a:pPr algn="ctr"/>
+          </a:p>
+        </p:txBody>
+      </p:sp>
+      <p:sp>
+        <p:nvSpPr>
+          <p:cNvPr id="22" name="Rectangle 21"/>
+          <p:cNvSpPr/>
+          <p:nvPr/>
+        </p:nvSpPr>
+        <p:spPr>
+          <a:xfrm>
+            <a:off x="502920" y="2761488"/>
+            <a:ext cx="91440" cy="713232"/>
+          </a:xfrm>
+          <a:prstGeom prst="rect">
+            <a:avLst/>
+          </a:prstGeom>
+          <a:solidFill>
+            <a:srgbClr val="9C2F2A"/>
+          </a:solidFill>
+          <a:ln>
+            <a:noFill/>
+          </a:ln>
+        </p:spPr>
+        <p:style>
+          <a:lnRef idx="1">
+            <a:schemeClr val="accent1"/>
+          </a:lnRef>
+          <a:fillRef idx="3">
+            <a:schemeClr val="accent1"/>
+          </a:fillRef>
+          <a:effectRef idx="2">
+            <a:schemeClr val="accent1"/>
+          </a:effectRef>
+          <a:fontRef idx="minor">
+            <a:schemeClr val="lt1"/>
+          </a:fontRef>
+        </p:style>
+        <p:txBody>
+          <a:bodyPr rtlCol="0" anchor="ctr"/>
+          <a:lstStyle/>
+          <a:p>
+            <a:pPr algn="ctr"/>
+          </a:p>
+        </p:txBody>
+      </p:sp>
+      <p:sp>
+        <p:nvSpPr>
+          <p:cNvPr id="23" name="TextBox 22"/>
+          <p:cNvSpPr txBox="1"/>
+          <p:nvPr/>
+        </p:nvSpPr>
+        <p:spPr>
+          <a:xfrm>
+            <a:off x="822960" y="2761488"/>
+            <a:ext cx="3291840" cy="713232"/>
+          </a:xfrm>
+          <a:prstGeom prst="rect">
+            <a:avLst/>
+          </a:prstGeom>
+          <a:noFill/>
+        </p:spPr>
+        <p:txBody>
+          <a:bodyPr wrap="square" lIns="0" rIns="0" tIns="0" bIns="0" anchor="ctr">
+            <a:spAutoFit/>
+          </a:bodyPr>
+          <a:lstStyle/>
+          <a:p>
+            <a:pPr algn="l"/>
+            <a:r>
+              <a:rPr sz="1800" b="1">
+                <a:solidFill>
+                  <a:srgbClr val="1A1614"/>
+                </a:solidFill>
+                <a:latin typeface="Calibri"/>
+              </a:rPr>
+              <a:t>Əxlaq</a:t>
+            </a:r>
+          </a:p>
+        </p:txBody>
+      </p:sp>
+      <p:sp>
+        <p:nvSpPr>
+          <p:cNvPr id="24" name="TextBox 23"/>
+          <p:cNvSpPr txBox="1"/>
+          <p:nvPr/>
+        </p:nvSpPr>
+        <p:spPr>
+          <a:xfrm>
+            <a:off x="4251959" y="2761488"/>
+            <a:ext cx="1463040" cy="713232"/>
+          </a:xfrm>
+          <a:prstGeom prst="rect">
+            <a:avLst/>
+          </a:prstGeom>
+          <a:noFill/>
+        </p:spPr>
+        <p:txBody>
+          <a:bodyPr wrap="square" lIns="0" rIns="0" tIns="0" bIns="0" anchor="ctr">
+            <a:spAutoFit/>
+          </a:bodyPr>
+          <a:lstStyle/>
+          <a:p>
+            <a:pPr algn="r"/>
+            <a:r>
+              <a:rPr sz="1800" b="1">
+                <a:solidFill>
+                  <a:srgbClr val="9C2F2A"/>
+                </a:solidFill>
+                <a:latin typeface="Calibri"/>
+              </a:rPr>
+              <a:t>149</a:t>
+            </a:r>
+          </a:p>
+        </p:txBody>
+      </p:sp>
+      <p:sp>
+        <p:nvSpPr>
+          <p:cNvPr id="25" name="Rectangle 24"/>
+          <p:cNvSpPr/>
+          <p:nvPr/>
+        </p:nvSpPr>
+        <p:spPr>
+          <a:xfrm>
+            <a:off x="6263640" y="2761488"/>
+            <a:ext cx="5486400" cy="713232"/>
+          </a:xfrm>
+          <a:prstGeom prst="rect">
+            <a:avLst/>
+          </a:prstGeom>
+          <a:solidFill>
+            <a:srgbClr val="FFFFFF"/>
+          </a:solidFill>
+          <a:ln>
+            <a:noFill/>
+          </a:ln>
+        </p:spPr>
+        <p:style>
+          <a:lnRef idx="1">
+            <a:schemeClr val="accent1"/>
+          </a:lnRef>
+          <a:fillRef idx="3">
+            <a:schemeClr val="accent1"/>
+          </a:fillRef>
+          <a:effectRef idx="2">
+            <a:schemeClr val="accent1"/>
+          </a:effectRef>
+          <a:fontRef idx="minor">
+            <a:schemeClr val="lt1"/>
+          </a:fontRef>
+        </p:style>
+        <p:txBody>
+          <a:bodyPr rtlCol="0" anchor="ctr"/>
+          <a:lstStyle/>
+          <a:p>
+            <a:pPr algn="ctr"/>
+          </a:p>
+        </p:txBody>
+      </p:sp>
+      <p:sp>
+        <p:nvSpPr>
+          <p:cNvPr id="26" name="Rectangle 25"/>
+          <p:cNvSpPr/>
+          <p:nvPr/>
+        </p:nvSpPr>
+        <p:spPr>
+          <a:xfrm>
+            <a:off x="6263640" y="2761488"/>
+            <a:ext cx="91440" cy="713232"/>
+          </a:xfrm>
+          <a:prstGeom prst="rect">
+            <a:avLst/>
+          </a:prstGeom>
+          <a:solidFill>
+            <a:srgbClr val="9C2F2A"/>
+          </a:solidFill>
+          <a:ln>
+            <a:noFill/>
+          </a:ln>
+        </p:spPr>
+        <p:style>
+          <a:lnRef idx="1">
+            <a:schemeClr val="accent1"/>
+          </a:lnRef>
+          <a:fillRef idx="3">
+            <a:schemeClr val="accent1"/>
+          </a:fillRef>
+          <a:effectRef idx="2">
+            <a:schemeClr val="accent1"/>
+          </a:effectRef>
+          <a:fontRef idx="minor">
+            <a:schemeClr val="lt1"/>
+          </a:fontRef>
+        </p:style>
+        <p:txBody>
+          <a:bodyPr rtlCol="0" anchor="ctr"/>
+          <a:lstStyle/>
+          <a:p>
+            <a:pPr algn="ctr"/>
+          </a:p>
+        </p:txBody>
+      </p:sp>
+      <p:sp>
+        <p:nvSpPr>
+          <p:cNvPr id="27" name="TextBox 26"/>
+          <p:cNvSpPr txBox="1"/>
+          <p:nvPr/>
+        </p:nvSpPr>
+        <p:spPr>
+          <a:xfrm>
+            <a:off x="6583680" y="2761488"/>
+            <a:ext cx="3291840" cy="713232"/>
+          </a:xfrm>
+          <a:prstGeom prst="rect">
+            <a:avLst/>
+          </a:prstGeom>
+          <a:noFill/>
+        </p:spPr>
+        <p:txBody>
+          <a:bodyPr wrap="square" lIns="0" rIns="0" tIns="0" bIns="0" anchor="ctr">
+            <a:spAutoFit/>
+          </a:bodyPr>
+          <a:lstStyle/>
+          <a:p>
+            <a:pPr algn="l"/>
+            <a:r>
+              <a:rPr sz="1800" b="1">
+                <a:solidFill>
+                  <a:srgbClr val="1A1614"/>
+                </a:solidFill>
+                <a:latin typeface="Calibri"/>
+              </a:rPr>
+              <a:t>El</a:t>
+            </a:r>
+          </a:p>
+        </p:txBody>
+      </p:sp>
+      <p:sp>
+        <p:nvSpPr>
+          <p:cNvPr id="28" name="TextBox 27"/>
+          <p:cNvSpPr txBox="1"/>
+          <p:nvPr/>
+        </p:nvSpPr>
+        <p:spPr>
+          <a:xfrm>
+            <a:off x="10012679" y="2761488"/>
+            <a:ext cx="1463040" cy="713232"/>
+          </a:xfrm>
+          <a:prstGeom prst="rect">
+            <a:avLst/>
+          </a:prstGeom>
+          <a:noFill/>
+        </p:spPr>
+        <p:txBody>
+          <a:bodyPr wrap="square" lIns="0" rIns="0" tIns="0" bIns="0" anchor="ctr">
+            <a:spAutoFit/>
+          </a:bodyPr>
+          <a:lstStyle/>
+          <a:p>
+            <a:pPr algn="r"/>
+            <a:r>
+              <a:rPr sz="1800" b="1">
+                <a:solidFill>
+                  <a:srgbClr val="9C2F2A"/>
+                </a:solidFill>
+                <a:latin typeface="Calibri"/>
+              </a:rPr>
+              <a:t>114</a:t>
+            </a:r>
+          </a:p>
+        </p:txBody>
+      </p:sp>
+      <p:sp>
+        <p:nvSpPr>
+          <p:cNvPr id="29" name="Rectangle 28"/>
+          <p:cNvSpPr/>
+          <p:nvPr/>
+        </p:nvSpPr>
+        <p:spPr>
+          <a:xfrm>
+            <a:off x="502920" y="3584448"/>
+            <a:ext cx="5486400" cy="713232"/>
+          </a:xfrm>
+          <a:prstGeom prst="rect">
+            <a:avLst/>
+          </a:prstGeom>
+          <a:solidFill>
+            <a:srgbClr val="FFFFFF"/>
+          </a:solidFill>
+          <a:ln>
+            <a:noFill/>
+          </a:ln>
+        </p:spPr>
+        <p:style>
+          <a:lnRef idx="1">
+            <a:schemeClr val="accent1"/>
+          </a:lnRef>
+          <a:fillRef idx="3">
+            <a:schemeClr val="accent1"/>
+          </a:fillRef>
+          <a:effectRef idx="2">
+            <a:schemeClr val="accent1"/>
+          </a:effectRef>
+          <a:fontRef idx="minor">
+            <a:schemeClr val="lt1"/>
+          </a:fontRef>
+        </p:style>
+        <p:txBody>
+          <a:bodyPr rtlCol="0" anchor="ctr"/>
+          <a:lstStyle/>
+          <a:p>
+            <a:pPr algn="ctr"/>
+          </a:p>
+        </p:txBody>
+      </p:sp>
+      <p:sp>
+        <p:nvSpPr>
+          <p:cNvPr id="30" name="Rectangle 29"/>
+          <p:cNvSpPr/>
+          <p:nvPr/>
+        </p:nvSpPr>
+        <p:spPr>
+          <a:xfrm>
+            <a:off x="502920" y="3584448"/>
+            <a:ext cx="91440" cy="713232"/>
+          </a:xfrm>
+          <a:prstGeom prst="rect">
+            <a:avLst/>
+          </a:prstGeom>
+          <a:solidFill>
+            <a:srgbClr val="9C2F2A"/>
+          </a:solidFill>
+          <a:ln>
+            <a:noFill/>
+          </a:ln>
+        </p:spPr>
+        <p:style>
+          <a:lnRef idx="1">
+            <a:schemeClr val="accent1"/>
+          </a:lnRef>
+          <a:fillRef idx="3">
+            <a:schemeClr val="accent1"/>
+          </a:fillRef>
+          <a:effectRef idx="2">
+            <a:schemeClr val="accent1"/>
+          </a:effectRef>
+          <a:fontRef idx="minor">
+            <a:schemeClr val="lt1"/>
+          </a:fontRef>
+        </p:style>
+        <p:txBody>
+          <a:bodyPr rtlCol="0" anchor="ctr"/>
+          <a:lstStyle/>
+          <a:p>
+            <a:pPr algn="ctr"/>
+          </a:p>
+        </p:txBody>
+      </p:sp>
+      <p:sp>
+        <p:nvSpPr>
+          <p:cNvPr id="31" name="TextBox 30"/>
+          <p:cNvSpPr txBox="1"/>
+          <p:nvPr/>
+        </p:nvSpPr>
+        <p:spPr>
+          <a:xfrm>
+            <a:off x="822960" y="3584448"/>
+            <a:ext cx="3291840" cy="713232"/>
+          </a:xfrm>
+          <a:prstGeom prst="rect">
+            <a:avLst/>
+          </a:prstGeom>
+          <a:noFill/>
+        </p:spPr>
+        <p:txBody>
+          <a:bodyPr wrap="square" lIns="0" rIns="0" tIns="0" bIns="0" anchor="ctr">
+            <a:spAutoFit/>
+          </a:bodyPr>
+          <a:lstStyle/>
+          <a:p>
+            <a:pPr algn="l"/>
+            <a:r>
+              <a:rPr sz="1800" b="1">
+                <a:solidFill>
+                  <a:srgbClr val="1A1614"/>
+                </a:solidFill>
+                <a:latin typeface="Calibri"/>
+              </a:rPr>
+              <a:t>Dostluq</a:t>
+            </a:r>
+          </a:p>
+        </p:txBody>
+      </p:sp>
+      <p:sp>
+        <p:nvSpPr>
+          <p:cNvPr id="32" name="TextBox 31"/>
+          <p:cNvSpPr txBox="1"/>
+          <p:nvPr/>
+        </p:nvSpPr>
+        <p:spPr>
+          <a:xfrm>
+            <a:off x="4251959" y="3584448"/>
+            <a:ext cx="1463040" cy="713232"/>
+          </a:xfrm>
+          <a:prstGeom prst="rect">
+            <a:avLst/>
+          </a:prstGeom>
+          <a:noFill/>
+        </p:spPr>
+        <p:txBody>
+          <a:bodyPr wrap="square" lIns="0" rIns="0" tIns="0" bIns="0" anchor="ctr">
+            <a:spAutoFit/>
+          </a:bodyPr>
+          <a:lstStyle/>
+          <a:p>
+            <a:pPr algn="r"/>
+            <a:r>
+              <a:rPr sz="1800" b="1">
+                <a:solidFill>
+                  <a:srgbClr val="9C2F2A"/>
+                </a:solidFill>
+                <a:latin typeface="Calibri"/>
+              </a:rPr>
+              <a:t>97</a:t>
+            </a:r>
+          </a:p>
+        </p:txBody>
+      </p:sp>
+      <p:sp>
+        <p:nvSpPr>
+          <p:cNvPr id="33" name="Rectangle 32"/>
+          <p:cNvSpPr/>
+          <p:nvPr/>
+        </p:nvSpPr>
+        <p:spPr>
+          <a:xfrm>
+            <a:off x="6263640" y="3584448"/>
+            <a:ext cx="5486400" cy="713232"/>
+          </a:xfrm>
+          <a:prstGeom prst="rect">
+            <a:avLst/>
+          </a:prstGeom>
+          <a:solidFill>
+            <a:srgbClr val="FFFFFF"/>
+          </a:solidFill>
+          <a:ln>
+            <a:noFill/>
+          </a:ln>
+        </p:spPr>
+        <p:style>
+          <a:lnRef idx="1">
+            <a:schemeClr val="accent1"/>
+          </a:lnRef>
+          <a:fillRef idx="3">
+            <a:schemeClr val="accent1"/>
+          </a:fillRef>
+          <a:effectRef idx="2">
+            <a:schemeClr val="accent1"/>
+          </a:effectRef>
+          <a:fontRef idx="minor">
+            <a:schemeClr val="lt1"/>
+          </a:fontRef>
+        </p:style>
+        <p:txBody>
+          <a:bodyPr rtlCol="0" anchor="ctr"/>
+          <a:lstStyle/>
+          <a:p>
+            <a:pPr algn="ctr"/>
+          </a:p>
+        </p:txBody>
+      </p:sp>
+      <p:sp>
+        <p:nvSpPr>
+          <p:cNvPr id="34" name="Rectangle 33"/>
+          <p:cNvSpPr/>
+          <p:nvPr/>
+        </p:nvSpPr>
+        <p:spPr>
+          <a:xfrm>
+            <a:off x="6263640" y="3584448"/>
+            <a:ext cx="91440" cy="713232"/>
+          </a:xfrm>
+          <a:prstGeom prst="rect">
+            <a:avLst/>
+          </a:prstGeom>
+          <a:solidFill>
+            <a:srgbClr val="9C2F2A"/>
+          </a:solidFill>
+          <a:ln>
+            <a:noFill/>
+          </a:ln>
+        </p:spPr>
+        <p:style>
+          <a:lnRef idx="1">
+            <a:schemeClr val="accent1"/>
+          </a:lnRef>
+          <a:fillRef idx="3">
+            <a:schemeClr val="accent1"/>
+          </a:fillRef>
+          <a:effectRef idx="2">
+            <a:schemeClr val="accent1"/>
+          </a:effectRef>
+          <a:fontRef idx="minor">
+            <a:schemeClr val="lt1"/>
+          </a:fontRef>
+        </p:style>
+        <p:txBody>
+          <a:bodyPr rtlCol="0" anchor="ctr"/>
+          <a:lstStyle/>
+          <a:p>
+            <a:pPr algn="ctr"/>
+          </a:p>
+        </p:txBody>
+      </p:sp>
+      <p:sp>
+        <p:nvSpPr>
+          <p:cNvPr id="35" name="TextBox 34"/>
+          <p:cNvSpPr txBox="1"/>
+          <p:nvPr/>
+        </p:nvSpPr>
+        <p:spPr>
+          <a:xfrm>
+            <a:off x="6583680" y="3584448"/>
+            <a:ext cx="3291840" cy="713232"/>
+          </a:xfrm>
+          <a:prstGeom prst="rect">
+            <a:avLst/>
+          </a:prstGeom>
+          <a:noFill/>
+        </p:spPr>
+        <p:txBody>
+          <a:bodyPr wrap="square" lIns="0" rIns="0" tIns="0" bIns="0" anchor="ctr">
+            <a:spAutoFit/>
+          </a:bodyPr>
+          <a:lstStyle/>
+          <a:p>
+            <a:pPr algn="l"/>
+            <a:r>
+              <a:rPr sz="1800" b="1">
+                <a:solidFill>
+                  <a:srgbClr val="1A1614"/>
+                </a:solidFill>
+                <a:latin typeface="Calibri"/>
+              </a:rPr>
+              <a:t>İş</a:t>
+            </a:r>
+          </a:p>
+        </p:txBody>
+      </p:sp>
+      <p:sp>
+        <p:nvSpPr>
+          <p:cNvPr id="36" name="TextBox 35"/>
+          <p:cNvSpPr txBox="1"/>
+          <p:nvPr/>
+        </p:nvSpPr>
+        <p:spPr>
+          <a:xfrm>
+            <a:off x="10012679" y="3584448"/>
+            <a:ext cx="1463040" cy="713232"/>
+          </a:xfrm>
+          <a:prstGeom prst="rect">
+            <a:avLst/>
+          </a:prstGeom>
+          <a:noFill/>
+        </p:spPr>
+        <p:txBody>
+          <a:bodyPr wrap="square" lIns="0" rIns="0" tIns="0" bIns="0" anchor="ctr">
+            <a:spAutoFit/>
+          </a:bodyPr>
+          <a:lstStyle/>
+          <a:p>
+            <a:pPr algn="r"/>
+            <a:r>
+              <a:rPr sz="1800" b="1">
+                <a:solidFill>
+                  <a:srgbClr val="9C2F2A"/>
+                </a:solidFill>
+                <a:latin typeface="Calibri"/>
+              </a:rPr>
+              <a:t>49</a:t>
+            </a:r>
+          </a:p>
+        </p:txBody>
+      </p:sp>
+      <p:sp>
+        <p:nvSpPr>
+          <p:cNvPr id="37" name="Rectangle 36"/>
+          <p:cNvSpPr/>
+          <p:nvPr/>
+        </p:nvSpPr>
+        <p:spPr>
+          <a:xfrm>
+            <a:off x="502920" y="4407408"/>
+            <a:ext cx="5486400" cy="713232"/>
+          </a:xfrm>
+          <a:prstGeom prst="rect">
+            <a:avLst/>
+          </a:prstGeom>
+          <a:solidFill>
+            <a:srgbClr val="FFFFFF"/>
+          </a:solidFill>
+          <a:ln>
+            <a:noFill/>
+          </a:ln>
+        </p:spPr>
+        <p:style>
+          <a:lnRef idx="1">
+            <a:schemeClr val="accent1"/>
+          </a:lnRef>
+          <a:fillRef idx="3">
+            <a:schemeClr val="accent1"/>
+          </a:fillRef>
+          <a:effectRef idx="2">
+            <a:schemeClr val="accent1"/>
+          </a:effectRef>
+          <a:fontRef idx="minor">
+            <a:schemeClr val="lt1"/>
+          </a:fontRef>
+        </p:style>
+        <p:txBody>
+          <a:bodyPr rtlCol="0" anchor="ctr"/>
+          <a:lstStyle/>
+          <a:p>
+            <a:pPr algn="ctr"/>
+          </a:p>
+        </p:txBody>
+      </p:sp>
+      <p:sp>
+        <p:nvSpPr>
+          <p:cNvPr id="38" name="Rectangle 37"/>
+          <p:cNvSpPr/>
+          <p:nvPr/>
+        </p:nvSpPr>
+        <p:spPr>
+          <a:xfrm>
+            <a:off x="502920" y="4407408"/>
+            <a:ext cx="91440" cy="713232"/>
+          </a:xfrm>
+          <a:prstGeom prst="rect">
+            <a:avLst/>
+          </a:prstGeom>
+          <a:solidFill>
+            <a:srgbClr val="9C2F2A"/>
+          </a:solidFill>
+          <a:ln>
+            <a:noFill/>
+          </a:ln>
+        </p:spPr>
+        <p:style>
+          <a:lnRef idx="1">
+            <a:schemeClr val="accent1"/>
+          </a:lnRef>
+          <a:fillRef idx="3">
+            <a:schemeClr val="accent1"/>
+          </a:fillRef>
+          <a:effectRef idx="2">
+            <a:schemeClr val="accent1"/>
+          </a:effectRef>
+          <a:fontRef idx="minor">
+            <a:schemeClr val="lt1"/>
+          </a:fontRef>
+        </p:style>
+        <p:txBody>
+          <a:bodyPr rtlCol="0" anchor="ctr"/>
+          <a:lstStyle/>
+          <a:p>
+            <a:pPr algn="ctr"/>
+          </a:p>
+        </p:txBody>
+      </p:sp>
+      <p:sp>
+        <p:nvSpPr>
+          <p:cNvPr id="39" name="TextBox 38"/>
+          <p:cNvSpPr txBox="1"/>
+          <p:nvPr/>
+        </p:nvSpPr>
+        <p:spPr>
+          <a:xfrm>
+            <a:off x="822960" y="4407408"/>
+            <a:ext cx="3291840" cy="713232"/>
+          </a:xfrm>
+          <a:prstGeom prst="rect">
+            <a:avLst/>
+          </a:prstGeom>
+          <a:noFill/>
+        </p:spPr>
+        <p:txBody>
+          <a:bodyPr wrap="square" lIns="0" rIns="0" tIns="0" bIns="0" anchor="ctr">
+            <a:spAutoFit/>
+          </a:bodyPr>
+          <a:lstStyle/>
+          <a:p>
+            <a:pPr algn="l"/>
+            <a:r>
+              <a:rPr sz="1800" b="1">
+                <a:solidFill>
+                  <a:srgbClr val="1A1614"/>
+                </a:solidFill>
+                <a:latin typeface="Calibri"/>
+              </a:rPr>
+              <a:t>Adət-ənənə</a:t>
+            </a:r>
+          </a:p>
+        </p:txBody>
+      </p:sp>
+      <p:sp>
+        <p:nvSpPr>
+          <p:cNvPr id="40" name="TextBox 39"/>
+          <p:cNvSpPr txBox="1"/>
+          <p:nvPr/>
+        </p:nvSpPr>
+        <p:spPr>
+          <a:xfrm>
+            <a:off x="4251959" y="4407408"/>
+            <a:ext cx="1463040" cy="713232"/>
+          </a:xfrm>
+          <a:prstGeom prst="rect">
+            <a:avLst/>
+          </a:prstGeom>
+          <a:noFill/>
+        </p:spPr>
+        <p:txBody>
+          <a:bodyPr wrap="square" lIns="0" rIns="0" tIns="0" bIns="0" anchor="ctr">
+            <a:spAutoFit/>
+          </a:bodyPr>
+          <a:lstStyle/>
+          <a:p>
+            <a:pPr algn="r"/>
+            <a:r>
+              <a:rPr sz="1800" b="1">
+                <a:solidFill>
+                  <a:srgbClr val="9C2F2A"/>
+                </a:solidFill>
+                <a:latin typeface="Calibri"/>
+              </a:rPr>
+              <a:t>38</a:t>
+            </a:r>
+          </a:p>
+        </p:txBody>
+      </p:sp>
+      <p:sp>
+        <p:nvSpPr>
+          <p:cNvPr id="41" name="Rectangle 40"/>
+          <p:cNvSpPr/>
+          <p:nvPr/>
+        </p:nvSpPr>
+        <p:spPr>
+          <a:xfrm>
+            <a:off x="6263640" y="4407408"/>
+            <a:ext cx="5486400" cy="713232"/>
+          </a:xfrm>
+          <a:prstGeom prst="rect">
+            <a:avLst/>
+          </a:prstGeom>
+          <a:solidFill>
+            <a:srgbClr val="FFFFFF"/>
+          </a:solidFill>
+          <a:ln>
+            <a:noFill/>
+          </a:ln>
+        </p:spPr>
+        <p:style>
+          <a:lnRef idx="1">
+            <a:schemeClr val="accent1"/>
+          </a:lnRef>
+          <a:fillRef idx="3">
+            <a:schemeClr val="accent1"/>
+          </a:fillRef>
+          <a:effectRef idx="2">
+            <a:schemeClr val="accent1"/>
+          </a:effectRef>
+          <a:fontRef idx="minor">
+            <a:schemeClr val="lt1"/>
+          </a:fontRef>
+        </p:style>
+        <p:txBody>
+          <a:bodyPr rtlCol="0" anchor="ctr"/>
+          <a:lstStyle/>
+          <a:p>
+            <a:pPr algn="ctr"/>
+          </a:p>
+        </p:txBody>
+      </p:sp>
+      <p:sp>
+        <p:nvSpPr>
+          <p:cNvPr id="42" name="Rectangle 41"/>
+          <p:cNvSpPr/>
+          <p:nvPr/>
+        </p:nvSpPr>
+        <p:spPr>
+          <a:xfrm>
+            <a:off x="6263640" y="4407408"/>
+            <a:ext cx="91440" cy="713232"/>
+          </a:xfrm>
+          <a:prstGeom prst="rect">
+            <a:avLst/>
+          </a:prstGeom>
+          <a:solidFill>
+            <a:srgbClr val="9C2F2A"/>
+          </a:solidFill>
+          <a:ln>
+            <a:noFill/>
+          </a:ln>
+        </p:spPr>
+        <p:style>
+          <a:lnRef idx="1">
+            <a:schemeClr val="accent1"/>
+          </a:lnRef>
+          <a:fillRef idx="3">
+            <a:schemeClr val="accent1"/>
+          </a:fillRef>
+          <a:effectRef idx="2">
+            <a:schemeClr val="accent1"/>
+          </a:effectRef>
+          <a:fontRef idx="minor">
+            <a:schemeClr val="lt1"/>
+          </a:fontRef>
+        </p:style>
+        <p:txBody>
+          <a:bodyPr rtlCol="0" anchor="ctr"/>
+          <a:lstStyle/>
+          <a:p>
+            <a:pPr algn="ctr"/>
+          </a:p>
+        </p:txBody>
+      </p:sp>
+      <p:sp>
+        <p:nvSpPr>
+          <p:cNvPr id="43" name="TextBox 42"/>
+          <p:cNvSpPr txBox="1"/>
+          <p:nvPr/>
+        </p:nvSpPr>
+        <p:spPr>
+          <a:xfrm>
+            <a:off x="6583680" y="4407408"/>
+            <a:ext cx="3291840" cy="713232"/>
+          </a:xfrm>
+          <a:prstGeom prst="rect">
+            <a:avLst/>
+          </a:prstGeom>
+          <a:noFill/>
+        </p:spPr>
+        <p:txBody>
+          <a:bodyPr wrap="square" lIns="0" rIns="0" tIns="0" bIns="0" anchor="ctr">
+            <a:spAutoFit/>
+          </a:bodyPr>
+          <a:lstStyle/>
+          <a:p>
+            <a:pPr algn="l"/>
+            <a:r>
+              <a:rPr sz="1800" b="1">
+                <a:solidFill>
+                  <a:srgbClr val="1A1614"/>
+                </a:solidFill>
+                <a:latin typeface="Calibri"/>
+              </a:rPr>
+              <a:t>Tərbiyə</a:t>
+            </a:r>
+          </a:p>
+        </p:txBody>
+      </p:sp>
+      <p:sp>
+        <p:nvSpPr>
+          <p:cNvPr id="44" name="TextBox 43"/>
+          <p:cNvSpPr txBox="1"/>
+          <p:nvPr/>
+        </p:nvSpPr>
+        <p:spPr>
+          <a:xfrm>
+            <a:off x="10012679" y="4407408"/>
+            <a:ext cx="1463040" cy="713232"/>
+          </a:xfrm>
+          <a:prstGeom prst="rect">
+            <a:avLst/>
+          </a:prstGeom>
+          <a:noFill/>
+        </p:spPr>
+        <p:txBody>
+          <a:bodyPr wrap="square" lIns="0" rIns="0" tIns="0" bIns="0" anchor="ctr">
+            <a:spAutoFit/>
+          </a:bodyPr>
+          <a:lstStyle/>
+          <a:p>
+            <a:pPr algn="r"/>
+            <a:r>
+              <a:rPr sz="1800" b="1">
+                <a:solidFill>
+                  <a:srgbClr val="9C2F2A"/>
+                </a:solidFill>
+                <a:latin typeface="Calibri"/>
+              </a:rPr>
+              <a:t>22</a:t>
+            </a:r>
+          </a:p>
+        </p:txBody>
+      </p:sp>
+      <p:sp>
+        <p:nvSpPr>
+          <p:cNvPr id="45" name="Rectangle 44"/>
+          <p:cNvSpPr/>
+          <p:nvPr/>
+        </p:nvSpPr>
+        <p:spPr>
+          <a:xfrm>
+            <a:off x="502920" y="5230368"/>
+            <a:ext cx="5486400" cy="713232"/>
+          </a:xfrm>
+          <a:prstGeom prst="rect">
+            <a:avLst/>
+          </a:prstGeom>
+          <a:solidFill>
+            <a:srgbClr val="FFFFFF"/>
+          </a:solidFill>
+          <a:ln>
+            <a:noFill/>
+          </a:ln>
+        </p:spPr>
+        <p:style>
+          <a:lnRef idx="1">
+            <a:schemeClr val="accent1"/>
+          </a:lnRef>
+          <a:fillRef idx="3">
+            <a:schemeClr val="accent1"/>
+          </a:fillRef>
+          <a:effectRef idx="2">
+            <a:schemeClr val="accent1"/>
+          </a:effectRef>
+          <a:fontRef idx="minor">
+            <a:schemeClr val="lt1"/>
+          </a:fontRef>
+        </p:style>
+        <p:txBody>
+          <a:bodyPr rtlCol="0" anchor="ctr"/>
+          <a:lstStyle/>
+          <a:p>
+            <a:pPr algn="ctr"/>
+          </a:p>
+        </p:txBody>
+      </p:sp>
+      <p:sp>
+        <p:nvSpPr>
+          <p:cNvPr id="46" name="Rectangle 45"/>
+          <p:cNvSpPr/>
+          <p:nvPr/>
+        </p:nvSpPr>
+        <p:spPr>
+          <a:xfrm>
+            <a:off x="502920" y="5230368"/>
+            <a:ext cx="91440" cy="713232"/>
+          </a:xfrm>
+          <a:prstGeom prst="rect">
+            <a:avLst/>
+          </a:prstGeom>
+          <a:solidFill>
+            <a:srgbClr val="9C2F2A"/>
+          </a:solidFill>
+          <a:ln>
+            <a:noFill/>
+          </a:ln>
+        </p:spPr>
+        <p:style>
+          <a:lnRef idx="1">
+            <a:schemeClr val="accent1"/>
+          </a:lnRef>
+          <a:fillRef idx="3">
+            <a:schemeClr val="accent1"/>
+          </a:fillRef>
+          <a:effectRef idx="2">
+            <a:schemeClr val="accent1"/>
+          </a:effectRef>
+          <a:fontRef idx="minor">
+            <a:schemeClr val="lt1"/>
+          </a:fontRef>
+        </p:style>
+        <p:txBody>
+          <a:bodyPr rtlCol="0" anchor="ctr"/>
+          <a:lstStyle/>
+          <a:p>
+            <a:pPr algn="ctr"/>
+          </a:p>
+        </p:txBody>
+      </p:sp>
+      <p:sp>
+        <p:nvSpPr>
+          <p:cNvPr id="47" name="TextBox 46"/>
+          <p:cNvSpPr txBox="1"/>
+          <p:nvPr/>
+        </p:nvSpPr>
+        <p:spPr>
+          <a:xfrm>
+            <a:off x="822960" y="5230368"/>
+            <a:ext cx="3291840" cy="713232"/>
+          </a:xfrm>
+          <a:prstGeom prst="rect">
+            <a:avLst/>
+          </a:prstGeom>
+          <a:noFill/>
+        </p:spPr>
+        <p:txBody>
+          <a:bodyPr wrap="square" lIns="0" rIns="0" tIns="0" bIns="0" anchor="ctr">
+            <a:spAutoFit/>
+          </a:bodyPr>
+          <a:lstStyle/>
+          <a:p>
+            <a:pPr algn="l"/>
+            <a:r>
+              <a:rPr sz="1800" b="1">
+                <a:solidFill>
+                  <a:srgbClr val="1A1614"/>
+                </a:solidFill>
+                <a:latin typeface="Calibri"/>
+              </a:rPr>
+              <a:t>Təhsil</a:t>
+            </a:r>
+          </a:p>
+        </p:txBody>
+      </p:sp>
+      <p:sp>
+        <p:nvSpPr>
+          <p:cNvPr id="48" name="TextBox 47"/>
+          <p:cNvSpPr txBox="1"/>
+          <p:nvPr/>
+        </p:nvSpPr>
+        <p:spPr>
+          <a:xfrm>
+            <a:off x="4251959" y="5230368"/>
+            <a:ext cx="1463040" cy="713232"/>
+          </a:xfrm>
+          <a:prstGeom prst="rect">
+            <a:avLst/>
+          </a:prstGeom>
+          <a:noFill/>
+        </p:spPr>
+        <p:txBody>
+          <a:bodyPr wrap="square" lIns="0" rIns="0" tIns="0" bIns="0" anchor="ctr">
+            <a:spAutoFit/>
+          </a:bodyPr>
+          <a:lstStyle/>
+          <a:p>
+            <a:pPr algn="r"/>
+            <a:r>
+              <a:rPr sz="1800" b="1">
+                <a:solidFill>
+                  <a:srgbClr val="9C2F2A"/>
+                </a:solidFill>
+                <a:latin typeface="Calibri"/>
+              </a:rPr>
+              <a:t>20</a:t>
+            </a:r>
+          </a:p>
+        </p:txBody>
+      </p:sp>
+      <p:sp>
+        <p:nvSpPr>
+          <p:cNvPr id="49" name="Rectangle 48"/>
+          <p:cNvSpPr/>
+          <p:nvPr/>
+        </p:nvSpPr>
+        <p:spPr>
+          <a:xfrm>
+            <a:off x="6263640" y="5230368"/>
+            <a:ext cx="5486400" cy="713232"/>
+          </a:xfrm>
+          <a:prstGeom prst="rect">
+            <a:avLst/>
+          </a:prstGeom>
+          <a:solidFill>
+            <a:srgbClr val="FFFFFF"/>
+          </a:solidFill>
+          <a:ln>
+            <a:noFill/>
+          </a:ln>
+        </p:spPr>
+        <p:style>
+          <a:lnRef idx="1">
+            <a:schemeClr val="accent1"/>
+          </a:lnRef>
+          <a:fillRef idx="3">
+            <a:schemeClr val="accent1"/>
+          </a:fillRef>
+          <a:effectRef idx="2">
+            <a:schemeClr val="accent1"/>
+          </a:effectRef>
+          <a:fontRef idx="minor">
+            <a:schemeClr val="lt1"/>
+          </a:fontRef>
+        </p:style>
+        <p:txBody>
+          <a:bodyPr rtlCol="0" anchor="ctr"/>
+          <a:lstStyle/>
+          <a:p>
+            <a:pPr algn="ctr"/>
+          </a:p>
+        </p:txBody>
+      </p:sp>
+      <p:sp>
+        <p:nvSpPr>
+          <p:cNvPr id="50" name="Rectangle 49"/>
+          <p:cNvSpPr/>
+          <p:nvPr/>
+        </p:nvSpPr>
+        <p:spPr>
+          <a:xfrm>
+            <a:off x="6263640" y="5230368"/>
+            <a:ext cx="91440" cy="713232"/>
+          </a:xfrm>
+          <a:prstGeom prst="rect">
+            <a:avLst/>
+          </a:prstGeom>
+          <a:solidFill>
+            <a:srgbClr val="9C2F2A"/>
+          </a:solidFill>
+          <a:ln>
+            <a:noFill/>
+          </a:ln>
+        </p:spPr>
+        <p:style>
+          <a:lnRef idx="1">
+            <a:schemeClr val="accent1"/>
+          </a:lnRef>
+          <a:fillRef idx="3">
+            <a:schemeClr val="accent1"/>
+          </a:fillRef>
+          <a:effectRef idx="2">
+            <a:schemeClr val="accent1"/>
+          </a:effectRef>
+          <a:fontRef idx="minor">
+            <a:schemeClr val="lt1"/>
+          </a:fontRef>
+        </p:style>
+        <p:txBody>
+          <a:bodyPr rtlCol="0" anchor="ctr"/>
+          <a:lstStyle/>
+          <a:p>
+            <a:pPr algn="ctr"/>
+          </a:p>
+        </p:txBody>
+      </p:sp>
+      <p:sp>
+        <p:nvSpPr>
+          <p:cNvPr id="51" name="TextBox 50"/>
+          <p:cNvSpPr txBox="1"/>
+          <p:nvPr/>
+        </p:nvSpPr>
+        <p:spPr>
+          <a:xfrm>
+            <a:off x="6583680" y="5230368"/>
+            <a:ext cx="3291840" cy="713232"/>
+          </a:xfrm>
+          <a:prstGeom prst="rect">
+            <a:avLst/>
+          </a:prstGeom>
+          <a:noFill/>
+        </p:spPr>
+        <p:txBody>
+          <a:bodyPr wrap="square" lIns="0" rIns="0" tIns="0" bIns="0" anchor="ctr">
+            <a:spAutoFit/>
+          </a:bodyPr>
+          <a:lstStyle/>
+          <a:p>
+            <a:pPr algn="l"/>
+            <a:r>
+              <a:rPr sz="1800" b="1">
+                <a:solidFill>
+                  <a:srgbClr val="1A1614"/>
+                </a:solidFill>
+                <a:latin typeface="Calibri"/>
+              </a:rPr>
+              <a:t>Ortaqlıq</a:t>
+            </a:r>
+          </a:p>
+        </p:txBody>
+      </p:sp>
+      <p:sp>
+        <p:nvSpPr>
+          <p:cNvPr id="52" name="TextBox 51"/>
+          <p:cNvSpPr txBox="1"/>
+          <p:nvPr/>
+        </p:nvSpPr>
+        <p:spPr>
+          <a:xfrm>
+            <a:off x="10012679" y="5230368"/>
+            <a:ext cx="1463040" cy="713232"/>
+          </a:xfrm>
+          <a:prstGeom prst="rect">
+            <a:avLst/>
+          </a:prstGeom>
+          <a:noFill/>
+        </p:spPr>
+        <p:txBody>
+          <a:bodyPr wrap="square" lIns="0" rIns="0" tIns="0" bIns="0" anchor="ctr">
+            <a:spAutoFit/>
+          </a:bodyPr>
+          <a:lstStyle/>
+          <a:p>
+            <a:pPr algn="r"/>
+            <a:r>
+              <a:rPr sz="1800" b="1">
+                <a:solidFill>
+                  <a:srgbClr val="9C2F2A"/>
+                </a:solidFill>
+                <a:latin typeface="Calibri"/>
+              </a:rPr>
+              <a:t>9</a:t>
+            </a:r>
+          </a:p>
+        </p:txBody>
+      </p:sp>
+      <p:sp>
+        <p:nvSpPr>
+          <p:cNvPr id="53" name="TextBox 52"/>
+          <p:cNvSpPr txBox="1"/>
+          <p:nvPr/>
+        </p:nvSpPr>
+        <p:spPr>
+          <a:xfrm>
+            <a:off x="502920" y="6473952"/>
+            <a:ext cx="7315200" cy="256032"/>
+          </a:xfrm>
+          <a:prstGeom prst="rect">
+            <a:avLst/>
+          </a:prstGeom>
+          <a:noFill/>
+        </p:spPr>
+        <p:txBody>
+          <a:bodyPr wrap="square" lIns="0" rIns="0" tIns="0" bIns="0" anchor="t">
+            <a:spAutoFit/>
+          </a:bodyPr>
+          <a:lstStyle/>
+          <a:p>
+            <a:pPr algn="l"/>
+            <a:r>
+              <a:rPr sz="1200" b="0">
                 <a:solidFill>
                   <a:srgbClr val="6B625A"/>
                 </a:solidFill>
@@ -6489,31 +8314,29 @@
       </p:sp>
       <p:sp>
         <p:nvSpPr>
-          <p:cNvPr id="16" name="TextBox 15"/>
-          <p:cNvSpPr txBox="1"/>
-          <p:nvPr/>
-        </p:nvSpPr>
-        <p:spPr>
-          <a:xfrm>
-            <a:off x="10424160" y="6446520"/>
-            <a:ext cx="1280160" cy="274320"/>
-          </a:xfrm>
-          <a:prstGeom prst="rect">
-            <a:avLst/>
-          </a:prstGeom>
-          <a:noFill/>
-        </p:spPr>
-        <p:txBody>
-          <a:bodyPr wrap="square" lIns="0" rIns="0" tIns="0" bIns="0" anchor="t"/>
-          <a:lstStyle/>
-          <a:p>
-            <a:pPr algn="r">
-              <a:spcAft>
-                <a:spcPts val="0"/>
-              </a:spcAft>
-            </a:pPr>
-            <a:r>
-              <a:rPr sz="1100" b="0">
+          <p:cNvPr id="54" name="TextBox 53"/>
+          <p:cNvSpPr txBox="1"/>
+          <p:nvPr/>
+        </p:nvSpPr>
+        <p:spPr>
+          <a:xfrm>
+            <a:off x="10241280" y="6473952"/>
+            <a:ext cx="1463040" cy="256032"/>
+          </a:xfrm>
+          <a:prstGeom prst="rect">
+            <a:avLst/>
+          </a:prstGeom>
+          <a:noFill/>
+        </p:spPr>
+        <p:txBody>
+          <a:bodyPr wrap="square" lIns="0" rIns="0" tIns="0" bIns="0" anchor="t">
+            <a:spAutoFit/>
+          </a:bodyPr>
+          <a:lstStyle/>
+          <a:p>
+            <a:pPr algn="r"/>
+            <a:r>
+              <a:rPr sz="1200" b="0">
                 <a:solidFill>
                   <a:srgbClr val="6B625A"/>
                 </a:solidFill>
@@ -6557,7 +8380,7 @@
             <a:avLst/>
           </a:prstGeom>
           <a:solidFill>
-            <a:srgbClr val="FBF7F1"/>
+            <a:srgbClr val="1A1614"/>
           </a:solidFill>
           <a:ln>
             <a:noFill/>
@@ -6585,236 +8408,191 @@
           </a:p>
         </p:txBody>
       </p:sp>
-      <p:sp>
-        <p:nvSpPr>
-          <p:cNvPr id="3" name="TextBox 2"/>
-          <p:cNvSpPr txBox="1"/>
-          <p:nvPr/>
-        </p:nvSpPr>
-        <p:spPr>
-          <a:xfrm>
-            <a:off x="640080" y="411480"/>
-            <a:ext cx="10972800" cy="548640"/>
-          </a:xfrm>
-          <a:prstGeom prst="rect">
-            <a:avLst/>
-          </a:prstGeom>
-          <a:noFill/>
-        </p:spPr>
-        <p:txBody>
-          <a:bodyPr wrap="square" lIns="0" rIns="0" tIns="0" bIns="0" anchor="t"/>
-          <a:lstStyle/>
-          <a:p>
-            <a:pPr algn="l">
-              <a:spcAft>
-                <a:spcPts val="0"/>
-              </a:spcAft>
-            </a:pPr>
+      <p:pic>
+        <p:nvPicPr>
+          <p:cNvPr id="3" name="Picture 2" descr="73a6727f-2046-49b5-ad32-3667d7a0e571.jpg"/>
+          <p:cNvPicPr>
+            <a:picLocks noChangeAspect="1"/>
+          </p:cNvPicPr>
+          <p:nvPr/>
+        </p:nvPicPr>
+        <p:blipFill>
+          <a:blip r:embed="rId2"/>
+          <a:stretch>
+            <a:fillRect/>
+          </a:stretch>
+        </p:blipFill>
+        <p:spPr>
+          <a:xfrm>
+            <a:off x="640080" y="1371600"/>
+            <a:ext cx="2286000" cy="2286000"/>
+          </a:xfrm>
+          <a:prstGeom prst="rect">
+            <a:avLst/>
+          </a:prstGeom>
+        </p:spPr>
+      </p:pic>
+      <p:pic>
+        <p:nvPicPr>
+          <p:cNvPr id="4" name="Picture 3" descr="cfb04321-8dfe-4d19-bad4-9bcf2067f00c.jpg"/>
+          <p:cNvPicPr>
+            <a:picLocks noChangeAspect="1"/>
+          </p:cNvPicPr>
+          <p:nvPr/>
+        </p:nvPicPr>
+        <p:blipFill>
+          <a:blip r:embed="rId3"/>
+          <a:stretch>
+            <a:fillRect/>
+          </a:stretch>
+        </p:blipFill>
+        <p:spPr>
+          <a:xfrm>
+            <a:off x="640080" y="3794760"/>
+            <a:ext cx="2286000" cy="2286000"/>
+          </a:xfrm>
+          <a:prstGeom prst="rect">
+            <a:avLst/>
+          </a:prstGeom>
+        </p:spPr>
+      </p:pic>
+      <p:sp>
+        <p:nvSpPr>
+          <p:cNvPr id="5" name="TextBox 4"/>
+          <p:cNvSpPr txBox="1"/>
+          <p:nvPr/>
+        </p:nvSpPr>
+        <p:spPr>
+          <a:xfrm>
+            <a:off x="3291840" y="1554480"/>
+            <a:ext cx="8229600" cy="365760"/>
+          </a:xfrm>
+          <a:prstGeom prst="rect">
+            <a:avLst/>
+          </a:prstGeom>
+          <a:noFill/>
+        </p:spPr>
+        <p:txBody>
+          <a:bodyPr wrap="square" lIns="0" rIns="0" tIns="0" bIns="0" anchor="t">
+            <a:spAutoFit/>
+          </a:bodyPr>
+          <a:lstStyle/>
+          <a:p>
+            <a:pPr algn="l"/>
+            <a:r>
+              <a:rPr sz="1400" b="1">
+                <a:solidFill>
+                  <a:srgbClr val="A6843E"/>
+                </a:solidFill>
+                <a:latin typeface="Calibri"/>
+              </a:rPr>
+              <a:t>HƏR SƏHƏR</a:t>
+            </a:r>
+          </a:p>
+        </p:txBody>
+      </p:sp>
+      <p:sp>
+        <p:nvSpPr>
+          <p:cNvPr id="6" name="TextBox 5"/>
+          <p:cNvSpPr txBox="1"/>
+          <p:nvPr/>
+        </p:nvSpPr>
+        <p:spPr>
+          <a:xfrm>
+            <a:off x="3291840" y="2011680"/>
+            <a:ext cx="8229600" cy="1188720"/>
+          </a:xfrm>
+          <a:prstGeom prst="rect">
+            <a:avLst/>
+          </a:prstGeom>
+          <a:noFill/>
+        </p:spPr>
+        <p:txBody>
+          <a:bodyPr wrap="square" lIns="0" rIns="0" tIns="0" bIns="0" anchor="t">
+            <a:spAutoFit/>
+          </a:bodyPr>
+          <a:lstStyle/>
+          <a:p>
+            <a:pPr algn="l"/>
+            <a:r>
+              <a:rPr sz="2800" b="1">
+                <a:solidFill>
+                  <a:srgbClr val="F6F1E7"/>
+                </a:solidFill>
+                <a:latin typeface="Calibri"/>
+              </a:rPr>
+              <a:t>Saat 09:00.
+Bir söz, bütün oxuculara.</a:t>
+            </a:r>
+          </a:p>
+        </p:txBody>
+      </p:sp>
+      <p:sp>
+        <p:nvSpPr>
+          <p:cNvPr id="7" name="TextBox 6"/>
+          <p:cNvSpPr txBox="1"/>
+          <p:nvPr/>
+        </p:nvSpPr>
+        <p:spPr>
+          <a:xfrm>
+            <a:off x="3291840" y="4114800"/>
+            <a:ext cx="8229600" cy="365760"/>
+          </a:xfrm>
+          <a:prstGeom prst="rect">
+            <a:avLst/>
+          </a:prstGeom>
+          <a:noFill/>
+        </p:spPr>
+        <p:txBody>
+          <a:bodyPr wrap="square" lIns="0" rIns="0" tIns="0" bIns="0" anchor="t">
+            <a:spAutoFit/>
+          </a:bodyPr>
+          <a:lstStyle/>
+          <a:p>
+            <a:pPr algn="l"/>
+            <a:r>
+              <a:rPr sz="1400" b="1">
+                <a:solidFill>
+                  <a:srgbClr val="A6843E"/>
+                </a:solidFill>
+                <a:latin typeface="Calibri"/>
+              </a:rPr>
+              <a:t>KANAL</a:t>
+            </a:r>
+          </a:p>
+        </p:txBody>
+      </p:sp>
+      <p:sp>
+        <p:nvSpPr>
+          <p:cNvPr id="8" name="TextBox 7"/>
+          <p:cNvSpPr txBox="1"/>
+          <p:nvPr/>
+        </p:nvSpPr>
+        <p:spPr>
+          <a:xfrm>
+            <a:off x="3291840" y="4572000"/>
+            <a:ext cx="8229600" cy="731520"/>
+          </a:xfrm>
+          <a:prstGeom prst="rect">
+            <a:avLst/>
+          </a:prstGeom>
+          <a:noFill/>
+        </p:spPr>
+        <p:txBody>
+          <a:bodyPr wrap="square" lIns="0" rIns="0" tIns="0" bIns="0" anchor="t">
+            <a:spAutoFit/>
+          </a:bodyPr>
+          <a:lstStyle/>
+          <a:p>
+            <a:pPr algn="l"/>
             <a:r>
               <a:rPr sz="3200" b="1">
                 <a:solidFill>
-                  <a:srgbClr val="1A1614"/>
-                </a:solidFill>
-                <a:latin typeface="Calibri"/>
-              </a:rPr>
-              <a:t>Rəqəm danışsın</a:t>
-            </a:r>
-          </a:p>
-        </p:txBody>
-      </p:sp>
-      <p:sp>
-        <p:nvSpPr>
-          <p:cNvPr id="4" name="Rectangle 3"/>
-          <p:cNvSpPr/>
-          <p:nvPr/>
-        </p:nvSpPr>
-        <p:spPr>
-          <a:xfrm>
-            <a:off x="640080" y="1280160"/>
-            <a:ext cx="109728" cy="914400"/>
-          </a:xfrm>
-          <a:prstGeom prst="rect">
-            <a:avLst/>
-          </a:prstGeom>
-          <a:solidFill>
-            <a:srgbClr val="9C2F2A"/>
-          </a:solidFill>
-          <a:ln>
-            <a:noFill/>
-          </a:ln>
-        </p:spPr>
-        <p:style>
-          <a:lnRef idx="1">
-            <a:schemeClr val="accent1"/>
-          </a:lnRef>
-          <a:fillRef idx="3">
-            <a:schemeClr val="accent1"/>
-          </a:fillRef>
-          <a:effectRef idx="2">
-            <a:schemeClr val="accent1"/>
-          </a:effectRef>
-          <a:fontRef idx="minor">
-            <a:schemeClr val="lt1"/>
-          </a:fontRef>
-        </p:style>
-        <p:txBody>
-          <a:bodyPr rtlCol="0" anchor="ctr"/>
-          <a:lstStyle/>
-          <a:p>
-            <a:pPr algn="ctr"/>
-          </a:p>
-        </p:txBody>
-      </p:sp>
-      <p:sp>
-        <p:nvSpPr>
-          <p:cNvPr id="5" name="TextBox 4"/>
-          <p:cNvSpPr txBox="1"/>
-          <p:nvPr/>
-        </p:nvSpPr>
-        <p:spPr>
-          <a:xfrm>
-            <a:off x="1005840" y="1280160"/>
-            <a:ext cx="3840480" cy="914400"/>
-          </a:xfrm>
-          <a:prstGeom prst="rect">
-            <a:avLst/>
-          </a:prstGeom>
-          <a:noFill/>
-        </p:spPr>
-        <p:txBody>
-          <a:bodyPr wrap="square" lIns="0" rIns="0" tIns="0" bIns="0" anchor="ctr"/>
-          <a:lstStyle/>
-          <a:p>
-            <a:pPr algn="l">
-              <a:spcAft>
-                <a:spcPts val="0"/>
-              </a:spcAft>
-            </a:pPr>
-            <a:r>
-              <a:rPr sz="3200" b="1">
-                <a:solidFill>
-                  <a:srgbClr val="1A1614"/>
-                </a:solidFill>
-                <a:latin typeface="Calibri"/>
-              </a:rPr>
-              <a:t>3925</a:t>
-            </a:r>
-          </a:p>
-        </p:txBody>
-      </p:sp>
-      <p:sp>
-        <p:nvSpPr>
-          <p:cNvPr id="6" name="TextBox 5"/>
-          <p:cNvSpPr txBox="1"/>
-          <p:nvPr/>
-        </p:nvSpPr>
-        <p:spPr>
-          <a:xfrm>
-            <a:off x="5029200" y="1280160"/>
-            <a:ext cx="6400800" cy="914400"/>
-          </a:xfrm>
-          <a:prstGeom prst="rect">
-            <a:avLst/>
-          </a:prstGeom>
-          <a:noFill/>
-        </p:spPr>
-        <p:txBody>
-          <a:bodyPr wrap="square" lIns="0" rIns="0" tIns="0" bIns="0" anchor="ctr"/>
-          <a:lstStyle/>
-          <a:p>
-            <a:pPr algn="l">
-              <a:spcAft>
-                <a:spcPts val="0"/>
-              </a:spcAft>
-            </a:pPr>
-            <a:r>
-              <a:rPr sz="2200" b="0">
-                <a:solidFill>
-                  <a:srgbClr val="6B625A"/>
-                </a:solidFill>
-                <a:latin typeface="Calibri"/>
-              </a:rPr>
-              <a:t>atalar sözü</a:t>
-            </a:r>
-          </a:p>
-        </p:txBody>
-      </p:sp>
-      <p:sp>
-        <p:nvSpPr>
-          <p:cNvPr id="7" name="Rectangle 6"/>
-          <p:cNvSpPr/>
-          <p:nvPr/>
-        </p:nvSpPr>
-        <p:spPr>
-          <a:xfrm>
-            <a:off x="640080" y="2468880"/>
-            <a:ext cx="109728" cy="914400"/>
-          </a:xfrm>
-          <a:prstGeom prst="rect">
-            <a:avLst/>
-          </a:prstGeom>
-          <a:solidFill>
-            <a:srgbClr val="9C2F2A"/>
-          </a:solidFill>
-          <a:ln>
-            <a:noFill/>
-          </a:ln>
-        </p:spPr>
-        <p:style>
-          <a:lnRef idx="1">
-            <a:schemeClr val="accent1"/>
-          </a:lnRef>
-          <a:fillRef idx="3">
-            <a:schemeClr val="accent1"/>
-          </a:fillRef>
-          <a:effectRef idx="2">
-            <a:schemeClr val="accent1"/>
-          </a:effectRef>
-          <a:fontRef idx="minor">
-            <a:schemeClr val="lt1"/>
-          </a:fontRef>
-        </p:style>
-        <p:txBody>
-          <a:bodyPr rtlCol="0" anchor="ctr"/>
-          <a:lstStyle/>
-          <a:p>
-            <a:pPr algn="ctr"/>
-          </a:p>
-        </p:txBody>
-      </p:sp>
-      <p:sp>
-        <p:nvSpPr>
-          <p:cNvPr id="8" name="TextBox 7"/>
-          <p:cNvSpPr txBox="1"/>
-          <p:nvPr/>
-        </p:nvSpPr>
-        <p:spPr>
-          <a:xfrm>
-            <a:off x="1005840" y="2468880"/>
-            <a:ext cx="3840480" cy="914400"/>
-          </a:xfrm>
-          <a:prstGeom prst="rect">
-            <a:avLst/>
-          </a:prstGeom>
-          <a:noFill/>
-        </p:spPr>
-        <p:txBody>
-          <a:bodyPr wrap="square" lIns="0" rIns="0" tIns="0" bIns="0" anchor="ctr"/>
-          <a:lstStyle/>
-          <a:p>
-            <a:pPr algn="l">
-              <a:spcAft>
-                <a:spcPts val="0"/>
-              </a:spcAft>
-            </a:pPr>
-            <a:r>
-              <a:rPr sz="3200" b="1">
-                <a:solidFill>
-                  <a:srgbClr val="1A1614"/>
-                </a:solidFill>
-                <a:latin typeface="Calibri"/>
-              </a:rPr>
-              <a:t>11</a:t>
+                  <a:srgbClr val="F6F1E7"/>
+                </a:solidFill>
+                <a:latin typeface="Calibri"/>
+              </a:rPr>
+              <a:t>@atalarimizinsozu</a:t>
             </a:r>
           </a:p>
         </p:txBody>
@@ -6827,298 +8605,25 @@
         </p:nvSpPr>
         <p:spPr>
           <a:xfrm>
-            <a:off x="5029200" y="2468880"/>
-            <a:ext cx="6400800" cy="914400"/>
-          </a:xfrm>
-          <a:prstGeom prst="rect">
-            <a:avLst/>
-          </a:prstGeom>
-          <a:noFill/>
-        </p:spPr>
-        <p:txBody>
-          <a:bodyPr wrap="square" lIns="0" rIns="0" tIns="0" bIns="0" anchor="ctr"/>
-          <a:lstStyle/>
-          <a:p>
-            <a:pPr algn="l">
-              <a:spcAft>
-                <a:spcPts val="0"/>
-              </a:spcAft>
-            </a:pPr>
-            <a:r>
-              <a:rPr sz="2200" b="0">
-                <a:solidFill>
-                  <a:srgbClr val="6B625A"/>
-                </a:solidFill>
-                <a:latin typeface="Calibri"/>
-              </a:rPr>
-              <a:t>mövzu</a:t>
-            </a:r>
-          </a:p>
-        </p:txBody>
-      </p:sp>
-      <p:sp>
-        <p:nvSpPr>
-          <p:cNvPr id="10" name="Rectangle 9"/>
-          <p:cNvSpPr/>
-          <p:nvPr/>
-        </p:nvSpPr>
-        <p:spPr>
-          <a:xfrm>
-            <a:off x="640080" y="3657600"/>
-            <a:ext cx="109728" cy="914400"/>
-          </a:xfrm>
-          <a:prstGeom prst="rect">
-            <a:avLst/>
-          </a:prstGeom>
-          <a:solidFill>
-            <a:srgbClr val="9C2F2A"/>
-          </a:solidFill>
-          <a:ln>
-            <a:noFill/>
-          </a:ln>
-        </p:spPr>
-        <p:style>
-          <a:lnRef idx="1">
-            <a:schemeClr val="accent1"/>
-          </a:lnRef>
-          <a:fillRef idx="3">
-            <a:schemeClr val="accent1"/>
-          </a:fillRef>
-          <a:effectRef idx="2">
-            <a:schemeClr val="accent1"/>
-          </a:effectRef>
-          <a:fontRef idx="minor">
-            <a:schemeClr val="lt1"/>
-          </a:fontRef>
-        </p:style>
-        <p:txBody>
-          <a:bodyPr rtlCol="0" anchor="ctr"/>
-          <a:lstStyle/>
-          <a:p>
-            <a:pPr algn="ctr"/>
-          </a:p>
-        </p:txBody>
-      </p:sp>
-      <p:sp>
-        <p:nvSpPr>
-          <p:cNvPr id="11" name="TextBox 10"/>
-          <p:cNvSpPr txBox="1"/>
-          <p:nvPr/>
-        </p:nvSpPr>
-        <p:spPr>
-          <a:xfrm>
-            <a:off x="1005840" y="3657600"/>
-            <a:ext cx="3840480" cy="914400"/>
-          </a:xfrm>
-          <a:prstGeom prst="rect">
-            <a:avLst/>
-          </a:prstGeom>
-          <a:noFill/>
-        </p:spPr>
-        <p:txBody>
-          <a:bodyPr wrap="square" lIns="0" rIns="0" tIns="0" bIns="0" anchor="ctr"/>
-          <a:lstStyle/>
-          <a:p>
-            <a:pPr algn="l">
-              <a:spcAft>
-                <a:spcPts val="0"/>
-              </a:spcAft>
-            </a:pPr>
-            <a:r>
-              <a:rPr sz="3200" b="1">
-                <a:solidFill>
-                  <a:srgbClr val="1A1614"/>
-                </a:solidFill>
-                <a:latin typeface="Calibri"/>
-              </a:rPr>
-              <a:t>09:00</a:t>
-            </a:r>
-          </a:p>
-        </p:txBody>
-      </p:sp>
-      <p:sp>
-        <p:nvSpPr>
-          <p:cNvPr id="12" name="TextBox 11"/>
-          <p:cNvSpPr txBox="1"/>
-          <p:nvPr/>
-        </p:nvSpPr>
-        <p:spPr>
-          <a:xfrm>
-            <a:off x="5029200" y="3657600"/>
-            <a:ext cx="6400800" cy="914400"/>
-          </a:xfrm>
-          <a:prstGeom prst="rect">
-            <a:avLst/>
-          </a:prstGeom>
-          <a:noFill/>
-        </p:spPr>
-        <p:txBody>
-          <a:bodyPr wrap="square" lIns="0" rIns="0" tIns="0" bIns="0" anchor="ctr"/>
-          <a:lstStyle/>
-          <a:p>
-            <a:pPr algn="l">
-              <a:spcAft>
-                <a:spcPts val="0"/>
-              </a:spcAft>
-            </a:pPr>
-            <a:r>
-              <a:rPr sz="2200" b="0">
-                <a:solidFill>
-                  <a:srgbClr val="6B625A"/>
-                </a:solidFill>
-                <a:latin typeface="Calibri"/>
-              </a:rPr>
-              <a:t>hər səhər, Bakı vaxtı</a:t>
-            </a:r>
-          </a:p>
-        </p:txBody>
-      </p:sp>
-      <p:sp>
-        <p:nvSpPr>
-          <p:cNvPr id="13" name="Rectangle 12"/>
-          <p:cNvSpPr/>
-          <p:nvPr/>
-        </p:nvSpPr>
-        <p:spPr>
-          <a:xfrm>
-            <a:off x="640080" y="4846320"/>
-            <a:ext cx="109728" cy="914400"/>
-          </a:xfrm>
-          <a:prstGeom prst="rect">
-            <a:avLst/>
-          </a:prstGeom>
-          <a:solidFill>
-            <a:srgbClr val="9C2F2A"/>
-          </a:solidFill>
-          <a:ln>
-            <a:noFill/>
-          </a:ln>
-        </p:spPr>
-        <p:style>
-          <a:lnRef idx="1">
-            <a:schemeClr val="accent1"/>
-          </a:lnRef>
-          <a:fillRef idx="3">
-            <a:schemeClr val="accent1"/>
-          </a:fillRef>
-          <a:effectRef idx="2">
-            <a:schemeClr val="accent1"/>
-          </a:effectRef>
-          <a:fontRef idx="minor">
-            <a:schemeClr val="lt1"/>
-          </a:fontRef>
-        </p:style>
-        <p:txBody>
-          <a:bodyPr rtlCol="0" anchor="ctr"/>
-          <a:lstStyle/>
-          <a:p>
-            <a:pPr algn="ctr"/>
-          </a:p>
-        </p:txBody>
-      </p:sp>
-      <p:sp>
-        <p:nvSpPr>
-          <p:cNvPr id="14" name="TextBox 13"/>
-          <p:cNvSpPr txBox="1"/>
-          <p:nvPr/>
-        </p:nvSpPr>
-        <p:spPr>
-          <a:xfrm>
-            <a:off x="1005840" y="4846320"/>
-            <a:ext cx="3840480" cy="914400"/>
-          </a:xfrm>
-          <a:prstGeom prst="rect">
-            <a:avLst/>
-          </a:prstGeom>
-          <a:noFill/>
-        </p:spPr>
-        <p:txBody>
-          <a:bodyPr wrap="square" lIns="0" rIns="0" tIns="0" bIns="0" anchor="ctr"/>
-          <a:lstStyle/>
-          <a:p>
-            <a:pPr algn="l">
-              <a:spcAft>
-                <a:spcPts val="0"/>
-              </a:spcAft>
-            </a:pPr>
-            <a:r>
-              <a:rPr sz="3200" b="1">
-                <a:solidFill>
-                  <a:srgbClr val="1A1614"/>
-                </a:solidFill>
-                <a:latin typeface="Calibri"/>
-              </a:rPr>
-              <a:t>24 saat</a:t>
-            </a:r>
-          </a:p>
-        </p:txBody>
-      </p:sp>
-      <p:sp>
-        <p:nvSpPr>
-          <p:cNvPr id="15" name="TextBox 14"/>
-          <p:cNvSpPr txBox="1"/>
-          <p:nvPr/>
-        </p:nvSpPr>
-        <p:spPr>
-          <a:xfrm>
-            <a:off x="5029200" y="4846320"/>
-            <a:ext cx="6400800" cy="914400"/>
-          </a:xfrm>
-          <a:prstGeom prst="rect">
-            <a:avLst/>
-          </a:prstGeom>
-          <a:noFill/>
-        </p:spPr>
-        <p:txBody>
-          <a:bodyPr wrap="square" lIns="0" rIns="0" tIns="0" bIns="0" anchor="ctr"/>
-          <a:lstStyle/>
-          <a:p>
-            <a:pPr algn="l">
-              <a:spcAft>
-                <a:spcPts val="0"/>
-              </a:spcAft>
-            </a:pPr>
-            <a:r>
-              <a:rPr sz="2200" b="0">
-                <a:solidFill>
-                  <a:srgbClr val="6B625A"/>
-                </a:solidFill>
-                <a:latin typeface="Calibri"/>
-              </a:rPr>
-              <a:t>terminal bağlı olsa da</a:t>
-            </a:r>
-          </a:p>
-        </p:txBody>
-      </p:sp>
-      <p:sp>
-        <p:nvSpPr>
-          <p:cNvPr id="16" name="TextBox 15"/>
-          <p:cNvSpPr txBox="1"/>
-          <p:nvPr/>
-        </p:nvSpPr>
-        <p:spPr>
-          <a:xfrm>
-            <a:off x="548640" y="6446520"/>
-            <a:ext cx="7315200" cy="274320"/>
-          </a:xfrm>
-          <a:prstGeom prst="rect">
-            <a:avLst/>
-          </a:prstGeom>
-          <a:noFill/>
-        </p:spPr>
-        <p:txBody>
-          <a:bodyPr wrap="square" lIns="0" rIns="0" tIns="0" bIns="0" anchor="t"/>
-          <a:lstStyle/>
-          <a:p>
-            <a:pPr algn="l">
-              <a:spcAft>
-                <a:spcPts val="0"/>
-              </a:spcAft>
-            </a:pPr>
-            <a:r>
-              <a:rPr sz="1100" b="0">
-                <a:solidFill>
-                  <a:srgbClr val="6B625A"/>
+            <a:off x="502920" y="6473952"/>
+            <a:ext cx="7315200" cy="256032"/>
+          </a:xfrm>
+          <a:prstGeom prst="rect">
+            <a:avLst/>
+          </a:prstGeom>
+          <a:noFill/>
+        </p:spPr>
+        <p:txBody>
+          <a:bodyPr wrap="square" lIns="0" rIns="0" tIns="0" bIns="0" anchor="t">
+            <a:spAutoFit/>
+          </a:bodyPr>
+          <a:lstStyle/>
+          <a:p>
+            <a:pPr algn="l"/>
+            <a:r>
+              <a:rPr sz="1200" b="0">
+                <a:solidFill>
+                  <a:srgbClr val="C8BEB0"/>
                 </a:solidFill>
                 <a:latin typeface="Calibri"/>
               </a:rPr>
@@ -7129,33 +8634,31 @@
       </p:sp>
       <p:sp>
         <p:nvSpPr>
-          <p:cNvPr id="17" name="TextBox 16"/>
-          <p:cNvSpPr txBox="1"/>
-          <p:nvPr/>
-        </p:nvSpPr>
-        <p:spPr>
-          <a:xfrm>
-            <a:off x="10424160" y="6446520"/>
-            <a:ext cx="1280160" cy="274320"/>
-          </a:xfrm>
-          <a:prstGeom prst="rect">
-            <a:avLst/>
-          </a:prstGeom>
-          <a:noFill/>
-        </p:spPr>
-        <p:txBody>
-          <a:bodyPr wrap="square" lIns="0" rIns="0" tIns="0" bIns="0" anchor="t"/>
-          <a:lstStyle/>
-          <a:p>
-            <a:pPr algn="r">
-              <a:spcAft>
-                <a:spcPts val="0"/>
-              </a:spcAft>
-            </a:pPr>
-            <a:r>
-              <a:rPr sz="1100" b="0">
-                <a:solidFill>
-                  <a:srgbClr val="6B625A"/>
+          <p:cNvPr id="10" name="TextBox 9"/>
+          <p:cNvSpPr txBox="1"/>
+          <p:nvPr/>
+        </p:nvSpPr>
+        <p:spPr>
+          <a:xfrm>
+            <a:off x="10241280" y="6473952"/>
+            <a:ext cx="1463040" cy="256032"/>
+          </a:xfrm>
+          <a:prstGeom prst="rect">
+            <a:avLst/>
+          </a:prstGeom>
+          <a:noFill/>
+        </p:spPr>
+        <p:txBody>
+          <a:bodyPr wrap="square" lIns="0" rIns="0" tIns="0" bIns="0" anchor="t">
+            <a:spAutoFit/>
+          </a:bodyPr>
+          <a:lstStyle/>
+          <a:p>
+            <a:pPr algn="r"/>
+            <a:r>
+              <a:rPr sz="1200" b="0">
+                <a:solidFill>
+                  <a:srgbClr val="C8BEB0"/>
                 </a:solidFill>
                 <a:latin typeface="Calibri"/>
               </a:rPr>
@@ -7197,7 +8700,7 @@
             <a:avLst/>
           </a:prstGeom>
           <a:solidFill>
-            <a:srgbClr val="1A1614"/>
+            <a:srgbClr val="F6F1E7"/>
           </a:solidFill>
           <a:ln>
             <a:noFill/>
@@ -7233,72 +8736,57 @@
         </p:nvSpPr>
         <p:spPr>
           <a:xfrm>
-            <a:off x="731520" y="1463040"/>
-            <a:ext cx="10058400" cy="365760"/>
-          </a:xfrm>
-          <a:prstGeom prst="rect">
-            <a:avLst/>
-          </a:prstGeom>
-          <a:noFill/>
-        </p:spPr>
-        <p:txBody>
-          <a:bodyPr wrap="square" lIns="0" rIns="0" tIns="0" bIns="0" anchor="t"/>
-          <a:lstStyle/>
-          <a:p>
-            <a:pPr algn="l">
-              <a:spcAft>
-                <a:spcPts val="0"/>
-              </a:spcAft>
-            </a:pPr>
-            <a:r>
-              <a:rPr sz="1400" b="1">
-                <a:solidFill>
-                  <a:srgbClr val="A6843E"/>
-                </a:solidFill>
-                <a:latin typeface="Calibri"/>
-              </a:rPr>
-              <a:t>KANAL</a:t>
-            </a:r>
-          </a:p>
-        </p:txBody>
-      </p:sp>
-      <p:sp>
-        <p:nvSpPr>
-          <p:cNvPr id="4" name="TextBox 3"/>
-          <p:cNvSpPr txBox="1"/>
-          <p:nvPr/>
-        </p:nvSpPr>
-        <p:spPr>
-          <a:xfrm>
-            <a:off x="731520" y="1965960"/>
-            <a:ext cx="10515600" cy="1280160"/>
-          </a:xfrm>
-          <a:prstGeom prst="rect">
-            <a:avLst/>
-          </a:prstGeom>
-          <a:noFill/>
-        </p:spPr>
-        <p:txBody>
-          <a:bodyPr wrap="square" lIns="0" rIns="0" tIns="0" bIns="0" anchor="t"/>
-          <a:lstStyle/>
-          <a:p>
-            <a:pPr algn="l">
-              <a:spcAft>
-                <a:spcPts val="0"/>
-              </a:spcAft>
-            </a:pPr>
-            <a:r>
-              <a:rPr sz="4000" b="1">
-                <a:solidFill>
-                  <a:srgbClr val="F6F1E7"/>
-                </a:solidFill>
-                <a:latin typeface="Calibri"/>
-              </a:rPr>
-              <a:t>@atalarimizinsozu</a:t>
-            </a:r>
-          </a:p>
-        </p:txBody>
-      </p:sp>
+            <a:off x="548640" y="365760"/>
+            <a:ext cx="10972800" cy="548640"/>
+          </a:xfrm>
+          <a:prstGeom prst="rect">
+            <a:avLst/>
+          </a:prstGeom>
+          <a:noFill/>
+        </p:spPr>
+        <p:txBody>
+          <a:bodyPr wrap="square" lIns="0" rIns="0" tIns="0" bIns="0" anchor="t">
+            <a:spAutoFit/>
+          </a:bodyPr>
+          <a:lstStyle/>
+          <a:p>
+            <a:pPr algn="l"/>
+            <a:r>
+              <a:rPr sz="3200" b="1">
+                <a:solidFill>
+                  <a:srgbClr val="1A1614"/>
+                </a:solidFill>
+                <a:latin typeface="Calibri"/>
+              </a:rPr>
+              <a:t>Rəqəm</a:t>
+            </a:r>
+          </a:p>
+        </p:txBody>
+      </p:sp>
+      <p:pic>
+        <p:nvPicPr>
+          <p:cNvPr id="4" name="Picture 3" descr="0134bad9-a8a1-49cf-b15c-d4b708457aa5.jpg"/>
+          <p:cNvPicPr>
+            <a:picLocks noChangeAspect="1"/>
+          </p:cNvPicPr>
+          <p:nvPr/>
+        </p:nvPicPr>
+        <p:blipFill>
+          <a:blip r:embed="rId2"/>
+          <a:stretch>
+            <a:fillRect/>
+          </a:stretch>
+        </p:blipFill>
+        <p:spPr>
+          <a:xfrm>
+            <a:off x="502920" y="1143000"/>
+            <a:ext cx="960120" cy="960120"/>
+          </a:xfrm>
+          <a:prstGeom prst="rect">
+            <a:avLst/>
+          </a:prstGeom>
+        </p:spPr>
+      </p:pic>
       <p:sp>
         <p:nvSpPr>
           <p:cNvPr id="5" name="TextBox 4"/>
@@ -7307,66 +8795,377 @@
         </p:nvSpPr>
         <p:spPr>
           <a:xfrm>
-            <a:off x="731520" y="3566160"/>
-            <a:ext cx="9144000" cy="1463040"/>
-          </a:xfrm>
-          <a:prstGeom prst="rect">
-            <a:avLst/>
-          </a:prstGeom>
-          <a:noFill/>
-        </p:spPr>
-        <p:txBody>
-          <a:bodyPr wrap="square" lIns="0" rIns="0" tIns="0" bIns="0" anchor="t"/>
-          <a:lstStyle/>
-          <a:p>
-            <a:pPr algn="l">
-              <a:spcAft>
-                <a:spcPts val="0"/>
-              </a:spcAft>
-            </a:pPr>
+            <a:off x="1737360" y="1143000"/>
+            <a:ext cx="3840480" cy="960120"/>
+          </a:xfrm>
+          <a:prstGeom prst="rect">
+            <a:avLst/>
+          </a:prstGeom>
+          <a:noFill/>
+        </p:spPr>
+        <p:txBody>
+          <a:bodyPr wrap="square" lIns="0" rIns="0" tIns="0" bIns="0" anchor="ctr">
+            <a:spAutoFit/>
+          </a:bodyPr>
+          <a:lstStyle/>
+          <a:p>
+            <a:pPr algn="l"/>
+            <a:r>
+              <a:rPr sz="3200" b="1">
+                <a:solidFill>
+                  <a:srgbClr val="1A1614"/>
+                </a:solidFill>
+                <a:latin typeface="Calibri"/>
+              </a:rPr>
+              <a:t>3913</a:t>
+            </a:r>
+          </a:p>
+        </p:txBody>
+      </p:sp>
+      <p:sp>
+        <p:nvSpPr>
+          <p:cNvPr id="6" name="TextBox 5"/>
+          <p:cNvSpPr txBox="1"/>
+          <p:nvPr/>
+        </p:nvSpPr>
+        <p:spPr>
+          <a:xfrm>
+            <a:off x="5760720" y="1143000"/>
+            <a:ext cx="5486400" cy="960120"/>
+          </a:xfrm>
+          <a:prstGeom prst="rect">
+            <a:avLst/>
+          </a:prstGeom>
+          <a:noFill/>
+        </p:spPr>
+        <p:txBody>
+          <a:bodyPr wrap="square" lIns="0" rIns="0" tIns="0" bIns="0" anchor="ctr">
+            <a:spAutoFit/>
+          </a:bodyPr>
+          <a:lstStyle/>
+          <a:p>
+            <a:pPr algn="l"/>
             <a:r>
               <a:rPr sz="2200" b="0">
                 <a:solidFill>
-                  <a:srgbClr val="E6DDD0"/>
-                </a:solidFill>
-                <a:latin typeface="Calibri"/>
-              </a:rPr>
-              <a:t>Hər səhər bir söz.
-Eyni söz həmin gün botda da açılır.
-Oxucu kanaldan bota keçir.</a:t>
-            </a:r>
-          </a:p>
-        </p:txBody>
-      </p:sp>
-      <p:sp>
-        <p:nvSpPr>
-          <p:cNvPr id="6" name="TextBox 5"/>
-          <p:cNvSpPr txBox="1"/>
-          <p:nvPr/>
-        </p:nvSpPr>
-        <p:spPr>
-          <a:xfrm>
-            <a:off x="548640" y="6446520"/>
-            <a:ext cx="7315200" cy="274320"/>
-          </a:xfrm>
-          <a:prstGeom prst="rect">
-            <a:avLst/>
-          </a:prstGeom>
-          <a:noFill/>
-        </p:spPr>
-        <p:txBody>
-          <a:bodyPr wrap="square" lIns="0" rIns="0" tIns="0" bIns="0" anchor="t"/>
-          <a:lstStyle/>
-          <a:p>
-            <a:pPr algn="l">
-              <a:spcAft>
-                <a:spcPts val="0"/>
-              </a:spcAft>
-            </a:pPr>
-            <a:r>
-              <a:rPr sz="1100" b="0">
-                <a:solidFill>
-                  <a:srgbClr val="C8BEB0"/>
+                  <a:srgbClr val="6B625A"/>
+                </a:solidFill>
+                <a:latin typeface="Calibri"/>
+              </a:rPr>
+              <a:t>atalar sözü</a:t>
+            </a:r>
+          </a:p>
+        </p:txBody>
+      </p:sp>
+      <p:pic>
+        <p:nvPicPr>
+          <p:cNvPr id="7" name="Picture 6" descr="0134bad9-a8a1-49cf-b15c-d4b708457aa5.jpg"/>
+          <p:cNvPicPr>
+            <a:picLocks noChangeAspect="1"/>
+          </p:cNvPicPr>
+          <p:nvPr/>
+        </p:nvPicPr>
+        <p:blipFill>
+          <a:blip r:embed="rId2"/>
+          <a:stretch>
+            <a:fillRect/>
+          </a:stretch>
+        </p:blipFill>
+        <p:spPr>
+          <a:xfrm>
+            <a:off x="502920" y="2313432"/>
+            <a:ext cx="960120" cy="960120"/>
+          </a:xfrm>
+          <a:prstGeom prst="rect">
+            <a:avLst/>
+          </a:prstGeom>
+        </p:spPr>
+      </p:pic>
+      <p:sp>
+        <p:nvSpPr>
+          <p:cNvPr id="8" name="TextBox 7"/>
+          <p:cNvSpPr txBox="1"/>
+          <p:nvPr/>
+        </p:nvSpPr>
+        <p:spPr>
+          <a:xfrm>
+            <a:off x="1737360" y="2313432"/>
+            <a:ext cx="3840480" cy="960120"/>
+          </a:xfrm>
+          <a:prstGeom prst="rect">
+            <a:avLst/>
+          </a:prstGeom>
+          <a:noFill/>
+        </p:spPr>
+        <p:txBody>
+          <a:bodyPr wrap="square" lIns="0" rIns="0" tIns="0" bIns="0" anchor="ctr">
+            <a:spAutoFit/>
+          </a:bodyPr>
+          <a:lstStyle/>
+          <a:p>
+            <a:pPr algn="l"/>
+            <a:r>
+              <a:rPr sz="3200" b="1">
+                <a:solidFill>
+                  <a:srgbClr val="1A1614"/>
+                </a:solidFill>
+                <a:latin typeface="Calibri"/>
+              </a:rPr>
+              <a:t>12</a:t>
+            </a:r>
+          </a:p>
+        </p:txBody>
+      </p:sp>
+      <p:sp>
+        <p:nvSpPr>
+          <p:cNvPr id="9" name="TextBox 8"/>
+          <p:cNvSpPr txBox="1"/>
+          <p:nvPr/>
+        </p:nvSpPr>
+        <p:spPr>
+          <a:xfrm>
+            <a:off x="5760720" y="2313432"/>
+            <a:ext cx="5486400" cy="960120"/>
+          </a:xfrm>
+          <a:prstGeom prst="rect">
+            <a:avLst/>
+          </a:prstGeom>
+          <a:noFill/>
+        </p:spPr>
+        <p:txBody>
+          <a:bodyPr wrap="square" lIns="0" rIns="0" tIns="0" bIns="0" anchor="ctr">
+            <a:spAutoFit/>
+          </a:bodyPr>
+          <a:lstStyle/>
+          <a:p>
+            <a:pPr algn="l"/>
+            <a:r>
+              <a:rPr sz="2200" b="0">
+                <a:solidFill>
+                  <a:srgbClr val="6B625A"/>
+                </a:solidFill>
+                <a:latin typeface="Calibri"/>
+              </a:rPr>
+              <a:t>mövzu</a:t>
+            </a:r>
+          </a:p>
+        </p:txBody>
+      </p:sp>
+      <p:pic>
+        <p:nvPicPr>
+          <p:cNvPr id="10" name="Picture 9" descr="73a6727f-2046-49b5-ad32-3667d7a0e571.jpg"/>
+          <p:cNvPicPr>
+            <a:picLocks noChangeAspect="1"/>
+          </p:cNvPicPr>
+          <p:nvPr/>
+        </p:nvPicPr>
+        <p:blipFill>
+          <a:blip r:embed="rId3"/>
+          <a:stretch>
+            <a:fillRect/>
+          </a:stretch>
+        </p:blipFill>
+        <p:spPr>
+          <a:xfrm>
+            <a:off x="502920" y="3483864"/>
+            <a:ext cx="960120" cy="960120"/>
+          </a:xfrm>
+          <a:prstGeom prst="rect">
+            <a:avLst/>
+          </a:prstGeom>
+        </p:spPr>
+      </p:pic>
+      <p:sp>
+        <p:nvSpPr>
+          <p:cNvPr id="11" name="TextBox 10"/>
+          <p:cNvSpPr txBox="1"/>
+          <p:nvPr/>
+        </p:nvSpPr>
+        <p:spPr>
+          <a:xfrm>
+            <a:off x="1737360" y="3483864"/>
+            <a:ext cx="3840480" cy="960120"/>
+          </a:xfrm>
+          <a:prstGeom prst="rect">
+            <a:avLst/>
+          </a:prstGeom>
+          <a:noFill/>
+        </p:spPr>
+        <p:txBody>
+          <a:bodyPr wrap="square" lIns="0" rIns="0" tIns="0" bIns="0" anchor="ctr">
+            <a:spAutoFit/>
+          </a:bodyPr>
+          <a:lstStyle/>
+          <a:p>
+            <a:pPr algn="l"/>
+            <a:r>
+              <a:rPr sz="3200" b="1">
+                <a:solidFill>
+                  <a:srgbClr val="1A1614"/>
+                </a:solidFill>
+                <a:latin typeface="Calibri"/>
+              </a:rPr>
+              <a:t>09:00</a:t>
+            </a:r>
+          </a:p>
+        </p:txBody>
+      </p:sp>
+      <p:sp>
+        <p:nvSpPr>
+          <p:cNvPr id="12" name="TextBox 11"/>
+          <p:cNvSpPr txBox="1"/>
+          <p:nvPr/>
+        </p:nvSpPr>
+        <p:spPr>
+          <a:xfrm>
+            <a:off x="5760720" y="3483864"/>
+            <a:ext cx="5486400" cy="960120"/>
+          </a:xfrm>
+          <a:prstGeom prst="rect">
+            <a:avLst/>
+          </a:prstGeom>
+          <a:noFill/>
+        </p:spPr>
+        <p:txBody>
+          <a:bodyPr wrap="square" lIns="0" rIns="0" tIns="0" bIns="0" anchor="ctr">
+            <a:spAutoFit/>
+          </a:bodyPr>
+          <a:lstStyle/>
+          <a:p>
+            <a:pPr algn="l"/>
+            <a:r>
+              <a:rPr sz="2200" b="0">
+                <a:solidFill>
+                  <a:srgbClr val="6B625A"/>
+                </a:solidFill>
+                <a:latin typeface="Calibri"/>
+              </a:rPr>
+              <a:t>hər səhər, Bakı vaxtı</a:t>
+            </a:r>
+          </a:p>
+        </p:txBody>
+      </p:sp>
+      <p:pic>
+        <p:nvPicPr>
+          <p:cNvPr id="13" name="Picture 12" descr="cfb04321-8dfe-4d19-bad4-9bcf2067f00c.jpg"/>
+          <p:cNvPicPr>
+            <a:picLocks noChangeAspect="1"/>
+          </p:cNvPicPr>
+          <p:nvPr/>
+        </p:nvPicPr>
+        <p:blipFill>
+          <a:blip r:embed="rId4"/>
+          <a:stretch>
+            <a:fillRect/>
+          </a:stretch>
+        </p:blipFill>
+        <p:spPr>
+          <a:xfrm>
+            <a:off x="502920" y="4654296"/>
+            <a:ext cx="960120" cy="960120"/>
+          </a:xfrm>
+          <a:prstGeom prst="rect">
+            <a:avLst/>
+          </a:prstGeom>
+        </p:spPr>
+      </p:pic>
+      <p:sp>
+        <p:nvSpPr>
+          <p:cNvPr id="14" name="TextBox 13"/>
+          <p:cNvSpPr txBox="1"/>
+          <p:nvPr/>
+        </p:nvSpPr>
+        <p:spPr>
+          <a:xfrm>
+            <a:off x="1737360" y="4654296"/>
+            <a:ext cx="3840480" cy="960120"/>
+          </a:xfrm>
+          <a:prstGeom prst="rect">
+            <a:avLst/>
+          </a:prstGeom>
+          <a:noFill/>
+        </p:spPr>
+        <p:txBody>
+          <a:bodyPr wrap="square" lIns="0" rIns="0" tIns="0" bIns="0" anchor="ctr">
+            <a:spAutoFit/>
+          </a:bodyPr>
+          <a:lstStyle/>
+          <a:p>
+            <a:pPr algn="l"/>
+            <a:r>
+              <a:rPr sz="3200" b="1">
+                <a:solidFill>
+                  <a:srgbClr val="1A1614"/>
+                </a:solidFill>
+                <a:latin typeface="Calibri"/>
+              </a:rPr>
+              <a:t>24 saat</a:t>
+            </a:r>
+          </a:p>
+        </p:txBody>
+      </p:sp>
+      <p:sp>
+        <p:nvSpPr>
+          <p:cNvPr id="15" name="TextBox 14"/>
+          <p:cNvSpPr txBox="1"/>
+          <p:nvPr/>
+        </p:nvSpPr>
+        <p:spPr>
+          <a:xfrm>
+            <a:off x="5760720" y="4654296"/>
+            <a:ext cx="5486400" cy="960120"/>
+          </a:xfrm>
+          <a:prstGeom prst="rect">
+            <a:avLst/>
+          </a:prstGeom>
+          <a:noFill/>
+        </p:spPr>
+        <p:txBody>
+          <a:bodyPr wrap="square" lIns="0" rIns="0" tIns="0" bIns="0" anchor="ctr">
+            <a:spAutoFit/>
+          </a:bodyPr>
+          <a:lstStyle/>
+          <a:p>
+            <a:pPr algn="l"/>
+            <a:r>
+              <a:rPr sz="2200" b="0">
+                <a:solidFill>
+                  <a:srgbClr val="6B625A"/>
+                </a:solidFill>
+                <a:latin typeface="Calibri"/>
+              </a:rPr>
+              <a:t>özü işləyir</a:t>
+            </a:r>
+          </a:p>
+        </p:txBody>
+      </p:sp>
+      <p:sp>
+        <p:nvSpPr>
+          <p:cNvPr id="16" name="TextBox 15"/>
+          <p:cNvSpPr txBox="1"/>
+          <p:nvPr/>
+        </p:nvSpPr>
+        <p:spPr>
+          <a:xfrm>
+            <a:off x="502920" y="6473952"/>
+            <a:ext cx="7315200" cy="256032"/>
+          </a:xfrm>
+          <a:prstGeom prst="rect">
+            <a:avLst/>
+          </a:prstGeom>
+          <a:noFill/>
+        </p:spPr>
+        <p:txBody>
+          <a:bodyPr wrap="square" lIns="0" rIns="0" tIns="0" bIns="0" anchor="t">
+            <a:spAutoFit/>
+          </a:bodyPr>
+          <a:lstStyle/>
+          <a:p>
+            <a:pPr algn="l"/>
+            <a:r>
+              <a:rPr sz="1200" b="0">
+                <a:solidFill>
+                  <a:srgbClr val="6B625A"/>
                 </a:solidFill>
                 <a:latin typeface="Calibri"/>
               </a:rPr>
@@ -7377,33 +9176,31 @@
       </p:sp>
       <p:sp>
         <p:nvSpPr>
-          <p:cNvPr id="7" name="TextBox 6"/>
-          <p:cNvSpPr txBox="1"/>
-          <p:nvPr/>
-        </p:nvSpPr>
-        <p:spPr>
-          <a:xfrm>
-            <a:off x="10424160" y="6446520"/>
-            <a:ext cx="1280160" cy="274320"/>
-          </a:xfrm>
-          <a:prstGeom prst="rect">
-            <a:avLst/>
-          </a:prstGeom>
-          <a:noFill/>
-        </p:spPr>
-        <p:txBody>
-          <a:bodyPr wrap="square" lIns="0" rIns="0" tIns="0" bIns="0" anchor="t"/>
-          <a:lstStyle/>
-          <a:p>
-            <a:pPr algn="r">
-              <a:spcAft>
-                <a:spcPts val="0"/>
-              </a:spcAft>
-            </a:pPr>
-            <a:r>
-              <a:rPr sz="1100" b="0">
-                <a:solidFill>
-                  <a:srgbClr val="C8BEB0"/>
+          <p:cNvPr id="17" name="TextBox 16"/>
+          <p:cNvSpPr txBox="1"/>
+          <p:nvPr/>
+        </p:nvSpPr>
+        <p:spPr>
+          <a:xfrm>
+            <a:off x="10241280" y="6473952"/>
+            <a:ext cx="1463040" cy="256032"/>
+          </a:xfrm>
+          <a:prstGeom prst="rect">
+            <a:avLst/>
+          </a:prstGeom>
+          <a:noFill/>
+        </p:spPr>
+        <p:txBody>
+          <a:bodyPr wrap="square" lIns="0" rIns="0" tIns="0" bIns="0" anchor="t">
+            <a:spAutoFit/>
+          </a:bodyPr>
+          <a:lstStyle/>
+          <a:p>
+            <a:pPr algn="r"/>
+            <a:r>
+              <a:rPr sz="1200" b="0">
+                <a:solidFill>
+                  <a:srgbClr val="6B625A"/>
                 </a:solidFill>
                 <a:latin typeface="Calibri"/>
               </a:rPr>
@@ -7445,7 +9242,7 @@
             <a:avLst/>
           </a:prstGeom>
           <a:solidFill>
-            <a:srgbClr val="F6F1E7"/>
+            <a:srgbClr val="FBF7F1"/>
           </a:solidFill>
           <a:ln>
             <a:noFill/>
@@ -7481,23 +9278,21 @@
         </p:nvSpPr>
         <p:spPr>
           <a:xfrm>
-            <a:off x="640080" y="411480"/>
-            <a:ext cx="10972800" cy="640080"/>
-          </a:xfrm>
-          <a:prstGeom prst="rect">
-            <a:avLst/>
-          </a:prstGeom>
-          <a:noFill/>
-        </p:spPr>
-        <p:txBody>
-          <a:bodyPr wrap="square" lIns="0" rIns="0" tIns="0" bIns="0" anchor="t"/>
-          <a:lstStyle/>
-          <a:p>
-            <a:pPr algn="l">
-              <a:spcAft>
-                <a:spcPts val="0"/>
-              </a:spcAft>
-            </a:pPr>
+            <a:off x="548640" y="411480"/>
+            <a:ext cx="10972800" cy="548640"/>
+          </a:xfrm>
+          <a:prstGeom prst="rect">
+            <a:avLst/>
+          </a:prstGeom>
+          <a:noFill/>
+        </p:spPr>
+        <p:txBody>
+          <a:bodyPr wrap="square" lIns="0" rIns="0" tIns="0" bIns="0" anchor="t">
+            <a:spAutoFit/>
+          </a:bodyPr>
+          <a:lstStyle/>
+          <a:p>
+            <a:pPr algn="l"/>
             <a:r>
               <a:rPr sz="3200" b="1">
                 <a:solidFill>
@@ -7505,7 +9300,7 @@
                 </a:solidFill>
                 <a:latin typeface="Calibri"/>
               </a:rPr>
-              <a:t>Hələ bitməyən iki iş</a:t>
+              <a:t>Kim açır</a:t>
             </a:r>
           </a:p>
         </p:txBody>
@@ -7518,8 +9313,8 @@
         </p:nvSpPr>
         <p:spPr>
           <a:xfrm>
-            <a:off x="640080" y="1463040"/>
-            <a:ext cx="5303520" cy="4297680"/>
+            <a:off x="502920" y="1371600"/>
+            <a:ext cx="3611880" cy="4617720"/>
           </a:xfrm>
           <a:prstGeom prst="rect">
             <a:avLst/>
@@ -7553,16 +9348,111 @@
           </a:p>
         </p:txBody>
       </p:sp>
-      <p:sp>
-        <p:nvSpPr>
-          <p:cNvPr id="5" name="Rectangle 4"/>
+      <p:pic>
+        <p:nvPicPr>
+          <p:cNvPr id="5" name="Picture 4" descr="57945385-1176-4eae-9997-3e0e2a2f3687.jpg"/>
+          <p:cNvPicPr>
+            <a:picLocks noChangeAspect="1"/>
+          </p:cNvPicPr>
+          <p:nvPr/>
+        </p:nvPicPr>
+        <p:blipFill>
+          <a:blip r:embed="rId2"/>
+          <a:stretch>
+            <a:fillRect/>
+          </a:stretch>
+        </p:blipFill>
+        <p:spPr>
+          <a:xfrm>
+            <a:off x="1371600" y="1645920"/>
+            <a:ext cx="1874519" cy="1874519"/>
+          </a:xfrm>
+          <a:prstGeom prst="rect">
+            <a:avLst/>
+          </a:prstGeom>
+        </p:spPr>
+      </p:pic>
+      <p:sp>
+        <p:nvSpPr>
+          <p:cNvPr id="6" name="TextBox 5"/>
+          <p:cNvSpPr txBox="1"/>
+          <p:nvPr/>
+        </p:nvSpPr>
+        <p:spPr>
+          <a:xfrm>
+            <a:off x="777240" y="3703320"/>
+            <a:ext cx="3063240" cy="457200"/>
+          </a:xfrm>
+          <a:prstGeom prst="rect">
+            <a:avLst/>
+          </a:prstGeom>
+          <a:noFill/>
+        </p:spPr>
+        <p:txBody>
+          <a:bodyPr wrap="square" lIns="0" rIns="0" tIns="0" bIns="0" anchor="t">
+            <a:spAutoFit/>
+          </a:bodyPr>
+          <a:lstStyle/>
+          <a:p>
+            <a:pPr algn="l"/>
+            <a:r>
+              <a:rPr sz="2200" b="1">
+                <a:solidFill>
+                  <a:srgbClr val="9C2F2A"/>
+                </a:solidFill>
+                <a:latin typeface="Calibri"/>
+              </a:rPr>
+              <a:t>Şagird</a:t>
+            </a:r>
+          </a:p>
+        </p:txBody>
+      </p:sp>
+      <p:sp>
+        <p:nvSpPr>
+          <p:cNvPr id="7" name="TextBox 6"/>
+          <p:cNvSpPr txBox="1"/>
+          <p:nvPr/>
+        </p:nvSpPr>
+        <p:spPr>
+          <a:xfrm>
+            <a:off x="777240" y="4251960"/>
+            <a:ext cx="3063240" cy="1280160"/>
+          </a:xfrm>
+          <a:prstGeom prst="rect">
+            <a:avLst/>
+          </a:prstGeom>
+          <a:noFill/>
+        </p:spPr>
+        <p:txBody>
+          <a:bodyPr wrap="square" lIns="0" rIns="0" tIns="0" bIns="0" anchor="t">
+            <a:spAutoFit/>
+          </a:bodyPr>
+          <a:lstStyle/>
+          <a:p>
+            <a:pPr algn="l"/>
+            <a:r>
+              <a:rPr sz="1600" b="0">
+                <a:solidFill>
+                  <a:srgbClr val="1A1614"/>
+                </a:solidFill>
+                <a:latin typeface="Calibri"/>
+              </a:rPr>
+              <a:t>Dərsdə sözü tapır,
+quizdə yadında saxlayır.</a:t>
+            </a:r>
+          </a:p>
+        </p:txBody>
+      </p:sp>
+      <p:sp>
+        <p:nvSpPr>
+          <p:cNvPr id="8" name="Rectangle 7"/>
           <p:cNvSpPr/>
           <p:nvPr/>
         </p:nvSpPr>
         <p:spPr>
           <a:xfrm>
-            <a:off x="6217920" y="1463040"/>
-            <a:ext cx="5303520" cy="4297680"/>
+            <a:off x="4343400" y="1371600"/>
+            <a:ext cx="3611880" cy="4617720"/>
           </a:xfrm>
           <a:prstGeom prst="rect">
             <a:avLst/>
@@ -7596,187 +9486,264 @@
           </a:p>
         </p:txBody>
       </p:sp>
-      <p:sp>
-        <p:nvSpPr>
-          <p:cNvPr id="6" name="TextBox 5"/>
-          <p:cNvSpPr txBox="1"/>
-          <p:nvPr/>
-        </p:nvSpPr>
-        <p:spPr>
-          <a:xfrm>
-            <a:off x="914400" y="1737360"/>
-            <a:ext cx="4754880" cy="548640"/>
-          </a:xfrm>
-          <a:prstGeom prst="rect">
-            <a:avLst/>
-          </a:prstGeom>
-          <a:noFill/>
-        </p:spPr>
-        <p:txBody>
-          <a:bodyPr wrap="square" lIns="0" rIns="0" tIns="0" bIns="0" anchor="t"/>
-          <a:lstStyle/>
-          <a:p>
-            <a:pPr algn="l">
-              <a:spcAft>
-                <a:spcPts val="0"/>
-              </a:spcAft>
-            </a:pPr>
-            <a:r>
-              <a:rPr sz="2400" b="1">
+      <p:pic>
+        <p:nvPicPr>
+          <p:cNvPr id="9" name="Picture 8" descr="a6a06ee9-72ad-43b1-a1d5-1b9e357f6ad7.jpg"/>
+          <p:cNvPicPr>
+            <a:picLocks noChangeAspect="1"/>
+          </p:cNvPicPr>
+          <p:nvPr/>
+        </p:nvPicPr>
+        <p:blipFill>
+          <a:blip r:embed="rId3"/>
+          <a:stretch>
+            <a:fillRect/>
+          </a:stretch>
+        </p:blipFill>
+        <p:spPr>
+          <a:xfrm>
+            <a:off x="5212080" y="1645920"/>
+            <a:ext cx="1874519" cy="1874519"/>
+          </a:xfrm>
+          <a:prstGeom prst="rect">
+            <a:avLst/>
+          </a:prstGeom>
+        </p:spPr>
+      </p:pic>
+      <p:sp>
+        <p:nvSpPr>
+          <p:cNvPr id="10" name="TextBox 9"/>
+          <p:cNvSpPr txBox="1"/>
+          <p:nvPr/>
+        </p:nvSpPr>
+        <p:spPr>
+          <a:xfrm>
+            <a:off x="4617720" y="3703320"/>
+            <a:ext cx="3063240" cy="457200"/>
+          </a:xfrm>
+          <a:prstGeom prst="rect">
+            <a:avLst/>
+          </a:prstGeom>
+          <a:noFill/>
+        </p:spPr>
+        <p:txBody>
+          <a:bodyPr wrap="square" lIns="0" rIns="0" tIns="0" bIns="0" anchor="t">
+            <a:spAutoFit/>
+          </a:bodyPr>
+          <a:lstStyle/>
+          <a:p>
+            <a:pPr algn="l"/>
+            <a:r>
+              <a:rPr sz="2200" b="1">
                 <a:solidFill>
                   <a:srgbClr val="9C2F2A"/>
                 </a:solidFill>
                 <a:latin typeface="Calibri"/>
               </a:rPr>
-              <a:t>Mövzu</a:t>
-            </a:r>
-          </a:p>
-        </p:txBody>
-      </p:sp>
-      <p:sp>
-        <p:nvSpPr>
-          <p:cNvPr id="7" name="TextBox 6"/>
-          <p:cNvSpPr txBox="1"/>
-          <p:nvPr/>
-        </p:nvSpPr>
-        <p:spPr>
-          <a:xfrm>
-            <a:off x="914400" y="2468880"/>
-            <a:ext cx="4754880" cy="2743200"/>
-          </a:xfrm>
-          <a:prstGeom prst="rect">
-            <a:avLst/>
-          </a:prstGeom>
-          <a:noFill/>
-        </p:spPr>
-        <p:txBody>
-          <a:bodyPr wrap="square" lIns="0" rIns="0" tIns="0" bIns="0" anchor="t"/>
-          <a:lstStyle/>
-          <a:p>
-            <a:pPr algn="l">
-              <a:spcAft>
-                <a:spcPts val="0"/>
-              </a:spcAft>
-            </a:pPr>
-            <a:r>
-              <a:rPr sz="2000" b="0">
+              <a:t>Müəllim</a:t>
+            </a:r>
+          </a:p>
+        </p:txBody>
+      </p:sp>
+      <p:sp>
+        <p:nvSpPr>
+          <p:cNvPr id="11" name="TextBox 10"/>
+          <p:cNvSpPr txBox="1"/>
+          <p:nvPr/>
+        </p:nvSpPr>
+        <p:spPr>
+          <a:xfrm>
+            <a:off x="4617720" y="4251960"/>
+            <a:ext cx="3063240" cy="1280160"/>
+          </a:xfrm>
+          <a:prstGeom prst="rect">
+            <a:avLst/>
+          </a:prstGeom>
+          <a:noFill/>
+        </p:spPr>
+        <p:txBody>
+          <a:bodyPr wrap="square" lIns="0" rIns="0" tIns="0" bIns="0" anchor="t">
+            <a:spAutoFit/>
+          </a:bodyPr>
+          <a:lstStyle/>
+          <a:p>
+            <a:pPr algn="l"/>
+            <a:r>
+              <a:rPr sz="1600" b="0">
                 <a:solidFill>
                   <a:srgbClr val="1A1614"/>
                 </a:solidFill>
                 <a:latin typeface="Calibri"/>
               </a:rPr>
-              <a:t>«El gücü - sel gücü»
-hələ Əxlaq qutusundadır.
-Bölgü avtomatikdir.
-Əl ilə düzələcək.</a:t>
-            </a:r>
-          </a:p>
-        </p:txBody>
-      </p:sp>
-      <p:sp>
-        <p:nvSpPr>
-          <p:cNvPr id="8" name="TextBox 7"/>
-          <p:cNvSpPr txBox="1"/>
-          <p:nvPr/>
-        </p:nvSpPr>
-        <p:spPr>
-          <a:xfrm>
-            <a:off x="6492240" y="1737360"/>
-            <a:ext cx="4754880" cy="548640"/>
-          </a:xfrm>
-          <a:prstGeom prst="rect">
-            <a:avLst/>
-          </a:prstGeom>
-          <a:noFill/>
-        </p:spPr>
-        <p:txBody>
-          <a:bodyPr wrap="square" lIns="0" rIns="0" tIns="0" bIns="0" anchor="t"/>
-          <a:lstStyle/>
-          <a:p>
-            <a:pPr algn="l">
-              <a:spcAft>
-                <a:spcPts val="0"/>
-              </a:spcAft>
-            </a:pPr>
-            <a:r>
-              <a:rPr sz="2400" b="1">
+              <a:t>Mövzuya görə söz seçir,
+sinifdə oxuyur.</a:t>
+            </a:r>
+          </a:p>
+        </p:txBody>
+      </p:sp>
+      <p:sp>
+        <p:nvSpPr>
+          <p:cNvPr id="12" name="Rectangle 11"/>
+          <p:cNvSpPr/>
+          <p:nvPr/>
+        </p:nvSpPr>
+        <p:spPr>
+          <a:xfrm>
+            <a:off x="8183880" y="1371600"/>
+            <a:ext cx="3611880" cy="4617720"/>
+          </a:xfrm>
+          <a:prstGeom prst="rect">
+            <a:avLst/>
+          </a:prstGeom>
+          <a:solidFill>
+            <a:srgbClr val="FFFFFF"/>
+          </a:solidFill>
+          <a:ln>
+            <a:noFill/>
+          </a:ln>
+        </p:spPr>
+        <p:style>
+          <a:lnRef idx="1">
+            <a:schemeClr val="accent1"/>
+          </a:lnRef>
+          <a:fillRef idx="3">
+            <a:schemeClr val="accent1"/>
+          </a:fillRef>
+          <a:effectRef idx="2">
+            <a:schemeClr val="accent1"/>
+          </a:effectRef>
+          <a:fontRef idx="minor">
+            <a:schemeClr val="lt1"/>
+          </a:fontRef>
+        </p:style>
+        <p:txBody>
+          <a:bodyPr rtlCol="0" anchor="ctr"/>
+          <a:lstStyle/>
+          <a:p>
+            <a:pPr algn="ctr"/>
+          </a:p>
+        </p:txBody>
+      </p:sp>
+      <p:pic>
+        <p:nvPicPr>
+          <p:cNvPr id="13" name="Picture 12" descr="cfb04321-8dfe-4d19-bad4-9bcf2067f00c.jpg"/>
+          <p:cNvPicPr>
+            <a:picLocks noChangeAspect="1"/>
+          </p:cNvPicPr>
+          <p:nvPr/>
+        </p:nvPicPr>
+        <p:blipFill>
+          <a:blip r:embed="rId4"/>
+          <a:stretch>
+            <a:fillRect/>
+          </a:stretch>
+        </p:blipFill>
+        <p:spPr>
+          <a:xfrm>
+            <a:off x="9052560" y="1645920"/>
+            <a:ext cx="1874519" cy="1874519"/>
+          </a:xfrm>
+          <a:prstGeom prst="rect">
+            <a:avLst/>
+          </a:prstGeom>
+        </p:spPr>
+      </p:pic>
+      <p:sp>
+        <p:nvSpPr>
+          <p:cNvPr id="14" name="TextBox 13"/>
+          <p:cNvSpPr txBox="1"/>
+          <p:nvPr/>
+        </p:nvSpPr>
+        <p:spPr>
+          <a:xfrm>
+            <a:off x="8458200" y="3703320"/>
+            <a:ext cx="3063240" cy="457200"/>
+          </a:xfrm>
+          <a:prstGeom prst="rect">
+            <a:avLst/>
+          </a:prstGeom>
+          <a:noFill/>
+        </p:spPr>
+        <p:txBody>
+          <a:bodyPr wrap="square" lIns="0" rIns="0" tIns="0" bIns="0" anchor="t">
+            <a:spAutoFit/>
+          </a:bodyPr>
+          <a:lstStyle/>
+          <a:p>
+            <a:pPr algn="l"/>
+            <a:r>
+              <a:rPr sz="2200" b="1">
                 <a:solidFill>
                   <a:srgbClr val="9C2F2A"/>
                 </a:solidFill>
                 <a:latin typeface="Calibri"/>
               </a:rPr>
-              <a:t>İzah</a:t>
-            </a:r>
-          </a:p>
-        </p:txBody>
-      </p:sp>
-      <p:sp>
-        <p:nvSpPr>
-          <p:cNvPr id="9" name="TextBox 8"/>
-          <p:cNvSpPr txBox="1"/>
-          <p:nvPr/>
-        </p:nvSpPr>
-        <p:spPr>
-          <a:xfrm>
-            <a:off x="6492240" y="2468880"/>
-            <a:ext cx="4754880" cy="2743200"/>
-          </a:xfrm>
-          <a:prstGeom prst="rect">
-            <a:avLst/>
-          </a:prstGeom>
-          <a:noFill/>
-        </p:spPr>
-        <p:txBody>
-          <a:bodyPr wrap="square" lIns="0" rIns="0" tIns="0" bIns="0" anchor="t"/>
-          <a:lstStyle/>
-          <a:p>
-            <a:pPr algn="l">
-              <a:spcAft>
-                <a:spcPts val="0"/>
-              </a:spcAft>
-            </a:pPr>
-            <a:r>
-              <a:rPr sz="2000" b="0">
+              <a:t>Oxucu</a:t>
+            </a:r>
+          </a:p>
+        </p:txBody>
+      </p:sp>
+      <p:sp>
+        <p:nvSpPr>
+          <p:cNvPr id="15" name="TextBox 14"/>
+          <p:cNvSpPr txBox="1"/>
+          <p:nvPr/>
+        </p:nvSpPr>
+        <p:spPr>
+          <a:xfrm>
+            <a:off x="8458200" y="4251960"/>
+            <a:ext cx="3063240" cy="1280160"/>
+          </a:xfrm>
+          <a:prstGeom prst="rect">
+            <a:avLst/>
+          </a:prstGeom>
+          <a:noFill/>
+        </p:spPr>
+        <p:txBody>
+          <a:bodyPr wrap="square" lIns="0" rIns="0" tIns="0" bIns="0" anchor="t">
+            <a:spAutoFit/>
+          </a:bodyPr>
+          <a:lstStyle/>
+          <a:p>
+            <a:pPr algn="l"/>
+            <a:r>
+              <a:rPr sz="1600" b="0">
                 <a:solidFill>
                   <a:srgbClr val="1A1614"/>
                 </a:solidFill>
                 <a:latin typeface="Calibri"/>
               </a:rPr>
-              <a:t>60 sözün izahı yazılıb.
-Qalanı hələ qısadır.
-Məna əl ilə, hissə-hissə
-yazılır.</a:t>
-            </a:r>
-          </a:p>
-        </p:txBody>
-      </p:sp>
-      <p:sp>
-        <p:nvSpPr>
-          <p:cNvPr id="10" name="TextBox 9"/>
-          <p:cNvSpPr txBox="1"/>
-          <p:nvPr/>
-        </p:nvSpPr>
-        <p:spPr>
-          <a:xfrm>
-            <a:off x="548640" y="6446520"/>
-            <a:ext cx="7315200" cy="274320"/>
-          </a:xfrm>
-          <a:prstGeom prst="rect">
-            <a:avLst/>
-          </a:prstGeom>
-          <a:noFill/>
-        </p:spPr>
-        <p:txBody>
-          <a:bodyPr wrap="square" lIns="0" rIns="0" tIns="0" bIns="0" anchor="t"/>
-          <a:lstStyle/>
-          <a:p>
-            <a:pPr algn="l">
-              <a:spcAft>
-                <a:spcPts val="0"/>
-              </a:spcAft>
-            </a:pPr>
-            <a:r>
-              <a:rPr sz="1100" b="0">
+              <a:t>Hər səhər bir öyüd alır,
+istediyi sözü axtarır.</a:t>
+            </a:r>
+          </a:p>
+        </p:txBody>
+      </p:sp>
+      <p:sp>
+        <p:nvSpPr>
+          <p:cNvPr id="16" name="TextBox 15"/>
+          <p:cNvSpPr txBox="1"/>
+          <p:nvPr/>
+        </p:nvSpPr>
+        <p:spPr>
+          <a:xfrm>
+            <a:off x="502920" y="6473952"/>
+            <a:ext cx="7315200" cy="256032"/>
+          </a:xfrm>
+          <a:prstGeom prst="rect">
+            <a:avLst/>
+          </a:prstGeom>
+          <a:noFill/>
+        </p:spPr>
+        <p:txBody>
+          <a:bodyPr wrap="square" lIns="0" rIns="0" tIns="0" bIns="0" anchor="t">
+            <a:spAutoFit/>
+          </a:bodyPr>
+          <a:lstStyle/>
+          <a:p>
+            <a:pPr algn="l"/>
+            <a:r>
+              <a:rPr sz="1200" b="0">
                 <a:solidFill>
                   <a:srgbClr val="6B625A"/>
                 </a:solidFill>
@@ -7789,31 +9756,29 @@
       </p:sp>
       <p:sp>
         <p:nvSpPr>
-          <p:cNvPr id="11" name="TextBox 10"/>
-          <p:cNvSpPr txBox="1"/>
-          <p:nvPr/>
-        </p:nvSpPr>
-        <p:spPr>
-          <a:xfrm>
-            <a:off x="10424160" y="6446520"/>
-            <a:ext cx="1280160" cy="274320"/>
-          </a:xfrm>
-          <a:prstGeom prst="rect">
-            <a:avLst/>
-          </a:prstGeom>
-          <a:noFill/>
-        </p:spPr>
-        <p:txBody>
-          <a:bodyPr wrap="square" lIns="0" rIns="0" tIns="0" bIns="0" anchor="t"/>
-          <a:lstStyle/>
-          <a:p>
-            <a:pPr algn="r">
-              <a:spcAft>
-                <a:spcPts val="0"/>
-              </a:spcAft>
-            </a:pPr>
-            <a:r>
-              <a:rPr sz="1100" b="0">
+          <p:cNvPr id="17" name="TextBox 16"/>
+          <p:cNvSpPr txBox="1"/>
+          <p:nvPr/>
+        </p:nvSpPr>
+        <p:spPr>
+          <a:xfrm>
+            <a:off x="10241280" y="6473952"/>
+            <a:ext cx="1463040" cy="256032"/>
+          </a:xfrm>
+          <a:prstGeom prst="rect">
+            <a:avLst/>
+          </a:prstGeom>
+          <a:noFill/>
+        </p:spPr>
+        <p:txBody>
+          <a:bodyPr wrap="square" lIns="0" rIns="0" tIns="0" bIns="0" anchor="t">
+            <a:spAutoFit/>
+          </a:bodyPr>
+          <a:lstStyle/>
+          <a:p>
+            <a:pPr algn="r"/>
+            <a:r>
+              <a:rPr sz="1200" b="0">
                 <a:solidFill>
                   <a:srgbClr val="6B625A"/>
                 </a:solidFill>
